--- a/deliverables/T07/slides.pptx
+++ b/deliverables/T07/slides.pptx
@@ -21,6 +21,23 @@
     <p:sldId id="269" r:id="rId21"/>
     <p:sldId id="270" r:id="rId22"/>
     <p:sldId id="271" r:id="rId23"/>
+    <p:sldId id="272" r:id="rId24"/>
+    <p:sldId id="273" r:id="rId25"/>
+    <p:sldId id="274" r:id="rId26"/>
+    <p:sldId id="275" r:id="rId27"/>
+    <p:sldId id="276" r:id="rId28"/>
+    <p:sldId id="277" r:id="rId29"/>
+    <p:sldId id="278" r:id="rId30"/>
+    <p:sldId id="279" r:id="rId31"/>
+    <p:sldId id="280" r:id="rId32"/>
+    <p:sldId id="281" r:id="rId33"/>
+    <p:sldId id="282" r:id="rId34"/>
+    <p:sldId id="283" r:id="rId35"/>
+    <p:sldId id="284" r:id="rId36"/>
+    <p:sldId id="285" r:id="rId37"/>
+    <p:sldId id="286" r:id="rId38"/>
+    <p:sldId id="287" r:id="rId39"/>
+    <p:sldId id="288" r:id="rId40"/>
   </p:sldIdLst>
   <p:sldSz cx="12191695" cy="6858000" type="screen4x3"/>
   <p:notesSz cx="6858000" cy="9144000"/>
@@ -517,63 +534,7 @@
           <a:lstStyle/>
           <a:p>
             <a:r>
-              <a:t>### Текст ученику</a:t>
-            </a:r>
-          </a:p>
-          <a:p/>
-          <a:p>
-            <a:r>
-              <a:t>- По заданным валентностям составляю простую формулу.</a:t>
-            </a:r>
-          </a:p>
-          <a:p>
-            <a:r>
-              <a:t>- Нахожу относительную массу по индексам.</a:t>
-            </a:r>
-          </a:p>
-          <a:p>
-            <a:r>
-              <a:t>- Рассчитываю массовую долю элемента.</a:t>
-            </a:r>
-          </a:p>
-          <a:p>
-            <a:r>
-              <a:t>- Сохраняю атомы и массу всей замкнутой системы.</a:t>
-            </a:r>
-          </a:p>
-          <a:p>
-            <a:r>
-              <a:t>- Уравниваю готовую схему; различаю соединение и разложение.</a:t>
-            </a:r>
-          </a:p>
-          <a:p/>
-          <a:p>
-            <a:r>
-              <a:t>Входной вопрос: сколько H и O в 3H₂O? Как найти 25% от 80 г?</a:t>
-            </a:r>
-          </a:p>
-          <a:p/>
-          <a:p>
-            <a:r>
-              <a:t>### Заметки преподавателю</a:t>
-            </a:r>
-          </a:p>
-          <a:p/>
-          <a:p>
-            <a:r>
-              <a:t>Урок 3, 0–10 минут. Взять не более двух вопросов pre-work. Это вход по неделе 1, а не проверка новых понятий до объяснения. Все цели сначала объясняем на этом уроке.</a:t>
-            </a:r>
-          </a:p>
-          <a:p/>
-          <a:p>
-            <a:r>
-              <a:t>### Раскрытие ответа</a:t>
-            </a:r>
-          </a:p>
-          <a:p/>
-          <a:p>
-            <a:r>
-              <a:t>3H₂O: H = 3·2 = 6, O = 3·1 = 3, всего 9 атомов. 80·0,25 = 20 г, целое — 80 г.</a:t>
+              <a:t>Обложка недели.</a:t>
             </a:r>
           </a:p>
         </p:txBody>
@@ -643,70 +604,18 @@
           <a:lstStyle/>
           <a:p>
             <a:r>
-              <a:t>### Текст ученику</a:t>
+              <a:t>Урок 3, L2. Не смешивать относительную массу с массой образца в г. Строение атома и изотопные вычисления не вводим. Все вычисления идут по одной справке, округлённые значения не менять посреди решения.</a:t>
             </a:r>
           </a:p>
           <a:p/>
           <a:p>
             <a:r>
-              <a:t>Дано: **Mg + O₂ → MgO**, условие — нагрев.</a:t>
-            </a:r>
-          </a:p>
-          <a:p/>
-          <a:p>
-            <a:r>
-              <a:t>1. Посчитай атомы по обе стороны.</a:t>
-            </a:r>
-          </a:p>
-          <a:p>
-            <a:r>
-              <a:t>2. Меняй только коэффициенты перед целыми формулами.</a:t>
-            </a:r>
-          </a:p>
-          <a:p>
-            <a:r>
-              <a:t>3. Проверь каждый элемент.</a:t>
-            </a:r>
-          </a:p>
-          <a:p>
-            <a:r>
-              <a:t>4. Возьми наименьшие целые коэффициенты.</a:t>
-            </a:r>
-          </a:p>
-          <a:p/>
-          <a:p>
-            <a:r>
-              <a:t>**2Mg + O₂ → 2MgO.** Mg: 2 = 2; O: 2 = 2.</a:t>
-            </a:r>
-          </a:p>
-          <a:p/>
-          <a:p>
-            <a:r>
-              <a:t>**Соединение:** несколько исходных веществ → одно вещество.</a:t>
-            </a:r>
-          </a:p>
-          <a:p/>
-          <a:p>
-            <a:r>
-              <a:t>### Заметки преподавателю</a:t>
-            </a:r>
-          </a:p>
-          <a:p/>
-          <a:p>
-            <a:r>
-              <a:t>Урок 3, L5. Раскрывать решение по шагам. Тип определяется числом разных веществ слева/справа, а не коэффициентом 2. Спросить: «Можно ли заменить MgO на MgO₂, чтобы сошёлся O?». Все формулы продуктов уже даны.</a:t>
-            </a:r>
-          </a:p>
-          <a:p/>
-          <a:p>
-            <a:r>
-              <a:t>### Раскрытие ответа</a:t>
-            </a:r>
-          </a:p>
-          <a:p/>
-          <a:p>
-            <a:r>
-              <a:t>Нельзя: изменится заданный продукт, это уже другая схема. Для MgO нужен ответ **2 : 1 : 2**; индекс 1 у O в MgO не меняется.</a:t>
+              <a:t>Ответ (следующий слайд):</a:t>
+            </a:r>
+          </a:p>
+          <a:p>
+            <a:r>
+              <a:t>Вклад H в относительную массу H₂O: 2·1 = 2. Индекс показывает число атомов H, Aᵣ — относительную массу одного атома в используемой справке.</a:t>
             </a:r>
           </a:p>
         </p:txBody>
@@ -776,75 +685,13 @@
           <a:lstStyle/>
           <a:p>
             <a:r>
-              <a:t>### Текст ученику</a:t>
+              <a:t>Показать после попытки учеников.</a:t>
             </a:r>
           </a:p>
           <a:p/>
           <a:p>
             <a:r>
-              <a:t>Дано: **CaCO₃ → CaO + CO₂**, условие — нагрев.</a:t>
-            </a:r>
-          </a:p>
-          <a:p/>
-          <a:p>
-            <a:r>
-              <a:t>| Элемент | Слева | Справа |</a:t>
-            </a:r>
-          </a:p>
-          <a:p>
-            <a:r>
-              <a:t>|---|---:|---:|</a:t>
-            </a:r>
-          </a:p>
-          <a:p>
-            <a:r>
-              <a:t>| Ca | 1 | 1 |</a:t>
-            </a:r>
-          </a:p>
-          <a:p>
-            <a:r>
-              <a:t>| C | 1 | 1 |</a:t>
-            </a:r>
-          </a:p>
-          <a:p>
-            <a:r>
-              <a:t>| O | 3 | 1 + 2 = 3 |</a:t>
-            </a:r>
-          </a:p>
-          <a:p/>
-          <a:p>
-            <a:r>
-              <a:t>Коэффициенты **1 : 1 : 1**, единицы обычно не пишем.</a:t>
-            </a:r>
-          </a:p>
-          <a:p/>
-          <a:p>
-            <a:r>
-              <a:t>**Разложение:** одно исходное вещество → несколько веществ.</a:t>
-            </a:r>
-          </a:p>
-          <a:p/>
-          <a:p>
-            <a:r>
-              <a:t>### Заметки преподавателю</a:t>
-            </a:r>
-          </a:p>
-          <a:p/>
-          <a:p>
-            <a:r>
-              <a:t>Урок 3, L5. CaCO₃ дано готовым: это не бинарная формула для получения по алгоритму валентностей. Нагрев — условие над стрелкой, не ещё один реагент. Объяснить разложение до самостоятельной попытки и урока 4.</a:t>
-            </a:r>
-          </a:p>
-          <a:p/>
-          <a:p>
-            <a:r>
-              <a:t>### Раскрытие ответа</a:t>
-            </a:r>
-          </a:p>
-          <a:p/>
-          <a:p>
-            <a:r>
-              <a:t>Схема уже уравнена. Одно вещество CaCO₃ образует CaO и CO₂; это разложение независимо от того, что коэффициенты равны 1.</a:t>
+              <a:t>Вклад H в относительную массу H₂O: 2·1 = 2. Индекс показывает число атомов H, Aᵣ — относительную массу одного атома в используемой справке.</a:t>
             </a:r>
           </a:p>
         </p:txBody>
@@ -914,55 +761,18 @@
           <a:lstStyle/>
           <a:p>
             <a:r>
-              <a:t>### Текст ученику</a:t>
+              <a:t>Урок 3, L2. Показать два полностью разобранных примера. Коэффициент считает единицы, Mᵣ рассчитывается по одной формуле. Не заменять понятие относительной массы величиной с г/моль.</a:t>
             </a:r>
           </a:p>
           <a:p/>
           <a:p>
             <a:r>
-              <a:t>**L6.** Na(I), O(II): составь простую формулу и проверь валентности.</a:t>
-            </a:r>
-          </a:p>
-          <a:p/>
-          <a:p>
-            <a:r>
-              <a:t>**L7.** CaO: найди относительную формульную массу и ω(O) в процентах. Aᵣ(Ca) = 40, Aᵣ(O) = 16.</a:t>
-            </a:r>
-          </a:p>
-          <a:p/>
-          <a:p>
-            <a:r>
-              <a:t>**L8.** Mg + O₂ → MgO: уравняй и назови тип.</a:t>
-            </a:r>
-          </a:p>
-          <a:p/>
-          <a:p>
-            <a:r>
-              <a:t>До урока 4: G1–G3 из ДЗ, **15 минут**. Запиши один вопрос, который остался.</a:t>
-            </a:r>
-          </a:p>
-          <a:p/>
-          <a:p>
-            <a:r>
-              <a:t>### Заметки преподавателю</a:t>
-            </a:r>
-          </a:p>
-          <a:p/>
-          <a:p>
-            <a:r>
-              <a:t>Урок 3, 80–90 минут. На X — 4 минуты попытка и 3 минуты ключ; на вопросы/назначение ДЗ — 3 минуты. Критерии 8 учебных баллов в плане урока. Ответы X не открывать до попытки. Не назначать всю оставшуюся домашнюю работу между уроками.</a:t>
-            </a:r>
-          </a:p>
-          <a:p/>
-          <a:p>
-            <a:r>
-              <a:t>### Раскрытие ответа</a:t>
-            </a:r>
-          </a:p>
-          <a:p/>
-          <a:p>
-            <a:r>
-              <a:t>L6: **Na₂O**, 2·I = 1·II = 2. L7: Mᵣ = **56**; ω(O) = 16/56 · 100% ≈ **28,6%**. L8: **2Mg + O₂ → 2MgO**, соединение; Mg 2 = 2, O 2 = 2.</a:t>
+              <a:t>Ответ (следующий слайд):</a:t>
+            </a:r>
+          </a:p>
+          <a:p>
+            <a:r>
+              <a:t>**18**, коэффициент 3 не включаем. Масса произвольного образца воды в граммах из такой записи не известна.</a:t>
             </a:r>
           </a:p>
         </p:txBody>
@@ -1032,49 +842,13 @@
           <a:lstStyle/>
           <a:p>
             <a:r>
-              <a:t>### Текст ученику</a:t>
+              <a:t>Показать после попытки учеников.</a:t>
             </a:r>
           </a:p>
           <a:p/>
           <a:p>
             <a:r>
-              <a:t>**L9.** Ca(II), O(II): формула с наименьшими индексами и относительная формульная масса. Aᵣ(Ca) = 40, O = 16.</a:t>
-            </a:r>
-          </a:p>
-          <a:p/>
-          <a:p>
-            <a:r>
-              <a:t>**L10.** а) MgO: найди ω(O) в %. Aᵣ(Mg) = 24, O = 16. б) CaCO₃ → CaO + CO₂ при нагревании: проверь коэффициенты и назови тип.</a:t>
-            </a:r>
-          </a:p>
-          <a:p/>
-          <a:p>
-            <a:r>
-              <a:t>Самопроверка: **индексы → вся относительная масса → вклад элемента → коэффициенты → атомы → тип**.</a:t>
-            </a:r>
-          </a:p>
-          <a:p/>
-          <a:p>
-            <a:r>
-              <a:t>### Заметки преподавателю</a:t>
-            </a:r>
-          </a:p>
-          <a:p/>
-          <a:p>
-            <a:r>
-              <a:t>Урок 4, 0–20 минут. Сначала 5 минут воспроизведение правил, затем L9 7 минут и L10 8. В 20–35 минут разобрать G1–G3 по точным условиям плана урока 4; слайд держать как памятку, не заменять разбор новой лекцией.</a:t>
-            </a:r>
-          </a:p>
-          <a:p/>
-          <a:p>
-            <a:r>
-              <a:t>### Раскрытие ответа</a:t>
-            </a:r>
-          </a:p>
-          <a:p/>
-          <a:p>
-            <a:r>
-              <a:t>L9: **CaO**, 1·II = 1·II; Mᵣ = **56**. L10: **40%**; CaCO₃ → CaO + CO₂, коэффициенты **1 : 1 : 1**, O 3 = 1 + 2, разложение.</a:t>
+              <a:t>**18**, коэффициент 3 не включаем. Масса произвольного образца воды в граммах из такой записи не известна.</a:t>
             </a:r>
           </a:p>
         </p:txBody>
@@ -1144,49 +918,18 @@
           <a:lstStyle/>
           <a:p>
             <a:r>
-              <a:t>### Текст ученику</a:t>
+              <a:t>Урок 3, L3. Произнесённое «часть/целое» связываем с процентами недели 1. N в этой формуле обозначает число атомов по индексу; других смыслов символа не вводим. Формула относится к составу чистого вещества.</a:t>
             </a:r>
           </a:p>
           <a:p/>
           <a:p>
             <a:r>
-              <a:t>**L11.** Даны Mg(II), Na(I), O(II). Составь формулы Mg/O и Na/O, проверь валентности.</a:t>
-            </a:r>
-          </a:p>
-          <a:p/>
-          <a:p>
-            <a:r>
-              <a:t>**L12.** Для данной Al₂O₃ найди Mᵣ и ω(O) в %. Проверь по доле Al. Aᵣ(Al) = 27, Aᵣ(O) = 16.</a:t>
-            </a:r>
-          </a:p>
-          <a:p/>
-          <a:p>
-            <a:r>
-              <a:t>Строки решения: **индекс · Aᵣ → сумма → вклад O / сумма → процент**.</a:t>
-            </a:r>
-          </a:p>
-          <a:p/>
-          <a:p>
-            <a:r>
-              <a:t>### Заметки преподавателю</a:t>
-            </a:r>
-          </a:p>
-          <a:p/>
-          <a:p>
-            <a:r>
-              <a:t>Урок 4, 35–50 минут. L11 — 6 минут, L12 — 9. Справка и алгоритм остаются видимыми, ключ раскрывается после шага ученика. Для поддержки дать таблицу «элемент / индекс / Aᵣ / произведение» без готовых произведений.</a:t>
-            </a:r>
-          </a:p>
-          <a:p/>
-          <a:p>
-            <a:r>
-              <a:t>### Раскрытие ответа</a:t>
-            </a:r>
-          </a:p>
-          <a:p/>
-          <a:p>
-            <a:r>
-              <a:t>L11: **MgO**, 1·II = 1·II; **Na₂O**, 2·I = 1·II. L12: Mᵣ = 54 + 48 = **102**; ω(O) = 48/102 · 100% ≈ **47,1%**; ω(Al) ≈ **52,9%**; сумма ≈ 100%.</a:t>
+              <a:t>Ответ (следующий слайд):</a:t>
+            </a:r>
+          </a:p>
+          <a:p>
+            <a:r>
+              <a:t>N = **2**, вклад H = 2·1 = 2. Знаменатель Mᵣ(H₂O) = 18; ω(H) = 2/18 ≈ 0,1111, или 11,1%.</a:t>
             </a:r>
           </a:p>
         </p:txBody>
@@ -1256,59 +999,13 @@
           <a:lstStyle/>
           <a:p>
             <a:r>
-              <a:t>### Текст ученику</a:t>
+              <a:t>Показать после попытки учеников.</a:t>
             </a:r>
           </a:p>
           <a:p/>
           <a:p>
             <a:r>
-              <a:t>Подбери наименьшие целые коэффициенты. Сохрани все формулы, проверь каждый элемент, назови соединение или разложение.</a:t>
-            </a:r>
-          </a:p>
-          <a:p/>
-          <a:p>
-            <a:r>
-              <a:t>- **L13:** Al + O₂ → Al₂O₃, нагрев.</a:t>
-            </a:r>
-          </a:p>
-          <a:p>
-            <a:r>
-              <a:t>- **L14:** H₂O₂ → H₂O + O₂, катализатор — данное условие.</a:t>
-            </a:r>
-          </a:p>
-          <a:p>
-            <a:r>
-              <a:t>- **L16:** H₂ + Cl₂ → HCl, инициирование светом.</a:t>
-            </a:r>
-          </a:p>
-          <a:p/>
-          <a:p>
-            <a:r>
-              <a:t>Схемы решаем **на бумаге**; домашние опыты с нагревом и газами не назначаются.</a:t>
-            </a:r>
-          </a:p>
-          <a:p/>
-          <a:p>
-            <a:r>
-              <a:t>### Заметки преподавателю</a:t>
-            </a:r>
-          </a:p>
-          <a:p/>
-          <a:p>
-            <a:r>
-              <a:t>Урок 4: L13/L14 в 50–65 минут, L16 в 65–78 вместе с L15 следующего слайда. Показывать по одной схеме. Катализатор отмечаем как данное условие, без механизма и нового тематического раздела.</a:t>
-            </a:r>
-          </a:p>
-          <a:p/>
-          <a:p>
-            <a:r>
-              <a:t>### Раскрытие ответа</a:t>
-            </a:r>
-          </a:p>
-          <a:p/>
-          <a:p>
-            <a:r>
-              <a:t>L13: **4Al + 3O₂ → 2Al₂O₃**, Al 4 = 4, O 6 = 6, соединение. L14: **2H₂O₂ → 2H₂O + O₂**, H 4 = 4, O 4 = 2 + 2, разложение. L16: **H₂ + Cl₂ → 2HCl**, H 2 = 2, Cl 2 = 2, соединение.</a:t>
+              <a:t>N = **2**, вклад H = 2·1 = 2. Знаменатель Mᵣ(H₂O) = 18; ω(H) = 2/18 ≈ 0,1111, или 11,1%.</a:t>
             </a:r>
           </a:p>
         </p:txBody>
@@ -1378,49 +1075,251 @@
           <a:lstStyle/>
           <a:p>
             <a:r>
-              <a:t>### Текст ученику</a:t>
+              <a:t>Урок 3, L3. В дроби H₂O не сравнивать только O с H; знаменатель включает всю формулу. Запись 0,4% вместо 40% — отдельная ошибка единицы представления.</a:t>
             </a:r>
           </a:p>
           <a:p/>
           <a:p>
             <a:r>
-              <a:t>**L15.** В замкнутой системе 10 г CaCO₃ полностью разложились на CaO и CO₂. Масса CaO — 5,6 г, газ остался в системе. Найди массу CO₂ и суммарную массу продуктов. Почему в открытом сосуде нельзя сравнить только остаток с начальной массой?</a:t>
+              <a:t>Ответ (следующий слайд):</a:t>
+            </a:r>
+          </a:p>
+          <a:p>
+            <a:r>
+              <a:t>ω(Mg) = 24/40 = 0,6 = **60%**; 40% + 60% = 100%. Масса конкретного образца пока не задана.</a:t>
+            </a:r>
+          </a:p>
+        </p:txBody>
+      </p:sp>
+      <p:sp>
+        <p:nvSpPr>
+          <p:cNvPr id="4" name="Slide Number Placeholder 3"/>
+          <p:cNvSpPr>
+            <a:spLocks noGrp="1"/>
+          </p:cNvSpPr>
+          <p:nvPr>
+            <p:ph type="sldNum" idx="5" sz="quarter"/>
+          </p:nvPr>
+        </p:nvSpPr>
+        <p:spPr/>
+      </p:sp>
+    </p:spTree>
+  </p:cSld>
+  <p:clrMapOvr>
+    <a:masterClrMapping/>
+  </p:clrMapOvr>
+</p:notes>
+</file>
+
+<file path=ppt/notesSlides/notesSlide17.xml><?xml version="1.0" encoding="utf-8"?>
+<p:notes xmlns:a="http://schemas.openxmlformats.org/drawingml/2006/main" xmlns:p="http://schemas.openxmlformats.org/presentationml/2006/main" xmlns:r="http://schemas.openxmlformats.org/officeDocument/2006/relationships">
+  <p:cSld>
+    <p:spTree>
+      <p:nvGrpSpPr>
+        <p:cNvPr id="1" name=""/>
+        <p:cNvGrpSpPr/>
+        <p:nvPr/>
+      </p:nvGrpSpPr>
+      <p:grpSpPr>
+        <a:xfrm>
+          <a:off x="0" y="0"/>
+          <a:ext cx="0" cy="0"/>
+          <a:chOff x="0" y="0"/>
+          <a:chExt cx="0" cy="0"/>
+        </a:xfrm>
+      </p:grpSpPr>
+      <p:sp>
+        <p:nvSpPr>
+          <p:cNvPr id="2" name="Slide Image Placeholder 1"/>
+          <p:cNvSpPr>
+            <a:spLocks noGrp="1"/>
+          </p:cNvSpPr>
+          <p:nvPr>
+            <p:ph type="sldImg" idx="2"/>
+          </p:nvPr>
+        </p:nvSpPr>
+        <p:spPr/>
+      </p:sp>
+      <p:sp>
+        <p:nvSpPr>
+          <p:cNvPr id="3" name="Notes Placeholder 2"/>
+          <p:cNvSpPr>
+            <a:spLocks noGrp="1"/>
+          </p:cNvSpPr>
+          <p:nvPr>
+            <p:ph type="body" idx="3" sz="quarter"/>
+          </p:nvPr>
+        </p:nvSpPr>
+        <p:spPr/>
+        <p:txBody>
+          <a:bodyPr/>
+          <a:lstStyle/>
+          <a:p>
+            <a:r>
+              <a:t>Показать после попытки учеников.</a:t>
             </a:r>
           </a:p>
           <a:p/>
           <a:p>
             <a:r>
-              <a:t>После практики: **контроль 10 минут, 78–88**. До сдачи ключ закрыт.</a:t>
+              <a:t>ω(Mg) = 24/40 = 0,6 = **60%**; 40% + 60% = 100%. Масса конкретного образца пока не задана.</a:t>
+            </a:r>
+          </a:p>
+        </p:txBody>
+      </p:sp>
+      <p:sp>
+        <p:nvSpPr>
+          <p:cNvPr id="4" name="Slide Number Placeholder 3"/>
+          <p:cNvSpPr>
+            <a:spLocks noGrp="1"/>
+          </p:cNvSpPr>
+          <p:nvPr>
+            <p:ph type="sldNum" idx="5" sz="quarter"/>
+          </p:nvPr>
+        </p:nvSpPr>
+        <p:spPr/>
+      </p:sp>
+    </p:spTree>
+  </p:cSld>
+  <p:clrMapOvr>
+    <a:masterClrMapping/>
+  </p:clrMapOvr>
+</p:notes>
+</file>
+
+<file path=ppt/notesSlides/notesSlide18.xml><?xml version="1.0" encoding="utf-8"?>
+<p:notes xmlns:a="http://schemas.openxmlformats.org/drawingml/2006/main" xmlns:p="http://schemas.openxmlformats.org/presentationml/2006/main" xmlns:r="http://schemas.openxmlformats.org/officeDocument/2006/relationships">
+  <p:cSld>
+    <p:spTree>
+      <p:nvGrpSpPr>
+        <p:cNvPr id="1" name=""/>
+        <p:cNvGrpSpPr/>
+        <p:nvPr/>
+      </p:nvGrpSpPr>
+      <p:grpSpPr>
+        <a:xfrm>
+          <a:off x="0" y="0"/>
+          <a:ext cx="0" cy="0"/>
+          <a:chOff x="0" y="0"/>
+          <a:chExt cx="0" cy="0"/>
+        </a:xfrm>
+      </p:grpSpPr>
+      <p:sp>
+        <p:nvSpPr>
+          <p:cNvPr id="2" name="Slide Image Placeholder 1"/>
+          <p:cNvSpPr>
+            <a:spLocks noGrp="1"/>
+          </p:cNvSpPr>
+          <p:nvPr>
+            <p:ph type="sldImg" idx="2"/>
+          </p:nvPr>
+        </p:nvSpPr>
+        <p:spPr/>
+      </p:sp>
+      <p:sp>
+        <p:nvSpPr>
+          <p:cNvPr id="3" name="Notes Placeholder 2"/>
+          <p:cNvSpPr>
+            <a:spLocks noGrp="1"/>
+          </p:cNvSpPr>
+          <p:nvPr>
+            <p:ph type="body" idx="3" sz="quarter"/>
+          </p:nvPr>
+        </p:nvSpPr>
+        <p:spPr/>
+        <p:txBody>
+          <a:bodyPr/>
+          <a:lstStyle/>
+          <a:p>
+            <a:r>
+              <a:t>Урок 3, L4. Сначала определить границу системы и обмен веществом. Числа и полное превращение даны условием; отношения масс из коэффициентов не выводим. Это задача на бумаге, не опыт с нагреванием сосуда.</a:t>
             </a:r>
           </a:p>
           <a:p/>
           <a:p>
             <a:r>
-              <a:t>После урока: **G4–G8 + один A/B/C — 50 минут**, исправления 25 минут, повторение 15 минут.</a:t>
+              <a:t>Ответ (следующий слайд):</a:t>
+            </a:r>
+          </a:p>
+          <a:p>
+            <a:r>
+              <a:t>m(MgO) = 12 + 8 = **20 г**. В открытом сосуде выход газа меняет массу оставшегося содержимого, не нарушая общего сохранения массы.</a:t>
+            </a:r>
+          </a:p>
+        </p:txBody>
+      </p:sp>
+      <p:sp>
+        <p:nvSpPr>
+          <p:cNvPr id="4" name="Slide Number Placeholder 3"/>
+          <p:cNvSpPr>
+            <a:spLocks noGrp="1"/>
+          </p:cNvSpPr>
+          <p:nvPr>
+            <p:ph type="sldNum" idx="5" sz="quarter"/>
+          </p:nvPr>
+        </p:nvSpPr>
+        <p:spPr/>
+      </p:sp>
+    </p:spTree>
+  </p:cSld>
+  <p:clrMapOvr>
+    <a:masterClrMapping/>
+  </p:clrMapOvr>
+</p:notes>
+</file>
+
+<file path=ppt/notesSlides/notesSlide19.xml><?xml version="1.0" encoding="utf-8"?>
+<p:notes xmlns:a="http://schemas.openxmlformats.org/drawingml/2006/main" xmlns:p="http://schemas.openxmlformats.org/presentationml/2006/main" xmlns:r="http://schemas.openxmlformats.org/officeDocument/2006/relationships">
+  <p:cSld>
+    <p:spTree>
+      <p:nvGrpSpPr>
+        <p:cNvPr id="1" name=""/>
+        <p:cNvGrpSpPr/>
+        <p:nvPr/>
+      </p:nvGrpSpPr>
+      <p:grpSpPr>
+        <a:xfrm>
+          <a:off x="0" y="0"/>
+          <a:ext cx="0" cy="0"/>
+          <a:chOff x="0" y="0"/>
+          <a:chExt cx="0" cy="0"/>
+        </a:xfrm>
+      </p:grpSpPr>
+      <p:sp>
+        <p:nvSpPr>
+          <p:cNvPr id="2" name="Slide Image Placeholder 1"/>
+          <p:cNvSpPr>
+            <a:spLocks noGrp="1"/>
+          </p:cNvSpPr>
+          <p:nvPr>
+            <p:ph type="sldImg" idx="2"/>
+          </p:nvPr>
+        </p:nvSpPr>
+        <p:spPr/>
+      </p:sp>
+      <p:sp>
+        <p:nvSpPr>
+          <p:cNvPr id="3" name="Notes Placeholder 2"/>
+          <p:cNvSpPr>
+            <a:spLocks noGrp="1"/>
+          </p:cNvSpPr>
+          <p:nvPr>
+            <p:ph type="body" idx="3" sz="quarter"/>
+          </p:nvPr>
+        </p:nvSpPr>
+        <p:spPr/>
+        <p:txBody>
+          <a:bodyPr/>
+          <a:lstStyle/>
+          <a:p>
+            <a:r>
+              <a:t>Показать после попытки учеников.</a:t>
             </a:r>
           </a:p>
           <a:p/>
           <a:p>
             <a:r>
-              <a:t>### Заметки преподавателю</a:t>
-            </a:r>
-          </a:p>
-          <a:p/>
-          <a:p>
-            <a:r>
-              <a:t>Урок 4, L15 в 65–78 минут вместе с L16; затем quiz 78–88 и итог 88–90. Не требовать расчёта массы CaO по уравнению: она дана. На время контроля убрать раскрытие с экрана и выдать отдельно ученическую часть [quiz](quiz.md). Назначение ДЗ открывать в конце; суммарный самостоятельный бюджет недели 150 минут.</a:t>
-            </a:r>
-          </a:p>
-          <a:p/>
-          <a:p>
-            <a:r>
-              <a:t>### Раскрытие ответа</a:t>
-            </a:r>
-          </a:p>
-          <a:p/>
-          <a:p>
-            <a:r>
-              <a:t>L15: m(CO₂) = 10 − 5,6 = **4,4 г**; сумма продуктов **10 г**. В открытом сосуде газ ушёл за выбранную границу; масса остатка 5,6 г не равна массе всех продуктов. Ключи и частичные баллы контроля — в преподавательской части quiz; не показывать их до сдачи.</a:t>
+              <a:t>m(MgO) = 12 + 8 = **20 г**. В открытом сосуде выход газа меняет массу оставшегося содержимого, не нарушая общего сохранения массы.</a:t>
             </a:r>
           </a:p>
         </p:txBody>
@@ -1490,69 +1389,803 @@
           <a:lstStyle/>
           <a:p>
             <a:r>
-              <a:t>### Текст ученику</a:t>
+              <a:t>Урок 3, 0–10 минут. Взять не более двух вопросов pre-work. Это вход по неделе 1, а не проверка новых понятий до объяснения. Все цели сначала объясняем на этом уроке.</a:t>
             </a:r>
           </a:p>
           <a:p/>
           <a:p>
             <a:r>
-              <a:t>Бинарное соединение содержит два элемента. В наших простых формулах число атомов × заданная валентность должно совпасть для обоих элементов.</a:t>
+              <a:t>Ответ (следующий слайд):</a:t>
+            </a:r>
+          </a:p>
+          <a:p>
+            <a:r>
+              <a:t>3H₂O: H = 3·2 = 6, O = 3·1 = 3, всего 9 атомов. 80·0,25 = 20 г, целое — 80 г.</a:t>
+            </a:r>
+          </a:p>
+        </p:txBody>
+      </p:sp>
+      <p:sp>
+        <p:nvSpPr>
+          <p:cNvPr id="4" name="Slide Number Placeholder 3"/>
+          <p:cNvSpPr>
+            <a:spLocks noGrp="1"/>
+          </p:cNvSpPr>
+          <p:nvPr>
+            <p:ph type="sldNum" idx="5" sz="quarter"/>
+          </p:nvPr>
+        </p:nvSpPr>
+        <p:spPr/>
+      </p:sp>
+    </p:spTree>
+  </p:cSld>
+  <p:clrMapOvr>
+    <a:masterClrMapping/>
+  </p:clrMapOvr>
+</p:notes>
+</file>
+
+<file path=ppt/notesSlides/notesSlide20.xml><?xml version="1.0" encoding="utf-8"?>
+<p:notes xmlns:a="http://schemas.openxmlformats.org/drawingml/2006/main" xmlns:p="http://schemas.openxmlformats.org/presentationml/2006/main" xmlns:r="http://schemas.openxmlformats.org/officeDocument/2006/relationships">
+  <p:cSld>
+    <p:spTree>
+      <p:nvGrpSpPr>
+        <p:cNvPr id="1" name=""/>
+        <p:cNvGrpSpPr/>
+        <p:nvPr/>
+      </p:nvGrpSpPr>
+      <p:grpSpPr>
+        <a:xfrm>
+          <a:off x="0" y="0"/>
+          <a:ext cx="0" cy="0"/>
+          <a:chOff x="0" y="0"/>
+          <a:chExt cx="0" cy="0"/>
+        </a:xfrm>
+      </p:grpSpPr>
+      <p:sp>
+        <p:nvSpPr>
+          <p:cNvPr id="2" name="Slide Image Placeholder 1"/>
+          <p:cNvSpPr>
+            <a:spLocks noGrp="1"/>
+          </p:cNvSpPr>
+          <p:nvPr>
+            <p:ph type="sldImg" idx="2"/>
+          </p:nvPr>
+        </p:nvSpPr>
+        <p:spPr/>
+      </p:sp>
+      <p:sp>
+        <p:nvSpPr>
+          <p:cNvPr id="3" name="Notes Placeholder 2"/>
+          <p:cNvSpPr>
+            <a:spLocks noGrp="1"/>
+          </p:cNvSpPr>
+          <p:nvPr>
+            <p:ph type="body" idx="3" sz="quarter"/>
+          </p:nvPr>
+        </p:nvSpPr>
+        <p:spPr/>
+        <p:txBody>
+          <a:bodyPr/>
+          <a:lstStyle/>
+          <a:p>
+            <a:r>
+              <a:t>Урок 3, L5. Раскрывать решение по шагам. Тип определяется числом разных веществ слева/справа, а не коэффициентом 2. Спросить: «Можно ли заменить MgO на MgO₂, чтобы сошёлся O?». Все формулы продуктов уже даны.</a:t>
             </a:r>
           </a:p>
           <a:p/>
           <a:p>
             <a:r>
-              <a:t>1. Запиши символы в заданном порядке.</a:t>
-            </a:r>
-          </a:p>
-          <a:p>
-            <a:r>
-              <a:t>2. Найди НОК двух валентностей.</a:t>
-            </a:r>
-          </a:p>
-          <a:p>
-            <a:r>
-              <a:t>3. Раздели НОК на каждую валентность — получишь индексы.</a:t>
-            </a:r>
-          </a:p>
-          <a:p>
-            <a:r>
-              <a:t>4. Возьми наименьшие целые индексы; 1 не пиши.</a:t>
-            </a:r>
-          </a:p>
-          <a:p>
-            <a:r>
-              <a:t>5. Проверь равенство произведений.</a:t>
+              <a:t>Ответ (следующий слайд):</a:t>
+            </a:r>
+          </a:p>
+          <a:p>
+            <a:r>
+              <a:t>Нельзя: изменится заданный продукт, это уже другая схема. Для MgO нужен ответ **2 : 1 : 2**; индекс 1 у O в MgO не меняется.</a:t>
+            </a:r>
+          </a:p>
+        </p:txBody>
+      </p:sp>
+      <p:sp>
+        <p:nvSpPr>
+          <p:cNvPr id="4" name="Slide Number Placeholder 3"/>
+          <p:cNvSpPr>
+            <a:spLocks noGrp="1"/>
+          </p:cNvSpPr>
+          <p:nvPr>
+            <p:ph type="sldNum" idx="5" sz="quarter"/>
+          </p:nvPr>
+        </p:nvSpPr>
+        <p:spPr/>
+      </p:sp>
+    </p:spTree>
+  </p:cSld>
+  <p:clrMapOvr>
+    <a:masterClrMapping/>
+  </p:clrMapOvr>
+</p:notes>
+</file>
+
+<file path=ppt/notesSlides/notesSlide21.xml><?xml version="1.0" encoding="utf-8"?>
+<p:notes xmlns:a="http://schemas.openxmlformats.org/drawingml/2006/main" xmlns:p="http://schemas.openxmlformats.org/presentationml/2006/main" xmlns:r="http://schemas.openxmlformats.org/officeDocument/2006/relationships">
+  <p:cSld>
+    <p:spTree>
+      <p:nvGrpSpPr>
+        <p:cNvPr id="1" name=""/>
+        <p:cNvGrpSpPr/>
+        <p:nvPr/>
+      </p:nvGrpSpPr>
+      <p:grpSpPr>
+        <a:xfrm>
+          <a:off x="0" y="0"/>
+          <a:ext cx="0" cy="0"/>
+          <a:chOff x="0" y="0"/>
+          <a:chExt cx="0" cy="0"/>
+        </a:xfrm>
+      </p:grpSpPr>
+      <p:sp>
+        <p:nvSpPr>
+          <p:cNvPr id="2" name="Slide Image Placeholder 1"/>
+          <p:cNvSpPr>
+            <a:spLocks noGrp="1"/>
+          </p:cNvSpPr>
+          <p:nvPr>
+            <p:ph type="sldImg" idx="2"/>
+          </p:nvPr>
+        </p:nvSpPr>
+        <p:spPr/>
+      </p:sp>
+      <p:sp>
+        <p:nvSpPr>
+          <p:cNvPr id="3" name="Notes Placeholder 2"/>
+          <p:cNvSpPr>
+            <a:spLocks noGrp="1"/>
+          </p:cNvSpPr>
+          <p:nvPr>
+            <p:ph type="body" idx="3" sz="quarter"/>
+          </p:nvPr>
+        </p:nvSpPr>
+        <p:spPr/>
+        <p:txBody>
+          <a:bodyPr/>
+          <a:lstStyle/>
+          <a:p>
+            <a:r>
+              <a:t>Показать после попытки учеников.</a:t>
             </a:r>
           </a:p>
           <a:p/>
           <a:p>
             <a:r>
-              <a:t>Число II в условии — валентность, а не индекс в формуле.</a:t>
+              <a:t>Нельзя: изменится заданный продукт, это уже другая схема. Для MgO нужен ответ **2 : 1 : 2**; индекс 1 у O в MgO не меняется.</a:t>
+            </a:r>
+          </a:p>
+        </p:txBody>
+      </p:sp>
+      <p:sp>
+        <p:nvSpPr>
+          <p:cNvPr id="4" name="Slide Number Placeholder 3"/>
+          <p:cNvSpPr>
+            <a:spLocks noGrp="1"/>
+          </p:cNvSpPr>
+          <p:nvPr>
+            <p:ph type="sldNum" idx="5" sz="quarter"/>
+          </p:nvPr>
+        </p:nvSpPr>
+        <p:spPr/>
+      </p:sp>
+    </p:spTree>
+  </p:cSld>
+  <p:clrMapOvr>
+    <a:masterClrMapping/>
+  </p:clrMapOvr>
+</p:notes>
+</file>
+
+<file path=ppt/notesSlides/notesSlide22.xml><?xml version="1.0" encoding="utf-8"?>
+<p:notes xmlns:a="http://schemas.openxmlformats.org/drawingml/2006/main" xmlns:p="http://schemas.openxmlformats.org/presentationml/2006/main" xmlns:r="http://schemas.openxmlformats.org/officeDocument/2006/relationships">
+  <p:cSld>
+    <p:spTree>
+      <p:nvGrpSpPr>
+        <p:cNvPr id="1" name=""/>
+        <p:cNvGrpSpPr/>
+        <p:nvPr/>
+      </p:nvGrpSpPr>
+      <p:grpSpPr>
+        <a:xfrm>
+          <a:off x="0" y="0"/>
+          <a:ext cx="0" cy="0"/>
+          <a:chOff x="0" y="0"/>
+          <a:chExt cx="0" cy="0"/>
+        </a:xfrm>
+      </p:grpSpPr>
+      <p:sp>
+        <p:nvSpPr>
+          <p:cNvPr id="2" name="Slide Image Placeholder 1"/>
+          <p:cNvSpPr>
+            <a:spLocks noGrp="1"/>
+          </p:cNvSpPr>
+          <p:nvPr>
+            <p:ph type="sldImg" idx="2"/>
+          </p:nvPr>
+        </p:nvSpPr>
+        <p:spPr/>
+      </p:sp>
+      <p:sp>
+        <p:nvSpPr>
+          <p:cNvPr id="3" name="Notes Placeholder 2"/>
+          <p:cNvSpPr>
+            <a:spLocks noGrp="1"/>
+          </p:cNvSpPr>
+          <p:nvPr>
+            <p:ph type="body" idx="3" sz="quarter"/>
+          </p:nvPr>
+        </p:nvSpPr>
+        <p:spPr/>
+        <p:txBody>
+          <a:bodyPr/>
+          <a:lstStyle/>
+          <a:p>
+            <a:r>
+              <a:t>Урок 3, L5. CaCO₃ дано готовым: это не бинарная формула для получения по алгоритму валентностей. Нагрев — условие над стрелкой, не ещё один реагент. Объяснить разложение до самостоятельной попытки и урока 4.</a:t>
             </a:r>
           </a:p>
           <a:p/>
           <a:p>
             <a:r>
-              <a:t>### Заметки преподавателю</a:t>
+              <a:t>Ответ (следующий слайд):</a:t>
+            </a:r>
+          </a:p>
+          <a:p>
+            <a:r>
+              <a:t>Схема уже уравнена. Одно вещество CaCO₃ образует CaO и CO₂; это разложение независимо от того, что коэффициенты равны 1.</a:t>
+            </a:r>
+          </a:p>
+        </p:txBody>
+      </p:sp>
+      <p:sp>
+        <p:nvSpPr>
+          <p:cNvPr id="4" name="Slide Number Placeholder 3"/>
+          <p:cNvSpPr>
+            <a:spLocks noGrp="1"/>
+          </p:cNvSpPr>
+          <p:nvPr>
+            <p:ph type="sldNum" idx="5" sz="quarter"/>
+          </p:nvPr>
+        </p:nvSpPr>
+        <p:spPr/>
+      </p:sp>
+    </p:spTree>
+  </p:cSld>
+  <p:clrMapOvr>
+    <a:masterClrMapping/>
+  </p:clrMapOvr>
+</p:notes>
+</file>
+
+<file path=ppt/notesSlides/notesSlide23.xml><?xml version="1.0" encoding="utf-8"?>
+<p:notes xmlns:a="http://schemas.openxmlformats.org/drawingml/2006/main" xmlns:p="http://schemas.openxmlformats.org/presentationml/2006/main" xmlns:r="http://schemas.openxmlformats.org/officeDocument/2006/relationships">
+  <p:cSld>
+    <p:spTree>
+      <p:nvGrpSpPr>
+        <p:cNvPr id="1" name=""/>
+        <p:cNvGrpSpPr/>
+        <p:nvPr/>
+      </p:nvGrpSpPr>
+      <p:grpSpPr>
+        <a:xfrm>
+          <a:off x="0" y="0"/>
+          <a:ext cx="0" cy="0"/>
+          <a:chOff x="0" y="0"/>
+          <a:chExt cx="0" cy="0"/>
+        </a:xfrm>
+      </p:grpSpPr>
+      <p:sp>
+        <p:nvSpPr>
+          <p:cNvPr id="2" name="Slide Image Placeholder 1"/>
+          <p:cNvSpPr>
+            <a:spLocks noGrp="1"/>
+          </p:cNvSpPr>
+          <p:nvPr>
+            <p:ph type="sldImg" idx="2"/>
+          </p:nvPr>
+        </p:nvSpPr>
+        <p:spPr/>
+      </p:sp>
+      <p:sp>
+        <p:nvSpPr>
+          <p:cNvPr id="3" name="Notes Placeholder 2"/>
+          <p:cNvSpPr>
+            <a:spLocks noGrp="1"/>
+          </p:cNvSpPr>
+          <p:nvPr>
+            <p:ph type="body" idx="3" sz="quarter"/>
+          </p:nvPr>
+        </p:nvSpPr>
+        <p:spPr/>
+        <p:txBody>
+          <a:bodyPr/>
+          <a:lstStyle/>
+          <a:p>
+            <a:r>
+              <a:t>Показать после попытки учеников.</a:t>
             </a:r>
           </a:p>
           <a:p/>
           <a:p>
             <a:r>
-              <a:t>Урок 3, L1. Определение валентности проговорить до алгоритма по плану. Значения даны; не учим выводить их из зарядов или строения атома. Не объявлять валентность элемента одинаковой во всех веществах.</a:t>
+              <a:t>Схема уже уравнена. Одно вещество CaCO₃ образует CaO и CO₂; это разложение независимо от того, что коэффициенты равны 1.</a:t>
+            </a:r>
+          </a:p>
+        </p:txBody>
+      </p:sp>
+      <p:sp>
+        <p:nvSpPr>
+          <p:cNvPr id="4" name="Slide Number Placeholder 3"/>
+          <p:cNvSpPr>
+            <a:spLocks noGrp="1"/>
+          </p:cNvSpPr>
+          <p:nvPr>
+            <p:ph type="sldNum" idx="5" sz="quarter"/>
+          </p:nvPr>
+        </p:nvSpPr>
+        <p:spPr/>
+      </p:sp>
+    </p:spTree>
+  </p:cSld>
+  <p:clrMapOvr>
+    <a:masterClrMapping/>
+  </p:clrMapOvr>
+</p:notes>
+</file>
+
+<file path=ppt/notesSlides/notesSlide24.xml><?xml version="1.0" encoding="utf-8"?>
+<p:notes xmlns:a="http://schemas.openxmlformats.org/drawingml/2006/main" xmlns:p="http://schemas.openxmlformats.org/presentationml/2006/main" xmlns:r="http://schemas.openxmlformats.org/officeDocument/2006/relationships">
+  <p:cSld>
+    <p:spTree>
+      <p:nvGrpSpPr>
+        <p:cNvPr id="1" name=""/>
+        <p:cNvGrpSpPr/>
+        <p:nvPr/>
+      </p:nvGrpSpPr>
+      <p:grpSpPr>
+        <a:xfrm>
+          <a:off x="0" y="0"/>
+          <a:ext cx="0" cy="0"/>
+          <a:chOff x="0" y="0"/>
+          <a:chExt cx="0" cy="0"/>
+        </a:xfrm>
+      </p:grpSpPr>
+      <p:sp>
+        <p:nvSpPr>
+          <p:cNvPr id="2" name="Slide Image Placeholder 1"/>
+          <p:cNvSpPr>
+            <a:spLocks noGrp="1"/>
+          </p:cNvSpPr>
+          <p:nvPr>
+            <p:ph type="sldImg" idx="2"/>
+          </p:nvPr>
+        </p:nvSpPr>
+        <p:spPr/>
+      </p:sp>
+      <p:sp>
+        <p:nvSpPr>
+          <p:cNvPr id="3" name="Notes Placeholder 2"/>
+          <p:cNvSpPr>
+            <a:spLocks noGrp="1"/>
+          </p:cNvSpPr>
+          <p:nvPr>
+            <p:ph type="body" idx="3" sz="quarter"/>
+          </p:nvPr>
+        </p:nvSpPr>
+        <p:spPr/>
+        <p:txBody>
+          <a:bodyPr/>
+          <a:lstStyle/>
+          <a:p>
+            <a:r>
+              <a:t>Урок 3, 80–90 минут. На X — 4 минуты попытка и 3 минуты ключ; на вопросы/назначение ДЗ — 3 минуты. Критерии 8 учебных баллов в плане урока. Ответы X не открывать до попытки. Не назначать всю оставшуюся домашнюю работу между уроками.</a:t>
             </a:r>
           </a:p>
           <a:p/>
           <a:p>
             <a:r>
-              <a:t>### Раскрытие ответа</a:t>
+              <a:t>Ответ (следующий слайд):</a:t>
+            </a:r>
+          </a:p>
+          <a:p>
+            <a:r>
+              <a:t>L6: **Na₂O**, 2·I = 1·II = 2. L7: Mᵣ = **56**; ω(O) = 16/56 · 100% ≈ **28,6%**. L8: **2Mg + O₂ → 2MgO**, соединение; Mg 2 = 2, O 2 = 2.</a:t>
+            </a:r>
+          </a:p>
+        </p:txBody>
+      </p:sp>
+      <p:sp>
+        <p:nvSpPr>
+          <p:cNvPr id="4" name="Slide Number Placeholder 3"/>
+          <p:cNvSpPr>
+            <a:spLocks noGrp="1"/>
+          </p:cNvSpPr>
+          <p:nvPr>
+            <p:ph type="sldNum" idx="5" sz="quarter"/>
+          </p:nvPr>
+        </p:nvSpPr>
+        <p:spPr/>
+      </p:sp>
+    </p:spTree>
+  </p:cSld>
+  <p:clrMapOvr>
+    <a:masterClrMapping/>
+  </p:clrMapOvr>
+</p:notes>
+</file>
+
+<file path=ppt/notesSlides/notesSlide25.xml><?xml version="1.0" encoding="utf-8"?>
+<p:notes xmlns:a="http://schemas.openxmlformats.org/drawingml/2006/main" xmlns:p="http://schemas.openxmlformats.org/presentationml/2006/main" xmlns:r="http://schemas.openxmlformats.org/officeDocument/2006/relationships">
+  <p:cSld>
+    <p:spTree>
+      <p:nvGrpSpPr>
+        <p:cNvPr id="1" name=""/>
+        <p:cNvGrpSpPr/>
+        <p:nvPr/>
+      </p:nvGrpSpPr>
+      <p:grpSpPr>
+        <a:xfrm>
+          <a:off x="0" y="0"/>
+          <a:ext cx="0" cy="0"/>
+          <a:chOff x="0" y="0"/>
+          <a:chExt cx="0" cy="0"/>
+        </a:xfrm>
+      </p:grpSpPr>
+      <p:sp>
+        <p:nvSpPr>
+          <p:cNvPr id="2" name="Slide Image Placeholder 1"/>
+          <p:cNvSpPr>
+            <a:spLocks noGrp="1"/>
+          </p:cNvSpPr>
+          <p:nvPr>
+            <p:ph type="sldImg" idx="2"/>
+          </p:nvPr>
+        </p:nvSpPr>
+        <p:spPr/>
+      </p:sp>
+      <p:sp>
+        <p:nvSpPr>
+          <p:cNvPr id="3" name="Notes Placeholder 2"/>
+          <p:cNvSpPr>
+            <a:spLocks noGrp="1"/>
+          </p:cNvSpPr>
+          <p:nvPr>
+            <p:ph type="body" idx="3" sz="quarter"/>
+          </p:nvPr>
+        </p:nvSpPr>
+        <p:spPr/>
+        <p:txBody>
+          <a:bodyPr/>
+          <a:lstStyle/>
+          <a:p>
+            <a:r>
+              <a:t>Показать после попытки учеников.</a:t>
             </a:r>
           </a:p>
           <a:p/>
           <a:p>
             <a:r>
-              <a:t>Если оба значения II, НОК = 2; каждый индекс 2/2 = 1. Равенство 1·II = 1·II выполняется.</a:t>
+              <a:t>L6: **Na₂O**, 2·I = 1·II = 2. L7: Mᵣ = **56**; ω(O) = 16/56 · 100% ≈ **28,6%**. L8: **2Mg + O₂ → 2MgO**, соединение; Mg 2 = 2, O 2 = 2.</a:t>
+            </a:r>
+          </a:p>
+        </p:txBody>
+      </p:sp>
+      <p:sp>
+        <p:nvSpPr>
+          <p:cNvPr id="4" name="Slide Number Placeholder 3"/>
+          <p:cNvSpPr>
+            <a:spLocks noGrp="1"/>
+          </p:cNvSpPr>
+          <p:nvPr>
+            <p:ph type="sldNum" idx="5" sz="quarter"/>
+          </p:nvPr>
+        </p:nvSpPr>
+        <p:spPr/>
+      </p:sp>
+    </p:spTree>
+  </p:cSld>
+  <p:clrMapOvr>
+    <a:masterClrMapping/>
+  </p:clrMapOvr>
+</p:notes>
+</file>
+
+<file path=ppt/notesSlides/notesSlide26.xml><?xml version="1.0" encoding="utf-8"?>
+<p:notes xmlns:a="http://schemas.openxmlformats.org/drawingml/2006/main" xmlns:p="http://schemas.openxmlformats.org/presentationml/2006/main" xmlns:r="http://schemas.openxmlformats.org/officeDocument/2006/relationships">
+  <p:cSld>
+    <p:spTree>
+      <p:nvGrpSpPr>
+        <p:cNvPr id="1" name=""/>
+        <p:cNvGrpSpPr/>
+        <p:nvPr/>
+      </p:nvGrpSpPr>
+      <p:grpSpPr>
+        <a:xfrm>
+          <a:off x="0" y="0"/>
+          <a:ext cx="0" cy="0"/>
+          <a:chOff x="0" y="0"/>
+          <a:chExt cx="0" cy="0"/>
+        </a:xfrm>
+      </p:grpSpPr>
+      <p:sp>
+        <p:nvSpPr>
+          <p:cNvPr id="2" name="Slide Image Placeholder 1"/>
+          <p:cNvSpPr>
+            <a:spLocks noGrp="1"/>
+          </p:cNvSpPr>
+          <p:nvPr>
+            <p:ph type="sldImg" idx="2"/>
+          </p:nvPr>
+        </p:nvSpPr>
+        <p:spPr/>
+      </p:sp>
+      <p:sp>
+        <p:nvSpPr>
+          <p:cNvPr id="3" name="Notes Placeholder 2"/>
+          <p:cNvSpPr>
+            <a:spLocks noGrp="1"/>
+          </p:cNvSpPr>
+          <p:nvPr>
+            <p:ph type="body" idx="3" sz="quarter"/>
+          </p:nvPr>
+        </p:nvSpPr>
+        <p:spPr/>
+        <p:txBody>
+          <a:bodyPr/>
+          <a:lstStyle/>
+          <a:p>
+            <a:r>
+              <a:t>Урок 4, 0–20 минут. Сначала 5 минут воспроизведение правил, затем L9 7 минут и L10 8. В 20–35 минут разобрать G1–G3 по точным условиям плана урока 4; слайд держать как памятку, не заменять разбор новой лекцией.</a:t>
+            </a:r>
+          </a:p>
+          <a:p/>
+          <a:p>
+            <a:r>
+              <a:t>Ответ (следующий слайд):</a:t>
+            </a:r>
+          </a:p>
+          <a:p>
+            <a:r>
+              <a:t>L9: **CaO**, 1·II = 1·II; Mᵣ = **56**. L10: **40%**; CaCO₃ → CaO + CO₂, коэффициенты **1 : 1 : 1**, O 3 = 1 + 2, разложение.</a:t>
+            </a:r>
+          </a:p>
+        </p:txBody>
+      </p:sp>
+      <p:sp>
+        <p:nvSpPr>
+          <p:cNvPr id="4" name="Slide Number Placeholder 3"/>
+          <p:cNvSpPr>
+            <a:spLocks noGrp="1"/>
+          </p:cNvSpPr>
+          <p:nvPr>
+            <p:ph type="sldNum" idx="5" sz="quarter"/>
+          </p:nvPr>
+        </p:nvSpPr>
+        <p:spPr/>
+      </p:sp>
+    </p:spTree>
+  </p:cSld>
+  <p:clrMapOvr>
+    <a:masterClrMapping/>
+  </p:clrMapOvr>
+</p:notes>
+</file>
+
+<file path=ppt/notesSlides/notesSlide27.xml><?xml version="1.0" encoding="utf-8"?>
+<p:notes xmlns:a="http://schemas.openxmlformats.org/drawingml/2006/main" xmlns:p="http://schemas.openxmlformats.org/presentationml/2006/main" xmlns:r="http://schemas.openxmlformats.org/officeDocument/2006/relationships">
+  <p:cSld>
+    <p:spTree>
+      <p:nvGrpSpPr>
+        <p:cNvPr id="1" name=""/>
+        <p:cNvGrpSpPr/>
+        <p:nvPr/>
+      </p:nvGrpSpPr>
+      <p:grpSpPr>
+        <a:xfrm>
+          <a:off x="0" y="0"/>
+          <a:ext cx="0" cy="0"/>
+          <a:chOff x="0" y="0"/>
+          <a:chExt cx="0" cy="0"/>
+        </a:xfrm>
+      </p:grpSpPr>
+      <p:sp>
+        <p:nvSpPr>
+          <p:cNvPr id="2" name="Slide Image Placeholder 1"/>
+          <p:cNvSpPr>
+            <a:spLocks noGrp="1"/>
+          </p:cNvSpPr>
+          <p:nvPr>
+            <p:ph type="sldImg" idx="2"/>
+          </p:nvPr>
+        </p:nvSpPr>
+        <p:spPr/>
+      </p:sp>
+      <p:sp>
+        <p:nvSpPr>
+          <p:cNvPr id="3" name="Notes Placeholder 2"/>
+          <p:cNvSpPr>
+            <a:spLocks noGrp="1"/>
+          </p:cNvSpPr>
+          <p:nvPr>
+            <p:ph type="body" idx="3" sz="quarter"/>
+          </p:nvPr>
+        </p:nvSpPr>
+        <p:spPr/>
+        <p:txBody>
+          <a:bodyPr/>
+          <a:lstStyle/>
+          <a:p>
+            <a:r>
+              <a:t>Показать после попытки учеников.</a:t>
+            </a:r>
+          </a:p>
+          <a:p/>
+          <a:p>
+            <a:r>
+              <a:t>L9: **CaO**, 1·II = 1·II; Mᵣ = **56**. L10: **40%**; CaCO₃ → CaO + CO₂, коэффициенты **1 : 1 : 1**, O 3 = 1 + 2, разложение.</a:t>
+            </a:r>
+          </a:p>
+        </p:txBody>
+      </p:sp>
+      <p:sp>
+        <p:nvSpPr>
+          <p:cNvPr id="4" name="Slide Number Placeholder 3"/>
+          <p:cNvSpPr>
+            <a:spLocks noGrp="1"/>
+          </p:cNvSpPr>
+          <p:nvPr>
+            <p:ph type="sldNum" idx="5" sz="quarter"/>
+          </p:nvPr>
+        </p:nvSpPr>
+        <p:spPr/>
+      </p:sp>
+    </p:spTree>
+  </p:cSld>
+  <p:clrMapOvr>
+    <a:masterClrMapping/>
+  </p:clrMapOvr>
+</p:notes>
+</file>
+
+<file path=ppt/notesSlides/notesSlide28.xml><?xml version="1.0" encoding="utf-8"?>
+<p:notes xmlns:a="http://schemas.openxmlformats.org/drawingml/2006/main" xmlns:p="http://schemas.openxmlformats.org/presentationml/2006/main" xmlns:r="http://schemas.openxmlformats.org/officeDocument/2006/relationships">
+  <p:cSld>
+    <p:spTree>
+      <p:nvGrpSpPr>
+        <p:cNvPr id="1" name=""/>
+        <p:cNvGrpSpPr/>
+        <p:nvPr/>
+      </p:nvGrpSpPr>
+      <p:grpSpPr>
+        <a:xfrm>
+          <a:off x="0" y="0"/>
+          <a:ext cx="0" cy="0"/>
+          <a:chOff x="0" y="0"/>
+          <a:chExt cx="0" cy="0"/>
+        </a:xfrm>
+      </p:grpSpPr>
+      <p:sp>
+        <p:nvSpPr>
+          <p:cNvPr id="2" name="Slide Image Placeholder 1"/>
+          <p:cNvSpPr>
+            <a:spLocks noGrp="1"/>
+          </p:cNvSpPr>
+          <p:nvPr>
+            <p:ph type="sldImg" idx="2"/>
+          </p:nvPr>
+        </p:nvSpPr>
+        <p:spPr/>
+      </p:sp>
+      <p:sp>
+        <p:nvSpPr>
+          <p:cNvPr id="3" name="Notes Placeholder 2"/>
+          <p:cNvSpPr>
+            <a:spLocks noGrp="1"/>
+          </p:cNvSpPr>
+          <p:nvPr>
+            <p:ph type="body" idx="3" sz="quarter"/>
+          </p:nvPr>
+        </p:nvSpPr>
+        <p:spPr/>
+        <p:txBody>
+          <a:bodyPr/>
+          <a:lstStyle/>
+          <a:p>
+            <a:r>
+              <a:t>Урок 4, 35–50 минут. L11 — 6 минут, L12 — 9. Справка и алгоритм остаются видимыми, ключ раскрывается после шага ученика. Для поддержки дать таблицу «элемент / индекс / Aᵣ / произведение» без готовых произведений.</a:t>
+            </a:r>
+          </a:p>
+          <a:p/>
+          <a:p>
+            <a:r>
+              <a:t>Ответ (следующий слайд):</a:t>
+            </a:r>
+          </a:p>
+          <a:p>
+            <a:r>
+              <a:t>L11: **MgO**, 1·II = 1·II; **Na₂O**, 2·I = 1·II. L12: Mᵣ = 54 + 48 = **102**; ω(O) = 48/102 · 100% ≈ **47,1%**; ω(Al) ≈ **52,9%**; сумма ≈ 100%.</a:t>
+            </a:r>
+          </a:p>
+        </p:txBody>
+      </p:sp>
+      <p:sp>
+        <p:nvSpPr>
+          <p:cNvPr id="4" name="Slide Number Placeholder 3"/>
+          <p:cNvSpPr>
+            <a:spLocks noGrp="1"/>
+          </p:cNvSpPr>
+          <p:nvPr>
+            <p:ph type="sldNum" idx="5" sz="quarter"/>
+          </p:nvPr>
+        </p:nvSpPr>
+        <p:spPr/>
+      </p:sp>
+    </p:spTree>
+  </p:cSld>
+  <p:clrMapOvr>
+    <a:masterClrMapping/>
+  </p:clrMapOvr>
+</p:notes>
+</file>
+
+<file path=ppt/notesSlides/notesSlide29.xml><?xml version="1.0" encoding="utf-8"?>
+<p:notes xmlns:a="http://schemas.openxmlformats.org/drawingml/2006/main" xmlns:p="http://schemas.openxmlformats.org/presentationml/2006/main" xmlns:r="http://schemas.openxmlformats.org/officeDocument/2006/relationships">
+  <p:cSld>
+    <p:spTree>
+      <p:nvGrpSpPr>
+        <p:cNvPr id="1" name=""/>
+        <p:cNvGrpSpPr/>
+        <p:nvPr/>
+      </p:nvGrpSpPr>
+      <p:grpSpPr>
+        <a:xfrm>
+          <a:off x="0" y="0"/>
+          <a:ext cx="0" cy="0"/>
+          <a:chOff x="0" y="0"/>
+          <a:chExt cx="0" cy="0"/>
+        </a:xfrm>
+      </p:grpSpPr>
+      <p:sp>
+        <p:nvSpPr>
+          <p:cNvPr id="2" name="Slide Image Placeholder 1"/>
+          <p:cNvSpPr>
+            <a:spLocks noGrp="1"/>
+          </p:cNvSpPr>
+          <p:nvPr>
+            <p:ph type="sldImg" idx="2"/>
+          </p:nvPr>
+        </p:nvSpPr>
+        <p:spPr/>
+      </p:sp>
+      <p:sp>
+        <p:nvSpPr>
+          <p:cNvPr id="3" name="Notes Placeholder 2"/>
+          <p:cNvSpPr>
+            <a:spLocks noGrp="1"/>
+          </p:cNvSpPr>
+          <p:nvPr>
+            <p:ph type="body" idx="3" sz="quarter"/>
+          </p:nvPr>
+        </p:nvSpPr>
+        <p:spPr/>
+        <p:txBody>
+          <a:bodyPr/>
+          <a:lstStyle/>
+          <a:p>
+            <a:r>
+              <a:t>Показать после попытки учеников.</a:t>
+            </a:r>
+          </a:p>
+          <a:p/>
+          <a:p>
+            <a:r>
+              <a:t>L11: **MgO**, 1·II = 1·II; **Na₂O**, 2·I = 1·II. L12: Mᵣ = 54 + 48 = **102**; ω(O) = 48/102 · 100% ≈ **47,1%**; ω(Al) ≈ **52,9%**; сумма ≈ 100%.</a:t>
             </a:r>
           </a:p>
         </p:txBody>
@@ -1622,49 +2255,327 @@
           <a:lstStyle/>
           <a:p>
             <a:r>
-              <a:t>### Текст ученику</a:t>
+              <a:t>Показать после попытки учеников.</a:t>
             </a:r>
           </a:p>
           <a:p/>
           <a:p>
             <a:r>
-              <a:t>**Mg(II) и Cl(I)**: НОК(2, 1) = 2. Индексы Mg: 2/2 = 1; Cl: 2/1 = 2. **MgCl₂**.</a:t>
+              <a:t>3H₂O: H = 3·2 = 6, O = 3·1 = 3, всего 9 атомов. 80·0,25 = 20 г, целое — 80 г.</a:t>
+            </a:r>
+          </a:p>
+        </p:txBody>
+      </p:sp>
+      <p:sp>
+        <p:nvSpPr>
+          <p:cNvPr id="4" name="Slide Number Placeholder 3"/>
+          <p:cNvSpPr>
+            <a:spLocks noGrp="1"/>
+          </p:cNvSpPr>
+          <p:nvPr>
+            <p:ph type="sldNum" idx="5" sz="quarter"/>
+          </p:nvPr>
+        </p:nvSpPr>
+        <p:spPr/>
+      </p:sp>
+    </p:spTree>
+  </p:cSld>
+  <p:clrMapOvr>
+    <a:masterClrMapping/>
+  </p:clrMapOvr>
+</p:notes>
+</file>
+
+<file path=ppt/notesSlides/notesSlide30.xml><?xml version="1.0" encoding="utf-8"?>
+<p:notes xmlns:a="http://schemas.openxmlformats.org/drawingml/2006/main" xmlns:p="http://schemas.openxmlformats.org/presentationml/2006/main" xmlns:r="http://schemas.openxmlformats.org/officeDocument/2006/relationships">
+  <p:cSld>
+    <p:spTree>
+      <p:nvGrpSpPr>
+        <p:cNvPr id="1" name=""/>
+        <p:cNvGrpSpPr/>
+        <p:nvPr/>
+      </p:nvGrpSpPr>
+      <p:grpSpPr>
+        <a:xfrm>
+          <a:off x="0" y="0"/>
+          <a:ext cx="0" cy="0"/>
+          <a:chOff x="0" y="0"/>
+          <a:chExt cx="0" cy="0"/>
+        </a:xfrm>
+      </p:grpSpPr>
+      <p:sp>
+        <p:nvSpPr>
+          <p:cNvPr id="2" name="Slide Image Placeholder 1"/>
+          <p:cNvSpPr>
+            <a:spLocks noGrp="1"/>
+          </p:cNvSpPr>
+          <p:nvPr>
+            <p:ph type="sldImg" idx="2"/>
+          </p:nvPr>
+        </p:nvSpPr>
+        <p:spPr/>
+      </p:sp>
+      <p:sp>
+        <p:nvSpPr>
+          <p:cNvPr id="3" name="Notes Placeholder 2"/>
+          <p:cNvSpPr>
+            <a:spLocks noGrp="1"/>
+          </p:cNvSpPr>
+          <p:nvPr>
+            <p:ph type="body" idx="3" sz="quarter"/>
+          </p:nvPr>
+        </p:nvSpPr>
+        <p:spPr/>
+        <p:txBody>
+          <a:bodyPr/>
+          <a:lstStyle/>
+          <a:p>
+            <a:r>
+              <a:t>Урок 4: L13/L14 в 50–65 минут, L16 в 65–78 вместе с L15 следующего слайда. Показывать по одной схеме. Катализатор отмечаем как данное условие, без механизма и нового тематического раздела.</a:t>
             </a:r>
           </a:p>
           <a:p/>
           <a:p>
             <a:r>
-              <a:t>**Al(III) и O(II)**: НОК(3, 2) = 6. Индексы Al: 6/3 = 2; O: 6/2 = 3. **Al₂O₃**.</a:t>
+              <a:t>Ответ (следующий слайд):</a:t>
+            </a:r>
+          </a:p>
+          <a:p>
+            <a:r>
+              <a:t>L13: **4Al + 3O₂ → 2Al₂O₃**, Al 4 = 4, O 6 = 6, соединение. L14: **2H₂O₂ → 2H₂O + O₂**, H 4 = 4, O 4 = 2 + 2, разложение. L16: **H₂ + Cl₂ → 2HCl**, H 2 = 2, Cl 2 = 2, соединение.</a:t>
+            </a:r>
+          </a:p>
+        </p:txBody>
+      </p:sp>
+      <p:sp>
+        <p:nvSpPr>
+          <p:cNvPr id="4" name="Slide Number Placeholder 3"/>
+          <p:cNvSpPr>
+            <a:spLocks noGrp="1"/>
+          </p:cNvSpPr>
+          <p:nvPr>
+            <p:ph type="sldNum" idx="5" sz="quarter"/>
+          </p:nvPr>
+        </p:nvSpPr>
+        <p:spPr/>
+      </p:sp>
+    </p:spTree>
+  </p:cSld>
+  <p:clrMapOvr>
+    <a:masterClrMapping/>
+  </p:clrMapOvr>
+</p:notes>
+</file>
+
+<file path=ppt/notesSlides/notesSlide31.xml><?xml version="1.0" encoding="utf-8"?>
+<p:notes xmlns:a="http://schemas.openxmlformats.org/drawingml/2006/main" xmlns:p="http://schemas.openxmlformats.org/presentationml/2006/main" xmlns:r="http://schemas.openxmlformats.org/officeDocument/2006/relationships">
+  <p:cSld>
+    <p:spTree>
+      <p:nvGrpSpPr>
+        <p:cNvPr id="1" name=""/>
+        <p:cNvGrpSpPr/>
+        <p:nvPr/>
+      </p:nvGrpSpPr>
+      <p:grpSpPr>
+        <a:xfrm>
+          <a:off x="0" y="0"/>
+          <a:ext cx="0" cy="0"/>
+          <a:chOff x="0" y="0"/>
+          <a:chExt cx="0" cy="0"/>
+        </a:xfrm>
+      </p:grpSpPr>
+      <p:sp>
+        <p:nvSpPr>
+          <p:cNvPr id="2" name="Slide Image Placeholder 1"/>
+          <p:cNvSpPr>
+            <a:spLocks noGrp="1"/>
+          </p:cNvSpPr>
+          <p:nvPr>
+            <p:ph type="sldImg" idx="2"/>
+          </p:nvPr>
+        </p:nvSpPr>
+        <p:spPr/>
+      </p:sp>
+      <p:sp>
+        <p:nvSpPr>
+          <p:cNvPr id="3" name="Notes Placeholder 2"/>
+          <p:cNvSpPr>
+            <a:spLocks noGrp="1"/>
+          </p:cNvSpPr>
+          <p:nvPr>
+            <p:ph type="body" idx="3" sz="quarter"/>
+          </p:nvPr>
+        </p:nvSpPr>
+        <p:spPr/>
+        <p:txBody>
+          <a:bodyPr/>
+          <a:lstStyle/>
+          <a:p>
+            <a:r>
+              <a:t>Показать после попытки учеников.</a:t>
             </a:r>
           </a:p>
           <a:p/>
           <a:p>
             <a:r>
-              <a:t>Задание после объяснения: для каждой формулы проверь произведение индекса на валентность.</a:t>
+              <a:t>L13: **4Al + 3O₂ → 2Al₂O₃**, Al 4 = 4, O 6 = 6, соединение. L14: **2H₂O₂ → 2H₂O + O₂**, H 4 = 4, O 4 = 2 + 2, разложение. L16: **H₂ + Cl₂ → 2HCl**, H 2 = 2, Cl 2 = 2, соединение.</a:t>
+            </a:r>
+          </a:p>
+        </p:txBody>
+      </p:sp>
+      <p:sp>
+        <p:nvSpPr>
+          <p:cNvPr id="4" name="Slide Number Placeholder 3"/>
+          <p:cNvSpPr>
+            <a:spLocks noGrp="1"/>
+          </p:cNvSpPr>
+          <p:nvPr>
+            <p:ph type="sldNum" idx="5" sz="quarter"/>
+          </p:nvPr>
+        </p:nvSpPr>
+        <p:spPr/>
+      </p:sp>
+    </p:spTree>
+  </p:cSld>
+  <p:clrMapOvr>
+    <a:masterClrMapping/>
+  </p:clrMapOvr>
+</p:notes>
+</file>
+
+<file path=ppt/notesSlides/notesSlide32.xml><?xml version="1.0" encoding="utf-8"?>
+<p:notes xmlns:a="http://schemas.openxmlformats.org/drawingml/2006/main" xmlns:p="http://schemas.openxmlformats.org/presentationml/2006/main" xmlns:r="http://schemas.openxmlformats.org/officeDocument/2006/relationships">
+  <p:cSld>
+    <p:spTree>
+      <p:nvGrpSpPr>
+        <p:cNvPr id="1" name=""/>
+        <p:cNvGrpSpPr/>
+        <p:nvPr/>
+      </p:nvGrpSpPr>
+      <p:grpSpPr>
+        <a:xfrm>
+          <a:off x="0" y="0"/>
+          <a:ext cx="0" cy="0"/>
+          <a:chOff x="0" y="0"/>
+          <a:chExt cx="0" cy="0"/>
+        </a:xfrm>
+      </p:grpSpPr>
+      <p:sp>
+        <p:nvSpPr>
+          <p:cNvPr id="2" name="Slide Image Placeholder 1"/>
+          <p:cNvSpPr>
+            <a:spLocks noGrp="1"/>
+          </p:cNvSpPr>
+          <p:nvPr>
+            <p:ph type="sldImg" idx="2"/>
+          </p:nvPr>
+        </p:nvSpPr>
+        <p:spPr/>
+      </p:sp>
+      <p:sp>
+        <p:nvSpPr>
+          <p:cNvPr id="3" name="Notes Placeholder 2"/>
+          <p:cNvSpPr>
+            <a:spLocks noGrp="1"/>
+          </p:cNvSpPr>
+          <p:nvPr>
+            <p:ph type="body" idx="3" sz="quarter"/>
+          </p:nvPr>
+        </p:nvSpPr>
+        <p:spPr/>
+        <p:txBody>
+          <a:bodyPr/>
+          <a:lstStyle/>
+          <a:p>
+            <a:r>
+              <a:t>Урок 4, L15 в 65–78 минут вместе с L16; затем quiz 78–88 и итог 88–90. Не требовать расчёта массы CaO по уравнению: она дана. На время контроля убрать раскрытие с экрана и выдать отдельно ученическую часть [quiz](quiz.md). Назначение ДЗ открывать в конце; суммарный самостоятельный бюджет недели 150 минут.</a:t>
             </a:r>
           </a:p>
           <a:p/>
           <a:p>
             <a:r>
-              <a:t>### Заметки преподавателю</a:t>
+              <a:t>Ответ (следующий слайд):</a:t>
+            </a:r>
+          </a:p>
+          <a:p>
+            <a:r>
+              <a:t>L15: m(CO₂) = 10 − 5,6 = **4,4 г**; сумма продуктов **10 г**. В открытом сосуде газ ушёл за выбранную границу; масса остатка 5,6 г не равна массе всех продуктов. Ключи и частичные баллы контроля — в преподавательской части quiz; не показывать их до сдачи.</a:t>
+            </a:r>
+          </a:p>
+        </p:txBody>
+      </p:sp>
+      <p:sp>
+        <p:nvSpPr>
+          <p:cNvPr id="4" name="Slide Number Placeholder 3"/>
+          <p:cNvSpPr>
+            <a:spLocks noGrp="1"/>
+          </p:cNvSpPr>
+          <p:nvPr>
+            <p:ph type="sldNum" idx="5" sz="quarter"/>
+          </p:nvPr>
+        </p:nvSpPr>
+        <p:spPr/>
+      </p:sp>
+    </p:spTree>
+  </p:cSld>
+  <p:clrMapOvr>
+    <a:masterClrMapping/>
+  </p:clrMapOvr>
+</p:notes>
+</file>
+
+<file path=ppt/notesSlides/notesSlide33.xml><?xml version="1.0" encoding="utf-8"?>
+<p:notes xmlns:a="http://schemas.openxmlformats.org/drawingml/2006/main" xmlns:p="http://schemas.openxmlformats.org/presentationml/2006/main" xmlns:r="http://schemas.openxmlformats.org/officeDocument/2006/relationships">
+  <p:cSld>
+    <p:spTree>
+      <p:nvGrpSpPr>
+        <p:cNvPr id="1" name=""/>
+        <p:cNvGrpSpPr/>
+        <p:nvPr/>
+      </p:nvGrpSpPr>
+      <p:grpSpPr>
+        <a:xfrm>
+          <a:off x="0" y="0"/>
+          <a:ext cx="0" cy="0"/>
+          <a:chOff x="0" y="0"/>
+          <a:chExt cx="0" cy="0"/>
+        </a:xfrm>
+      </p:grpSpPr>
+      <p:sp>
+        <p:nvSpPr>
+          <p:cNvPr id="2" name="Slide Image Placeholder 1"/>
+          <p:cNvSpPr>
+            <a:spLocks noGrp="1"/>
+          </p:cNvSpPr>
+          <p:nvPr>
+            <p:ph type="sldImg" idx="2"/>
+          </p:nvPr>
+        </p:nvSpPr>
+        <p:spPr/>
+      </p:sp>
+      <p:sp>
+        <p:nvSpPr>
+          <p:cNvPr id="3" name="Notes Placeholder 2"/>
+          <p:cNvSpPr>
+            <a:spLocks noGrp="1"/>
+          </p:cNvSpPr>
+          <p:nvPr>
+            <p:ph type="body" idx="3" sz="quarter"/>
+          </p:nvPr>
+        </p:nvSpPr>
+        <p:spPr/>
+        <p:txBody>
+          <a:bodyPr/>
+          <a:lstStyle/>
+          <a:p>
+            <a:r>
+              <a:t>Показать после попытки учеников.</a:t>
             </a:r>
           </a:p>
           <a:p/>
           <a:p>
             <a:r>
-              <a:t>Урок 3, L1. Показывать по одному примеру. В MgCl₂ единица Mg не пишется. Назвать Cl единым символом. НОК — математический способ получить простое соотношение.</a:t>
-            </a:r>
-          </a:p>
-          <a:p/>
-          <a:p>
-            <a:r>
-              <a:t>### Раскрытие ответа</a:t>
-            </a:r>
-          </a:p>
-          <a:p/>
-          <a:p>
-            <a:r>
-              <a:t>MgCl₂: 1·II = 2·I = 2. Al₂O₃: 2·III = 3·II = 6. Равны суммы валентностей, а не сами индексы.</a:t>
+              <a:t>L15: m(CO₂) = 10 − 5,6 = **4,4 г**; сумма продуктов **10 г**. В открытом сосуде газ ушёл за выбранную границу; масса остатка 5,6 г не равна массе всех продуктов. Ключи и частичные баллы контроля — в преподавательской части quiz; не показывать их до сдачи.</a:t>
             </a:r>
           </a:p>
         </p:txBody>
@@ -1734,49 +2645,18 @@
           <a:lstStyle/>
           <a:p>
             <a:r>
-              <a:t>### Текст ученику</a:t>
+              <a:t>Урок 3, L1. Определение валентности проговорить до алгоритма по плану. Значения даны; не учим выводить их из зарядов или строения атома. Не объявлять валентность элемента одинаковой во всех веществах.</a:t>
             </a:r>
           </a:p>
           <a:p/>
           <a:p>
             <a:r>
-              <a:t>Даны Ca(II) и O(II). НОК(2, 2) = 2. Индексы 1 : 1, формула **CaO**.</a:t>
-            </a:r>
-          </a:p>
-          <a:p/>
-          <a:p>
-            <a:r>
-              <a:t>Запись Ca₂O₂ содержит излишний общий множитель: простое соотношение 2 : 2 сокращаем до 1 : 1.</a:t>
-            </a:r>
-          </a:p>
-          <a:p/>
-          <a:p>
-            <a:r>
-              <a:t>Короткий вопрос: какие индексы нужны для Mg(II) и O(II)?</a:t>
-            </a:r>
-          </a:p>
-          <a:p/>
-          <a:p>
-            <a:r>
-              <a:t>### Заметки преподавателю</a:t>
-            </a:r>
-          </a:p>
-          <a:p/>
-          <a:p>
-            <a:r>
-              <a:t>Урок 3, L1. Различать составление простой формулы по условию и изменение уже заданной формулы вещества. Не распространять механическое сокращение на любую реальную молекулярную формулу.</a:t>
-            </a:r>
-          </a:p>
-          <a:p/>
-          <a:p>
-            <a:r>
-              <a:t>### Раскрытие ответа</a:t>
-            </a:r>
-          </a:p>
-          <a:p/>
-          <a:p>
-            <a:r>
-              <a:t>MgO: 1 : 1, 1·II = 1·II = 2. Индекс 1 не пишется.</a:t>
+              <a:t>Ответ (следующий слайд):</a:t>
+            </a:r>
+          </a:p>
+          <a:p>
+            <a:r>
+              <a:t>Если оба значения II, НОК = 2; каждый индекс 2/2 = 1. Равенство 1·II = 1·II выполняется.</a:t>
             </a:r>
           </a:p>
         </p:txBody>
@@ -1846,59 +2726,13 @@
           <a:lstStyle/>
           <a:p>
             <a:r>
-              <a:t>### Текст ученику</a:t>
+              <a:t>Показать после попытки учеников.</a:t>
             </a:r>
           </a:p>
           <a:p/>
           <a:p>
             <a:r>
-              <a:t>Aᵣ — относительная атомная масса: отношение средней массы атомов элемента к единице сравнения — 1/12 массы атома углерода-12. Это число **без единиц**.</a:t>
-            </a:r>
-          </a:p>
-          <a:p/>
-          <a:p>
-            <a:r>
-              <a:t>| Элемент | H | O | C | Mg | Al | Ca | Na | Cl |</a:t>
-            </a:r>
-          </a:p>
-          <a:p>
-            <a:r>
-              <a:t>|---|---:|---:|---:|---:|---:|---:|---:|---:|</a:t>
-            </a:r>
-          </a:p>
-          <a:p>
-            <a:r>
-              <a:t>| Данное Aᵣ | 1 | 16 | 12 | 24 | 27 | 40 | 23 | 35,5 |</a:t>
-            </a:r>
-          </a:p>
-          <a:p/>
-          <a:p>
-            <a:r>
-              <a:t>Справку используем, не заучиваем. В H₂O число 2 — индекс; Aᵣ(H) = 1 — отдельное данное.</a:t>
-            </a:r>
-          </a:p>
-          <a:p/>
-          <a:p>
-            <a:r>
-              <a:t>### Заметки преподавателю</a:t>
-            </a:r>
-          </a:p>
-          <a:p/>
-          <a:p>
-            <a:r>
-              <a:t>Урок 3, L2. Не смешивать относительную массу с массой образца в г. Строение атома и изотопные вычисления не вводим. Все вычисления идут по одной справке, округлённые значения не менять посреди решения.</a:t>
-            </a:r>
-          </a:p>
-          <a:p/>
-          <a:p>
-            <a:r>
-              <a:t>### Раскрытие ответа</a:t>
-            </a:r>
-          </a:p>
-          <a:p/>
-          <a:p>
-            <a:r>
-              <a:t>Вклад H в относительную массу H₂O: 2·1 = 2. Индекс показывает число атомов H, Aᵣ — относительную массу одного атома в используемой справке.</a:t>
+              <a:t>Если оба значения II, НОК = 2; каждый индекс 2/2 = 1. Равенство 1·II = 1·II выполняется.</a:t>
             </a:r>
           </a:p>
         </p:txBody>
@@ -1968,60 +2802,18 @@
           <a:lstStyle/>
           <a:p>
             <a:r>
-              <a:t>### Текст ученику</a:t>
+              <a:t>Урок 3, L1. Показывать по одному примеру. В MgCl₂ единица Mg не пишется. Назвать Cl единым символом. НОК — математический способ получить простое соотношение.</a:t>
             </a:r>
           </a:p>
           <a:p/>
           <a:p>
             <a:r>
-              <a:t>**Прочитай индексы → умножь на Aᵣ → сложи.**</a:t>
-            </a:r>
-          </a:p>
-          <a:p/>
-          <a:p>
-            <a:r>
-              <a:t>- H₂O: Mᵣ = 2·1 + 16 = **18**, относительная молекулярная масса.</a:t>
-            </a:r>
-          </a:p>
-          <a:p>
-            <a:r>
-              <a:t>- MgO: Mᵣ = 24 + 16 = **40**, относительная формульная масса.</a:t>
-            </a:r>
-          </a:p>
-          <a:p/>
-          <a:p>
-            <a:r>
-              <a:t>Оба ответа без единиц. MgO — формульная единица, не отдельная молекула.</a:t>
-            </a:r>
-          </a:p>
-          <a:p/>
-          <a:p>
-            <a:r>
-              <a:t>Вопрос: чему равна Mᵣ одной молекулы H₂O в записи 3H₂O?</a:t>
-            </a:r>
-          </a:p>
-          <a:p/>
-          <a:p>
-            <a:r>
-              <a:t>### Заметки преподавателю</a:t>
-            </a:r>
-          </a:p>
-          <a:p/>
-          <a:p>
-            <a:r>
-              <a:t>Урок 3, L2. Показать два полностью разобранных примера. Коэффициент считает единицы, Mᵣ рассчитывается по одной формуле. Не заменять понятие относительной массы величиной с г/моль.</a:t>
-            </a:r>
-          </a:p>
-          <a:p/>
-          <a:p>
-            <a:r>
-              <a:t>### Раскрытие ответа</a:t>
-            </a:r>
-          </a:p>
-          <a:p/>
-          <a:p>
-            <a:r>
-              <a:t>**18**, коэффициент 3 не включаем. Масса произвольного образца воды в граммах из такой записи не известна.</a:t>
+              <a:t>Ответ (следующий слайд):</a:t>
+            </a:r>
+          </a:p>
+          <a:p>
+            <a:r>
+              <a:t>MgCl₂: 1·II = 2·I = 2. Al₂O₃: 2·III = 3·II = 6. Равны суммы валентностей, а не сами индексы.</a:t>
             </a:r>
           </a:p>
         </p:txBody>
@@ -2091,64 +2883,13 @@
           <a:lstStyle/>
           <a:p>
             <a:r>
-              <a:t>### Текст ученику</a:t>
+              <a:t>Показать после попытки учеников.</a:t>
             </a:r>
           </a:p>
           <a:p/>
           <a:p>
             <a:r>
-              <a:t>**ω(E) = N·Aᵣ(E)/Mᵣ.** Для процента: **ω(E) · 100%**.</a:t>
-            </a:r>
-          </a:p>
-          <a:p/>
-          <a:p>
-            <a:r>
-              <a:t>- N — число атомов выбранного элемента в одной формуле.</a:t>
-            </a:r>
-          </a:p>
-          <a:p>
-            <a:r>
-              <a:t>- N·Aᵣ(E) — вклад выбранного элемента.</a:t>
-            </a:r>
-          </a:p>
-          <a:p>
-            <a:r>
-              <a:t>- Mᵣ — относительная масса всей формулы.</a:t>
-            </a:r>
-          </a:p>
-          <a:p>
-            <a:r>
-              <a:t>- 0 ≤ ω ≤ 1; процент от 0 до 100%.</a:t>
-            </a:r>
-          </a:p>
-          <a:p/>
-          <a:p>
-            <a:r>
-              <a:t>Вопрос: для H в H₂O какое число надо поставить вместо N?</a:t>
-            </a:r>
-          </a:p>
-          <a:p/>
-          <a:p>
-            <a:r>
-              <a:t>### Заметки преподавателю</a:t>
-            </a:r>
-          </a:p>
-          <a:p/>
-          <a:p>
-            <a:r>
-              <a:t>Урок 3, L3. Произнесённое «часть/целое» связываем с процентами недели 1. N в этой формуле обозначает число атомов по индексу; других смыслов символа не вводим. Формула относится к составу чистого вещества.</a:t>
-            </a:r>
-          </a:p>
-          <a:p/>
-          <a:p>
-            <a:r>
-              <a:t>### Раскрытие ответа</a:t>
-            </a:r>
-          </a:p>
-          <a:p/>
-          <a:p>
-            <a:r>
-              <a:t>N = **2**, вклад H = 2·1 = 2. Знаменатель Mᵣ(H₂O) = 18; ω(H) = 2/18 ≈ 0,1111, или 11,1%.</a:t>
+              <a:t>MgCl₂: 1·II = 2·I = 2. Al₂O₃: 2·III = 3·II = 6. Равны суммы валентностей, а не сами индексы.</a:t>
             </a:r>
           </a:p>
         </p:txBody>
@@ -2218,55 +2959,18 @@
           <a:lstStyle/>
           <a:p>
             <a:r>
-              <a:t>### Текст ученику</a:t>
+              <a:t>Урок 3, L1. Различать составление простой формулы по условию и изменение уже заданной формулы вещества. Не распространять механическое сокращение на любую реальную молекулярную формулу.</a:t>
             </a:r>
           </a:p>
           <a:p/>
           <a:p>
             <a:r>
-              <a:t>**H₂O:** Mᵣ = 18; ω(O) = 16/18 ≈ 0,8889, или **88,9%** после округления.</a:t>
-            </a:r>
-          </a:p>
-          <a:p/>
-          <a:p>
-            <a:r>
-              <a:t>**MgO:** Mᵣ = 40; ω(O) = 16/40 = 0,4 = **40%**.</a:t>
-            </a:r>
-          </a:p>
-          <a:p/>
-          <a:p>
-            <a:r>
-              <a:t>Записываем процент только после умножения доли на 100%. Округляем окончательный процент до десятых, если он не целый.</a:t>
-            </a:r>
-          </a:p>
-          <a:p/>
-          <a:p>
-            <a:r>
-              <a:t>Задание: проверь долю кислорода в MgO по доле Mg.</a:t>
-            </a:r>
-          </a:p>
-          <a:p/>
-          <a:p>
-            <a:r>
-              <a:t>### Заметки преподавателю</a:t>
-            </a:r>
-          </a:p>
-          <a:p/>
-          <a:p>
-            <a:r>
-              <a:t>Урок 3, L3. В дроби H₂O не сравнивать только O с H; знаменатель включает всю формулу. Запись 0,4% вместо 40% — отдельная ошибка единицы представления.</a:t>
-            </a:r>
-          </a:p>
-          <a:p/>
-          <a:p>
-            <a:r>
-              <a:t>### Раскрытие ответа</a:t>
-            </a:r>
-          </a:p>
-          <a:p/>
-          <a:p>
-            <a:r>
-              <a:t>ω(Mg) = 24/40 = 0,6 = **60%**; 40% + 60% = 100%. Масса конкретного образца пока не задана.</a:t>
+              <a:t>Ответ (следующий слайд):</a:t>
+            </a:r>
+          </a:p>
+          <a:p>
+            <a:r>
+              <a:t>MgO: 1 : 1, 1·II = 1·II = 2. Индекс 1 не пишется.</a:t>
             </a:r>
           </a:p>
         </p:txBody>
@@ -2336,55 +3040,13 @@
           <a:lstStyle/>
           <a:p>
             <a:r>
-              <a:t>### Текст ученику</a:t>
+              <a:t>Показать после попытки учеников.</a:t>
             </a:r>
           </a:p>
           <a:p/>
           <a:p>
             <a:r>
-              <a:t>В химической реакции атомы перестраиваются. В замкнутой системе сохраняется **масса всех веществ**:</a:t>
-            </a:r>
-          </a:p>
-          <a:p/>
-          <a:p>
-            <a:r>
-              <a:t>**Сумма масс до = сумма масс после.**</a:t>
-            </a:r>
-          </a:p>
-          <a:p/>
-          <a:p>
-            <a:r>
-              <a:t>Условие для расчёта: в замкнутой системе 12 г Mg и 8 г O₂ полностью превратились только в MgO. Найди массу продукта.</a:t>
-            </a:r>
-          </a:p>
-          <a:p/>
-          <a:p>
-            <a:r>
-              <a:t>Если газ ушёл из открытого сосуда, его нужно учитывать отдельно; масса остатка — не масса всей системы.</a:t>
-            </a:r>
-          </a:p>
-          <a:p/>
-          <a:p>
-            <a:r>
-              <a:t>### Заметки преподавателю</a:t>
-            </a:r>
-          </a:p>
-          <a:p/>
-          <a:p>
-            <a:r>
-              <a:t>Урок 3, L4. Сначала определить границу системы и обмен веществом. Числа и полное превращение даны условием; отношения масс из коэффициентов не выводим. Это задача на бумаге, не опыт с нагреванием сосуда.</a:t>
-            </a:r>
-          </a:p>
-          <a:p/>
-          <a:p>
-            <a:r>
-              <a:t>### Раскрытие ответа</a:t>
-            </a:r>
-          </a:p>
-          <a:p/>
-          <a:p>
-            <a:r>
-              <a:t>m(MgO) = 12 + 8 = **20 г**. В открытом сосуде выход газа меняет массу оставшегося содержимого, не нарушая общего сохранения массы.</a:t>
+              <a:t>MgO: 1 : 1, 1·II = 1·II = 2. Индекс 1 не пишется.</a:t>
             </a:r>
           </a:p>
         </p:txBody>
@@ -5383,14 +6045,6 @@
 <file path=ppt/slides/slide1.xml><?xml version="1.0" encoding="utf-8"?>
 <p:sld xmlns:a="http://schemas.openxmlformats.org/drawingml/2006/main" xmlns:p="http://schemas.openxmlformats.org/presentationml/2006/main" xmlns:r="http://schemas.openxmlformats.org/officeDocument/2006/relationships">
   <p:cSld>
-    <p:bg>
-      <p:bgPr>
-        <a:solidFill>
-          <a:srgbClr val="151515"/>
-        </a:solidFill>
-        <a:effectLst/>
-      </p:bgPr>
-    </p:bg>
     <p:spTree>
       <p:nvGrpSpPr>
         <p:cNvPr id="1" name=""/>
@@ -5398,197 +6052,30 @@
         <p:nvPr/>
       </p:nvGrpSpPr>
       <p:grpSpPr/>
-      <p:sp>
-        <p:nvSpPr>
-          <p:cNvPr id="2" name="TextBox 1"/>
-          <p:cNvSpPr txBox="1"/>
+      <p:pic>
+        <p:nvPicPr>
+          <p:cNvPr id="2" name="Picture 1" descr="s01.png"/>
+          <p:cNvPicPr>
+            <a:picLocks noChangeAspect="1"/>
+          </p:cNvPicPr>
           <p:nvPr/>
-        </p:nvSpPr>
+        </p:nvPicPr>
+        <p:blipFill>
+          <a:blip r:embed="rId2"/>
+          <a:stretch>
+            <a:fillRect/>
+          </a:stretch>
+        </p:blipFill>
         <p:spPr>
           <a:xfrm>
-            <a:off x="640080" y="365760"/>
-            <a:ext cx="10972800" cy="822960"/>
+            <a:off x="0" y="0"/>
+            <a:ext cx="12191695" cy="6858000"/>
           </a:xfrm>
           <a:prstGeom prst="rect">
             <a:avLst/>
           </a:prstGeom>
-          <a:noFill/>
         </p:spPr>
-        <p:txBody>
-          <a:bodyPr wrap="none">
-            <a:spAutoFit/>
-          </a:bodyPr>
-          <a:lstStyle/>
-          <a:p>
-            <a:pPr>
-              <a:defRPr sz="2800" b="1">
-                <a:solidFill>
-                  <a:srgbClr val="F13A43"/>
-                </a:solidFill>
-                <a:latin typeface="Unbounded"/>
-              </a:defRPr>
-            </a:pPr>
-            <a:r>
-              <a:t>Слайд 1. Что научимся делать</a:t>
-            </a:r>
-          </a:p>
-        </p:txBody>
-      </p:sp>
-      <p:sp>
-        <p:nvSpPr>
-          <p:cNvPr id="3" name="TextBox 2"/>
-          <p:cNvSpPr txBox="1"/>
-          <p:nvPr/>
-        </p:nvSpPr>
-        <p:spPr>
-          <a:xfrm>
-            <a:off x="731520" y="1417320"/>
-            <a:ext cx="10789920" cy="4709160"/>
-          </a:xfrm>
-          <a:prstGeom prst="rect">
-            <a:avLst/>
-          </a:prstGeom>
-          <a:noFill/>
-        </p:spPr>
-        <p:txBody>
-          <a:bodyPr wrap="square">
-            <a:spAutoFit/>
-          </a:bodyPr>
-          <a:lstStyle/>
-          <a:p>
-            <a:pPr>
-              <a:spcAft>
-                <a:spcPts val="300"/>
-              </a:spcAft>
-              <a:defRPr sz="2200">
-                <a:solidFill>
-                  <a:srgbClr val="F3F0E8"/>
-                </a:solidFill>
-                <a:latin typeface="Manrope"/>
-              </a:defRPr>
-            </a:pPr>
-            <a:r>
-              <a:t>По заданным валентностям составляю простую формулу.</a:t>
-            </a:r>
-          </a:p>
-          <a:p>
-            <a:pPr>
-              <a:spcAft>
-                <a:spcPts val="300"/>
-              </a:spcAft>
-              <a:defRPr sz="2200">
-                <a:solidFill>
-                  <a:srgbClr val="F3F0E8"/>
-                </a:solidFill>
-                <a:latin typeface="Manrope"/>
-              </a:defRPr>
-            </a:pPr>
-            <a:r>
-              <a:t>Нахожу относительную массу по индексам.</a:t>
-            </a:r>
-          </a:p>
-          <a:p>
-            <a:pPr>
-              <a:spcAft>
-                <a:spcPts val="300"/>
-              </a:spcAft>
-              <a:defRPr sz="2200">
-                <a:solidFill>
-                  <a:srgbClr val="F3F0E8"/>
-                </a:solidFill>
-                <a:latin typeface="Manrope"/>
-              </a:defRPr>
-            </a:pPr>
-            <a:r>
-              <a:t>Рассчитываю массовую долю элемента.</a:t>
-            </a:r>
-          </a:p>
-          <a:p>
-            <a:pPr>
-              <a:spcAft>
-                <a:spcPts val="300"/>
-              </a:spcAft>
-              <a:defRPr sz="2200">
-                <a:solidFill>
-                  <a:srgbClr val="F3F0E8"/>
-                </a:solidFill>
-                <a:latin typeface="Manrope"/>
-              </a:defRPr>
-            </a:pPr>
-            <a:r>
-              <a:t>Сохраняю атомы и массу всей замкнутой системы.</a:t>
-            </a:r>
-          </a:p>
-          <a:p>
-            <a:pPr>
-              <a:spcAft>
-                <a:spcPts val="300"/>
-              </a:spcAft>
-              <a:defRPr sz="2200">
-                <a:solidFill>
-                  <a:srgbClr val="F3F0E8"/>
-                </a:solidFill>
-                <a:latin typeface="Manrope"/>
-              </a:defRPr>
-            </a:pPr>
-            <a:r>
-              <a:t>Уравниваю готовую схему; различаю соединение и разложение.</a:t>
-            </a:r>
-          </a:p>
-          <a:p>
-            <a:pPr>
-              <a:spcAft>
-                <a:spcPts val="300"/>
-              </a:spcAft>
-              <a:defRPr sz="2200">
-                <a:solidFill>
-                  <a:srgbClr val="F3F0E8"/>
-                </a:solidFill>
-                <a:latin typeface="Manrope"/>
-              </a:defRPr>
-            </a:pPr>
-            <a:r>
-              <a:t>Входной вопрос: сколько H и O в 3H₂O? Как найти 25% от 80 г?</a:t>
-            </a:r>
-          </a:p>
-        </p:txBody>
-      </p:sp>
-      <p:sp>
-        <p:nvSpPr>
-          <p:cNvPr id="4" name="TextBox 3"/>
-          <p:cNvSpPr txBox="1"/>
-          <p:nvPr/>
-        </p:nvSpPr>
-        <p:spPr>
-          <a:xfrm>
-            <a:off x="731520" y="6400800"/>
-            <a:ext cx="10789920" cy="274320"/>
-          </a:xfrm>
-          <a:prstGeom prst="rect">
-            <a:avLst/>
-          </a:prstGeom>
-          <a:noFill/>
-        </p:spPr>
-        <p:txBody>
-          <a:bodyPr wrap="none">
-            <a:spAutoFit/>
-          </a:bodyPr>
-          <a:lstStyle/>
-          <a:p>
-            <a:pPr>
-              <a:defRPr sz="1200">
-                <a:solidFill>
-                  <a:srgbClr val="F3F0E8"/>
-                </a:solidFill>
-                <a:latin typeface="Manrope"/>
-              </a:defRPr>
-            </a:pPr>
-            <a:r>
-              <a:t>Черновик для проверки преподавателем • 1</a:t>
-            </a:r>
-          </a:p>
-        </p:txBody>
-      </p:sp>
+      </p:pic>
     </p:spTree>
   </p:cSld>
   <p:clrMapOvr>
@@ -5600,14 +6087,6 @@
 <file path=ppt/slides/slide10.xml><?xml version="1.0" encoding="utf-8"?>
 <p:sld xmlns:a="http://schemas.openxmlformats.org/drawingml/2006/main" xmlns:p="http://schemas.openxmlformats.org/presentationml/2006/main" xmlns:r="http://schemas.openxmlformats.org/officeDocument/2006/relationships">
   <p:cSld>
-    <p:bg>
-      <p:bgPr>
-        <a:solidFill>
-          <a:srgbClr val="151515"/>
-        </a:solidFill>
-        <a:effectLst/>
-      </p:bgPr>
-    </p:bg>
     <p:spTree>
       <p:nvGrpSpPr>
         <p:cNvPr id="1" name=""/>
@@ -5615,213 +6094,30 @@
         <p:nvPr/>
       </p:nvGrpSpPr>
       <p:grpSpPr/>
-      <p:sp>
-        <p:nvSpPr>
-          <p:cNvPr id="2" name="TextBox 1"/>
-          <p:cNvSpPr txBox="1"/>
+      <p:pic>
+        <p:nvPicPr>
+          <p:cNvPr id="2" name="Picture 1" descr="s10.png"/>
+          <p:cNvPicPr>
+            <a:picLocks noChangeAspect="1"/>
+          </p:cNvPicPr>
           <p:nvPr/>
-        </p:nvSpPr>
+        </p:nvPicPr>
+        <p:blipFill>
+          <a:blip r:embed="rId2"/>
+          <a:stretch>
+            <a:fillRect/>
+          </a:stretch>
+        </p:blipFill>
         <p:spPr>
           <a:xfrm>
-            <a:off x="640080" y="365760"/>
-            <a:ext cx="10972800" cy="822960"/>
+            <a:off x="0" y="0"/>
+            <a:ext cx="12191695" cy="6858000"/>
           </a:xfrm>
           <a:prstGeom prst="rect">
             <a:avLst/>
           </a:prstGeom>
-          <a:noFill/>
         </p:spPr>
-        <p:txBody>
-          <a:bodyPr wrap="none">
-            <a:spAutoFit/>
-          </a:bodyPr>
-          <a:lstStyle/>
-          <a:p>
-            <a:pPr>
-              <a:defRPr sz="2787" b="1">
-                <a:solidFill>
-                  <a:srgbClr val="F13A43"/>
-                </a:solidFill>
-                <a:latin typeface="Unbounded"/>
-              </a:defRPr>
-            </a:pPr>
-            <a:r>
-              <a:t>Слайд 10. Коэффициенты и соединение</a:t>
-            </a:r>
-          </a:p>
-        </p:txBody>
-      </p:sp>
-      <p:sp>
-        <p:nvSpPr>
-          <p:cNvPr id="3" name="TextBox 2"/>
-          <p:cNvSpPr txBox="1"/>
-          <p:nvPr/>
-        </p:nvSpPr>
-        <p:spPr>
-          <a:xfrm>
-            <a:off x="731520" y="1417320"/>
-            <a:ext cx="10789920" cy="4709160"/>
-          </a:xfrm>
-          <a:prstGeom prst="rect">
-            <a:avLst/>
-          </a:prstGeom>
-          <a:noFill/>
-        </p:spPr>
-        <p:txBody>
-          <a:bodyPr wrap="square">
-            <a:spAutoFit/>
-          </a:bodyPr>
-          <a:lstStyle/>
-          <a:p>
-            <a:pPr>
-              <a:spcAft>
-                <a:spcPts val="300"/>
-              </a:spcAft>
-              <a:defRPr sz="2200">
-                <a:solidFill>
-                  <a:srgbClr val="F3F0E8"/>
-                </a:solidFill>
-                <a:latin typeface="Manrope"/>
-              </a:defRPr>
-            </a:pPr>
-            <a:r>
-              <a:t>Дано: Mg + O₂ → MgO, условие — нагрев.</a:t>
-            </a:r>
-          </a:p>
-          <a:p>
-            <a:pPr>
-              <a:spcAft>
-                <a:spcPts val="300"/>
-              </a:spcAft>
-              <a:defRPr sz="2200">
-                <a:solidFill>
-                  <a:srgbClr val="F3F0E8"/>
-                </a:solidFill>
-                <a:latin typeface="Manrope"/>
-              </a:defRPr>
-            </a:pPr>
-            <a:r>
-              <a:t>1. Посчитай атомы по обе стороны.</a:t>
-            </a:r>
-          </a:p>
-          <a:p>
-            <a:pPr>
-              <a:spcAft>
-                <a:spcPts val="300"/>
-              </a:spcAft>
-              <a:defRPr sz="2200">
-                <a:solidFill>
-                  <a:srgbClr val="F3F0E8"/>
-                </a:solidFill>
-                <a:latin typeface="Manrope"/>
-              </a:defRPr>
-            </a:pPr>
-            <a:r>
-              <a:t>2. Меняй только коэффициенты перед целыми формулами.</a:t>
-            </a:r>
-          </a:p>
-          <a:p>
-            <a:pPr>
-              <a:spcAft>
-                <a:spcPts val="300"/>
-              </a:spcAft>
-              <a:defRPr sz="2200">
-                <a:solidFill>
-                  <a:srgbClr val="F3F0E8"/>
-                </a:solidFill>
-                <a:latin typeface="Manrope"/>
-              </a:defRPr>
-            </a:pPr>
-            <a:r>
-              <a:t>3. Проверь каждый элемент.</a:t>
-            </a:r>
-          </a:p>
-          <a:p>
-            <a:pPr>
-              <a:spcAft>
-                <a:spcPts val="300"/>
-              </a:spcAft>
-              <a:defRPr sz="2200">
-                <a:solidFill>
-                  <a:srgbClr val="F3F0E8"/>
-                </a:solidFill>
-                <a:latin typeface="Manrope"/>
-              </a:defRPr>
-            </a:pPr>
-            <a:r>
-              <a:t>4. Возьми наименьшие целые коэффициенты.</a:t>
-            </a:r>
-          </a:p>
-          <a:p>
-            <a:pPr>
-              <a:spcAft>
-                <a:spcPts val="300"/>
-              </a:spcAft>
-              <a:defRPr sz="2200">
-                <a:solidFill>
-                  <a:srgbClr val="F3F0E8"/>
-                </a:solidFill>
-                <a:latin typeface="Manrope"/>
-              </a:defRPr>
-            </a:pPr>
-            <a:r>
-              <a:t>2Mg + O₂ → 2MgO. Mg: 2 = 2; O: 2 = 2.</a:t>
-            </a:r>
-          </a:p>
-          <a:p>
-            <a:pPr>
-              <a:spcAft>
-                <a:spcPts val="300"/>
-              </a:spcAft>
-              <a:defRPr sz="2200">
-                <a:solidFill>
-                  <a:srgbClr val="F3F0E8"/>
-                </a:solidFill>
-                <a:latin typeface="Manrope"/>
-              </a:defRPr>
-            </a:pPr>
-            <a:r>
-              <a:t>Соединение: несколько исходных веществ → одно вещество.</a:t>
-            </a:r>
-          </a:p>
-        </p:txBody>
-      </p:sp>
-      <p:sp>
-        <p:nvSpPr>
-          <p:cNvPr id="4" name="TextBox 3"/>
-          <p:cNvSpPr txBox="1"/>
-          <p:nvPr/>
-        </p:nvSpPr>
-        <p:spPr>
-          <a:xfrm>
-            <a:off x="731520" y="6400800"/>
-            <a:ext cx="10789920" cy="274320"/>
-          </a:xfrm>
-          <a:prstGeom prst="rect">
-            <a:avLst/>
-          </a:prstGeom>
-          <a:noFill/>
-        </p:spPr>
-        <p:txBody>
-          <a:bodyPr wrap="none">
-            <a:spAutoFit/>
-          </a:bodyPr>
-          <a:lstStyle/>
-          <a:p>
-            <a:pPr>
-              <a:defRPr sz="1200">
-                <a:solidFill>
-                  <a:srgbClr val="F3F0E8"/>
-                </a:solidFill>
-                <a:latin typeface="Manrope"/>
-              </a:defRPr>
-            </a:pPr>
-            <a:r>
-              <a:t>Черновик для проверки преподавателем • 10</a:t>
-            </a:r>
-          </a:p>
-        </p:txBody>
-      </p:sp>
+      </p:pic>
     </p:spTree>
   </p:cSld>
   <p:clrMapOvr>
@@ -5833,14 +6129,6 @@
 <file path=ppt/slides/slide11.xml><?xml version="1.0" encoding="utf-8"?>
 <p:sld xmlns:a="http://schemas.openxmlformats.org/drawingml/2006/main" xmlns:p="http://schemas.openxmlformats.org/presentationml/2006/main" xmlns:r="http://schemas.openxmlformats.org/officeDocument/2006/relationships">
   <p:cSld>
-    <p:bg>
-      <p:bgPr>
-        <a:solidFill>
-          <a:srgbClr val="151515"/>
-        </a:solidFill>
-        <a:effectLst/>
-      </p:bgPr>
-    </p:bg>
     <p:spTree>
       <p:nvGrpSpPr>
         <p:cNvPr id="1" name=""/>
@@ -5848,213 +6136,30 @@
         <p:nvPr/>
       </p:nvGrpSpPr>
       <p:grpSpPr/>
-      <p:sp>
-        <p:nvSpPr>
-          <p:cNvPr id="2" name="TextBox 1"/>
-          <p:cNvSpPr txBox="1"/>
+      <p:pic>
+        <p:nvPicPr>
+          <p:cNvPr id="2" name="Picture 1" descr="s11.png"/>
+          <p:cNvPicPr>
+            <a:picLocks noChangeAspect="1"/>
+          </p:cNvPicPr>
           <p:nvPr/>
-        </p:nvSpPr>
+        </p:nvPicPr>
+        <p:blipFill>
+          <a:blip r:embed="rId2"/>
+          <a:stretch>
+            <a:fillRect/>
+          </a:stretch>
+        </p:blipFill>
         <p:spPr>
           <a:xfrm>
-            <a:off x="640080" y="365760"/>
-            <a:ext cx="10972800" cy="822960"/>
+            <a:off x="0" y="0"/>
+            <a:ext cx="12191695" cy="6858000"/>
           </a:xfrm>
           <a:prstGeom prst="rect">
             <a:avLst/>
           </a:prstGeom>
-          <a:noFill/>
         </p:spPr>
-        <p:txBody>
-          <a:bodyPr wrap="none">
-            <a:spAutoFit/>
-          </a:bodyPr>
-          <a:lstStyle/>
-          <a:p>
-            <a:pPr>
-              <a:defRPr sz="1991" b="1">
-                <a:solidFill>
-                  <a:srgbClr val="F13A43"/>
-                </a:solidFill>
-                <a:latin typeface="Unbounded"/>
-              </a:defRPr>
-            </a:pPr>
-            <a:r>
-              <a:t>Слайд 11. Разложение: коэффициент 1 тоже подходит</a:t>
-            </a:r>
-          </a:p>
-        </p:txBody>
-      </p:sp>
-      <p:sp>
-        <p:nvSpPr>
-          <p:cNvPr id="3" name="TextBox 2"/>
-          <p:cNvSpPr txBox="1"/>
-          <p:nvPr/>
-        </p:nvSpPr>
-        <p:spPr>
-          <a:xfrm>
-            <a:off x="731520" y="1417320"/>
-            <a:ext cx="10789920" cy="4709160"/>
-          </a:xfrm>
-          <a:prstGeom prst="rect">
-            <a:avLst/>
-          </a:prstGeom>
-          <a:noFill/>
-        </p:spPr>
-        <p:txBody>
-          <a:bodyPr wrap="square">
-            <a:spAutoFit/>
-          </a:bodyPr>
-          <a:lstStyle/>
-          <a:p>
-            <a:pPr>
-              <a:spcAft>
-                <a:spcPts val="300"/>
-              </a:spcAft>
-              <a:defRPr sz="2200">
-                <a:solidFill>
-                  <a:srgbClr val="F3F0E8"/>
-                </a:solidFill>
-                <a:latin typeface="Manrope"/>
-              </a:defRPr>
-            </a:pPr>
-            <a:r>
-              <a:t>Дано: CaCO₃ → CaO + CO₂, условие — нагрев.</a:t>
-            </a:r>
-          </a:p>
-          <a:p>
-            <a:pPr>
-              <a:spcAft>
-                <a:spcPts val="300"/>
-              </a:spcAft>
-              <a:defRPr sz="2200">
-                <a:solidFill>
-                  <a:srgbClr val="F3F0E8"/>
-                </a:solidFill>
-                <a:latin typeface="Manrope"/>
-              </a:defRPr>
-            </a:pPr>
-            <a:r>
-              <a:t>Элемент  ·  Слева  ·  Справа</a:t>
-            </a:r>
-          </a:p>
-          <a:p>
-            <a:pPr>
-              <a:spcAft>
-                <a:spcPts val="300"/>
-              </a:spcAft>
-              <a:defRPr sz="2200">
-                <a:solidFill>
-                  <a:srgbClr val="F3F0E8"/>
-                </a:solidFill>
-                <a:latin typeface="Manrope"/>
-              </a:defRPr>
-            </a:pPr>
-            <a:r>
-              <a:t>Ca  ·  1  ·  1</a:t>
-            </a:r>
-          </a:p>
-          <a:p>
-            <a:pPr>
-              <a:spcAft>
-                <a:spcPts val="300"/>
-              </a:spcAft>
-              <a:defRPr sz="2200">
-                <a:solidFill>
-                  <a:srgbClr val="F3F0E8"/>
-                </a:solidFill>
-                <a:latin typeface="Manrope"/>
-              </a:defRPr>
-            </a:pPr>
-            <a:r>
-              <a:t>C  ·  1  ·  1</a:t>
-            </a:r>
-          </a:p>
-          <a:p>
-            <a:pPr>
-              <a:spcAft>
-                <a:spcPts val="300"/>
-              </a:spcAft>
-              <a:defRPr sz="2200">
-                <a:solidFill>
-                  <a:srgbClr val="F3F0E8"/>
-                </a:solidFill>
-                <a:latin typeface="Manrope"/>
-              </a:defRPr>
-            </a:pPr>
-            <a:r>
-              <a:t>O  ·  3  ·  1 + 2 = 3</a:t>
-            </a:r>
-          </a:p>
-          <a:p>
-            <a:pPr>
-              <a:spcAft>
-                <a:spcPts val="300"/>
-              </a:spcAft>
-              <a:defRPr sz="2200">
-                <a:solidFill>
-                  <a:srgbClr val="F3F0E8"/>
-                </a:solidFill>
-                <a:latin typeface="Manrope"/>
-              </a:defRPr>
-            </a:pPr>
-            <a:r>
-              <a:t>Коэффициенты 1 : 1 : 1, единицы обычно не пишем.</a:t>
-            </a:r>
-          </a:p>
-          <a:p>
-            <a:pPr>
-              <a:spcAft>
-                <a:spcPts val="300"/>
-              </a:spcAft>
-              <a:defRPr sz="2200">
-                <a:solidFill>
-                  <a:srgbClr val="F3F0E8"/>
-                </a:solidFill>
-                <a:latin typeface="Manrope"/>
-              </a:defRPr>
-            </a:pPr>
-            <a:r>
-              <a:t>Разложение: одно исходное вещество → несколько веществ.</a:t>
-            </a:r>
-          </a:p>
-        </p:txBody>
-      </p:sp>
-      <p:sp>
-        <p:nvSpPr>
-          <p:cNvPr id="4" name="TextBox 3"/>
-          <p:cNvSpPr txBox="1"/>
-          <p:nvPr/>
-        </p:nvSpPr>
-        <p:spPr>
-          <a:xfrm>
-            <a:off x="731520" y="6400800"/>
-            <a:ext cx="10789920" cy="274320"/>
-          </a:xfrm>
-          <a:prstGeom prst="rect">
-            <a:avLst/>
-          </a:prstGeom>
-          <a:noFill/>
-        </p:spPr>
-        <p:txBody>
-          <a:bodyPr wrap="none">
-            <a:spAutoFit/>
-          </a:bodyPr>
-          <a:lstStyle/>
-          <a:p>
-            <a:pPr>
-              <a:defRPr sz="1200">
-                <a:solidFill>
-                  <a:srgbClr val="F3F0E8"/>
-                </a:solidFill>
-                <a:latin typeface="Manrope"/>
-              </a:defRPr>
-            </a:pPr>
-            <a:r>
-              <a:t>Черновик для проверки преподавателем • 11</a:t>
-            </a:r>
-          </a:p>
-        </p:txBody>
-      </p:sp>
+      </p:pic>
     </p:spTree>
   </p:cSld>
   <p:clrMapOvr>
@@ -6066,14 +6171,6 @@
 <file path=ppt/slides/slide12.xml><?xml version="1.0" encoding="utf-8"?>
 <p:sld xmlns:a="http://schemas.openxmlformats.org/drawingml/2006/main" xmlns:p="http://schemas.openxmlformats.org/presentationml/2006/main" xmlns:r="http://schemas.openxmlformats.org/officeDocument/2006/relationships">
   <p:cSld>
-    <p:bg>
-      <p:bgPr>
-        <a:solidFill>
-          <a:srgbClr val="151515"/>
-        </a:solidFill>
-        <a:effectLst/>
-      </p:bgPr>
-    </p:bg>
     <p:spTree>
       <p:nvGrpSpPr>
         <p:cNvPr id="1" name=""/>
@@ -6081,165 +6178,30 @@
         <p:nvPr/>
       </p:nvGrpSpPr>
       <p:grpSpPr/>
-      <p:sp>
-        <p:nvSpPr>
-          <p:cNvPr id="2" name="TextBox 1"/>
-          <p:cNvSpPr txBox="1"/>
+      <p:pic>
+        <p:nvPicPr>
+          <p:cNvPr id="2" name="Picture 1" descr="s12.png"/>
+          <p:cNvPicPr>
+            <a:picLocks noChangeAspect="1"/>
+          </p:cNvPicPr>
           <p:nvPr/>
-        </p:nvSpPr>
+        </p:nvPicPr>
+        <p:blipFill>
+          <a:blip r:embed="rId2"/>
+          <a:stretch>
+            <a:fillRect/>
+          </a:stretch>
+        </p:blipFill>
         <p:spPr>
           <a:xfrm>
-            <a:off x="640080" y="365760"/>
-            <a:ext cx="10972800" cy="822960"/>
+            <a:off x="0" y="0"/>
+            <a:ext cx="12191695" cy="6858000"/>
           </a:xfrm>
           <a:prstGeom prst="rect">
             <a:avLst/>
           </a:prstGeom>
-          <a:noFill/>
         </p:spPr>
-        <p:txBody>
-          <a:bodyPr wrap="none">
-            <a:spAutoFit/>
-          </a:bodyPr>
-          <a:lstStyle/>
-          <a:p>
-            <a:pPr>
-              <a:defRPr sz="2322" b="1">
-                <a:solidFill>
-                  <a:srgbClr val="F13A43"/>
-                </a:solidFill>
-                <a:latin typeface="Unbounded"/>
-              </a:defRPr>
-            </a:pPr>
-            <a:r>
-              <a:t>Слайд 12. Короткая попытка и следующий шаг</a:t>
-            </a:r>
-          </a:p>
-        </p:txBody>
-      </p:sp>
-      <p:sp>
-        <p:nvSpPr>
-          <p:cNvPr id="3" name="TextBox 2"/>
-          <p:cNvSpPr txBox="1"/>
-          <p:nvPr/>
-        </p:nvSpPr>
-        <p:spPr>
-          <a:xfrm>
-            <a:off x="731520" y="1417320"/>
-            <a:ext cx="10789920" cy="4709160"/>
-          </a:xfrm>
-          <a:prstGeom prst="rect">
-            <a:avLst/>
-          </a:prstGeom>
-          <a:noFill/>
-        </p:spPr>
-        <p:txBody>
-          <a:bodyPr wrap="square">
-            <a:spAutoFit/>
-          </a:bodyPr>
-          <a:lstStyle/>
-          <a:p>
-            <a:pPr>
-              <a:spcAft>
-                <a:spcPts val="300"/>
-              </a:spcAft>
-              <a:defRPr sz="2200">
-                <a:solidFill>
-                  <a:srgbClr val="F3F0E8"/>
-                </a:solidFill>
-                <a:latin typeface="Manrope"/>
-              </a:defRPr>
-            </a:pPr>
-            <a:r>
-              <a:t>L6. Na(I), O(II): составь простую формулу и проверь валентности.</a:t>
-            </a:r>
-          </a:p>
-          <a:p>
-            <a:pPr>
-              <a:spcAft>
-                <a:spcPts val="300"/>
-              </a:spcAft>
-              <a:defRPr sz="2200">
-                <a:solidFill>
-                  <a:srgbClr val="F3F0E8"/>
-                </a:solidFill>
-                <a:latin typeface="Manrope"/>
-              </a:defRPr>
-            </a:pPr>
-            <a:r>
-              <a:t>L7. CaO: найди относительную формульную массу и ω(O) в процентах. Aᵣ(Ca) = 40, Aᵣ(O) = 16.</a:t>
-            </a:r>
-          </a:p>
-          <a:p>
-            <a:pPr>
-              <a:spcAft>
-                <a:spcPts val="300"/>
-              </a:spcAft>
-              <a:defRPr sz="2200">
-                <a:solidFill>
-                  <a:srgbClr val="F3F0E8"/>
-                </a:solidFill>
-                <a:latin typeface="Manrope"/>
-              </a:defRPr>
-            </a:pPr>
-            <a:r>
-              <a:t>L8. Mg + O₂ → MgO: уравняй и назови тип.</a:t>
-            </a:r>
-          </a:p>
-          <a:p>
-            <a:pPr>
-              <a:spcAft>
-                <a:spcPts val="300"/>
-              </a:spcAft>
-              <a:defRPr sz="2200">
-                <a:solidFill>
-                  <a:srgbClr val="F3F0E8"/>
-                </a:solidFill>
-                <a:latin typeface="Manrope"/>
-              </a:defRPr>
-            </a:pPr>
-            <a:r>
-              <a:t>До урока 4: G1–G3 из ДЗ, 15 минут. Запиши один вопрос, который остался.</a:t>
-            </a:r>
-          </a:p>
-        </p:txBody>
-      </p:sp>
-      <p:sp>
-        <p:nvSpPr>
-          <p:cNvPr id="4" name="TextBox 3"/>
-          <p:cNvSpPr txBox="1"/>
-          <p:nvPr/>
-        </p:nvSpPr>
-        <p:spPr>
-          <a:xfrm>
-            <a:off x="731520" y="6400800"/>
-            <a:ext cx="10789920" cy="274320"/>
-          </a:xfrm>
-          <a:prstGeom prst="rect">
-            <a:avLst/>
-          </a:prstGeom>
-          <a:noFill/>
-        </p:spPr>
-        <p:txBody>
-          <a:bodyPr wrap="none">
-            <a:spAutoFit/>
-          </a:bodyPr>
-          <a:lstStyle/>
-          <a:p>
-            <a:pPr>
-              <a:defRPr sz="1200">
-                <a:solidFill>
-                  <a:srgbClr val="F3F0E8"/>
-                </a:solidFill>
-                <a:latin typeface="Manrope"/>
-              </a:defRPr>
-            </a:pPr>
-            <a:r>
-              <a:t>Черновик для проверки преподавателем • 12</a:t>
-            </a:r>
-          </a:p>
-        </p:txBody>
-      </p:sp>
+      </p:pic>
     </p:spTree>
   </p:cSld>
   <p:clrMapOvr>
@@ -6251,14 +6213,6 @@
 <file path=ppt/slides/slide13.xml><?xml version="1.0" encoding="utf-8"?>
 <p:sld xmlns:a="http://schemas.openxmlformats.org/drawingml/2006/main" xmlns:p="http://schemas.openxmlformats.org/presentationml/2006/main" xmlns:r="http://schemas.openxmlformats.org/officeDocument/2006/relationships">
   <p:cSld>
-    <p:bg>
-      <p:bgPr>
-        <a:solidFill>
-          <a:srgbClr val="151515"/>
-        </a:solidFill>
-        <a:effectLst/>
-      </p:bgPr>
-    </p:bg>
     <p:spTree>
       <p:nvGrpSpPr>
         <p:cNvPr id="1" name=""/>
@@ -6266,149 +6220,30 @@
         <p:nvPr/>
       </p:nvGrpSpPr>
       <p:grpSpPr/>
-      <p:sp>
-        <p:nvSpPr>
-          <p:cNvPr id="2" name="TextBox 1"/>
-          <p:cNvSpPr txBox="1"/>
+      <p:pic>
+        <p:nvPicPr>
+          <p:cNvPr id="2" name="Picture 1" descr="s13.png"/>
+          <p:cNvPicPr>
+            <a:picLocks noChangeAspect="1"/>
+          </p:cNvPicPr>
           <p:nvPr/>
-        </p:nvSpPr>
+        </p:nvPicPr>
+        <p:blipFill>
+          <a:blip r:embed="rId2"/>
+          <a:stretch>
+            <a:fillRect/>
+          </a:stretch>
+        </p:blipFill>
         <p:spPr>
           <a:xfrm>
-            <a:off x="640080" y="365760"/>
-            <a:ext cx="10972800" cy="822960"/>
+            <a:off x="0" y="0"/>
+            <a:ext cx="12191695" cy="6858000"/>
           </a:xfrm>
           <a:prstGeom prst="rect">
             <a:avLst/>
           </a:prstGeom>
-          <a:noFill/>
         </p:spPr>
-        <p:txBody>
-          <a:bodyPr wrap="none">
-            <a:spAutoFit/>
-          </a:bodyPr>
-          <a:lstStyle/>
-          <a:p>
-            <a:pPr>
-              <a:defRPr sz="2710" b="1">
-                <a:solidFill>
-                  <a:srgbClr val="F13A43"/>
-                </a:solidFill>
-                <a:latin typeface="Unbounded"/>
-              </a:defRPr>
-            </a:pPr>
-            <a:r>
-              <a:t>Слайд 13. Урок 4: повторяем алгоритм</a:t>
-            </a:r>
-          </a:p>
-        </p:txBody>
-      </p:sp>
-      <p:sp>
-        <p:nvSpPr>
-          <p:cNvPr id="3" name="TextBox 2"/>
-          <p:cNvSpPr txBox="1"/>
-          <p:nvPr/>
-        </p:nvSpPr>
-        <p:spPr>
-          <a:xfrm>
-            <a:off x="731520" y="1417320"/>
-            <a:ext cx="10789920" cy="4709160"/>
-          </a:xfrm>
-          <a:prstGeom prst="rect">
-            <a:avLst/>
-          </a:prstGeom>
-          <a:noFill/>
-        </p:spPr>
-        <p:txBody>
-          <a:bodyPr wrap="square">
-            <a:spAutoFit/>
-          </a:bodyPr>
-          <a:lstStyle/>
-          <a:p>
-            <a:pPr>
-              <a:spcAft>
-                <a:spcPts val="300"/>
-              </a:spcAft>
-              <a:defRPr sz="2200">
-                <a:solidFill>
-                  <a:srgbClr val="F3F0E8"/>
-                </a:solidFill>
-                <a:latin typeface="Manrope"/>
-              </a:defRPr>
-            </a:pPr>
-            <a:r>
-              <a:t>L9. Ca(II), O(II): формула с наименьшими индексами и относительная формульная масса. Aᵣ(Ca) = 40, O = 16.</a:t>
-            </a:r>
-          </a:p>
-          <a:p>
-            <a:pPr>
-              <a:spcAft>
-                <a:spcPts val="300"/>
-              </a:spcAft>
-              <a:defRPr sz="2200">
-                <a:solidFill>
-                  <a:srgbClr val="F3F0E8"/>
-                </a:solidFill>
-                <a:latin typeface="Manrope"/>
-              </a:defRPr>
-            </a:pPr>
-            <a:r>
-              <a:t>L10. а) MgO: найди ω(O) в %. Aᵣ(Mg) = 24, O = 16. б) CaCO₃ → CaO + CO₂ при нагревании: проверь коэффициенты и назови тип.</a:t>
-            </a:r>
-          </a:p>
-          <a:p>
-            <a:pPr>
-              <a:spcAft>
-                <a:spcPts val="300"/>
-              </a:spcAft>
-              <a:defRPr sz="2200">
-                <a:solidFill>
-                  <a:srgbClr val="F3F0E8"/>
-                </a:solidFill>
-                <a:latin typeface="Manrope"/>
-              </a:defRPr>
-            </a:pPr>
-            <a:r>
-              <a:t>Самопроверка: индексы → вся относительная масса → вклад элемента → коэффициенты → атомы → тип.</a:t>
-            </a:r>
-          </a:p>
-        </p:txBody>
-      </p:sp>
-      <p:sp>
-        <p:nvSpPr>
-          <p:cNvPr id="4" name="TextBox 3"/>
-          <p:cNvSpPr txBox="1"/>
-          <p:nvPr/>
-        </p:nvSpPr>
-        <p:spPr>
-          <a:xfrm>
-            <a:off x="731520" y="6400800"/>
-            <a:ext cx="10789920" cy="274320"/>
-          </a:xfrm>
-          <a:prstGeom prst="rect">
-            <a:avLst/>
-          </a:prstGeom>
-          <a:noFill/>
-        </p:spPr>
-        <p:txBody>
-          <a:bodyPr wrap="none">
-            <a:spAutoFit/>
-          </a:bodyPr>
-          <a:lstStyle/>
-          <a:p>
-            <a:pPr>
-              <a:defRPr sz="1200">
-                <a:solidFill>
-                  <a:srgbClr val="F3F0E8"/>
-                </a:solidFill>
-                <a:latin typeface="Manrope"/>
-              </a:defRPr>
-            </a:pPr>
-            <a:r>
-              <a:t>Черновик для проверки преподавателем • 13</a:t>
-            </a:r>
-          </a:p>
-        </p:txBody>
-      </p:sp>
+      </p:pic>
     </p:spTree>
   </p:cSld>
   <p:clrMapOvr>
@@ -6420,14 +6255,6 @@
 <file path=ppt/slides/slide14.xml><?xml version="1.0" encoding="utf-8"?>
 <p:sld xmlns:a="http://schemas.openxmlformats.org/drawingml/2006/main" xmlns:p="http://schemas.openxmlformats.org/presentationml/2006/main" xmlns:r="http://schemas.openxmlformats.org/officeDocument/2006/relationships">
   <p:cSld>
-    <p:bg>
-      <p:bgPr>
-        <a:solidFill>
-          <a:srgbClr val="151515"/>
-        </a:solidFill>
-        <a:effectLst/>
-      </p:bgPr>
-    </p:bg>
     <p:spTree>
       <p:nvGrpSpPr>
         <p:cNvPr id="1" name=""/>
@@ -6435,149 +6262,30 @@
         <p:nvPr/>
       </p:nvGrpSpPr>
       <p:grpSpPr/>
-      <p:sp>
-        <p:nvSpPr>
-          <p:cNvPr id="2" name="TextBox 1"/>
-          <p:cNvSpPr txBox="1"/>
+      <p:pic>
+        <p:nvPicPr>
+          <p:cNvPr id="2" name="Picture 1" descr="s14.png"/>
+          <p:cNvPicPr>
+            <a:picLocks noChangeAspect="1"/>
+          </p:cNvPicPr>
           <p:nvPr/>
-        </p:nvSpPr>
+        </p:nvPicPr>
+        <p:blipFill>
+          <a:blip r:embed="rId2"/>
+          <a:stretch>
+            <a:fillRect/>
+          </a:stretch>
+        </p:blipFill>
         <p:spPr>
           <a:xfrm>
-            <a:off x="640080" y="365760"/>
-            <a:ext cx="10972800" cy="822960"/>
+            <a:off x="0" y="0"/>
+            <a:ext cx="12191695" cy="6858000"/>
           </a:xfrm>
           <a:prstGeom prst="rect">
             <a:avLst/>
           </a:prstGeom>
-          <a:noFill/>
         </p:spPr>
-        <p:txBody>
-          <a:bodyPr wrap="none">
-            <a:spAutoFit/>
-          </a:bodyPr>
-          <a:lstStyle/>
-          <a:p>
-            <a:pPr>
-              <a:defRPr sz="2800" b="1">
-                <a:solidFill>
-                  <a:srgbClr val="F13A43"/>
-                </a:solidFill>
-                <a:latin typeface="Unbounded"/>
-              </a:defRPr>
-            </a:pPr>
-            <a:r>
-              <a:t>Слайд 14. Формула и вклад элемента</a:t>
-            </a:r>
-          </a:p>
-        </p:txBody>
-      </p:sp>
-      <p:sp>
-        <p:nvSpPr>
-          <p:cNvPr id="3" name="TextBox 2"/>
-          <p:cNvSpPr txBox="1"/>
-          <p:nvPr/>
-        </p:nvSpPr>
-        <p:spPr>
-          <a:xfrm>
-            <a:off x="731520" y="1417320"/>
-            <a:ext cx="10789920" cy="4709160"/>
-          </a:xfrm>
-          <a:prstGeom prst="rect">
-            <a:avLst/>
-          </a:prstGeom>
-          <a:noFill/>
-        </p:spPr>
-        <p:txBody>
-          <a:bodyPr wrap="square">
-            <a:spAutoFit/>
-          </a:bodyPr>
-          <a:lstStyle/>
-          <a:p>
-            <a:pPr>
-              <a:spcAft>
-                <a:spcPts val="300"/>
-              </a:spcAft>
-              <a:defRPr sz="2200">
-                <a:solidFill>
-                  <a:srgbClr val="F3F0E8"/>
-                </a:solidFill>
-                <a:latin typeface="Manrope"/>
-              </a:defRPr>
-            </a:pPr>
-            <a:r>
-              <a:t>L11. Даны Mg(II), Na(I), O(II). Составь формулы Mg/O и Na/O, проверь валентности.</a:t>
-            </a:r>
-          </a:p>
-          <a:p>
-            <a:pPr>
-              <a:spcAft>
-                <a:spcPts val="300"/>
-              </a:spcAft>
-              <a:defRPr sz="2200">
-                <a:solidFill>
-                  <a:srgbClr val="F3F0E8"/>
-                </a:solidFill>
-                <a:latin typeface="Manrope"/>
-              </a:defRPr>
-            </a:pPr>
-            <a:r>
-              <a:t>L12. Для данной Al₂O₃ найди Mᵣ и ω(O) в %. Проверь по доле Al. Aᵣ(Al) = 27, Aᵣ(O) = 16.</a:t>
-            </a:r>
-          </a:p>
-          <a:p>
-            <a:pPr>
-              <a:spcAft>
-                <a:spcPts val="300"/>
-              </a:spcAft>
-              <a:defRPr sz="2200">
-                <a:solidFill>
-                  <a:srgbClr val="F3F0E8"/>
-                </a:solidFill>
-                <a:latin typeface="Manrope"/>
-              </a:defRPr>
-            </a:pPr>
-            <a:r>
-              <a:t>Строки решения: индекс · Aᵣ → сумма → вклад O / сумма → процент.</a:t>
-            </a:r>
-          </a:p>
-        </p:txBody>
-      </p:sp>
-      <p:sp>
-        <p:nvSpPr>
-          <p:cNvPr id="4" name="TextBox 3"/>
-          <p:cNvSpPr txBox="1"/>
-          <p:nvPr/>
-        </p:nvSpPr>
-        <p:spPr>
-          <a:xfrm>
-            <a:off x="731520" y="6400800"/>
-            <a:ext cx="10789920" cy="274320"/>
-          </a:xfrm>
-          <a:prstGeom prst="rect">
-            <a:avLst/>
-          </a:prstGeom>
-          <a:noFill/>
-        </p:spPr>
-        <p:txBody>
-          <a:bodyPr wrap="none">
-            <a:spAutoFit/>
-          </a:bodyPr>
-          <a:lstStyle/>
-          <a:p>
-            <a:pPr>
-              <a:defRPr sz="1200">
-                <a:solidFill>
-                  <a:srgbClr val="F3F0E8"/>
-                </a:solidFill>
-                <a:latin typeface="Manrope"/>
-              </a:defRPr>
-            </a:pPr>
-            <a:r>
-              <a:t>Черновик для проверки преподавателем • 14</a:t>
-            </a:r>
-          </a:p>
-        </p:txBody>
-      </p:sp>
+      </p:pic>
     </p:spTree>
   </p:cSld>
   <p:clrMapOvr>
@@ -6589,14 +6297,6 @@
 <file path=ppt/slides/slide15.xml><?xml version="1.0" encoding="utf-8"?>
 <p:sld xmlns:a="http://schemas.openxmlformats.org/drawingml/2006/main" xmlns:p="http://schemas.openxmlformats.org/presentationml/2006/main" xmlns:r="http://schemas.openxmlformats.org/officeDocument/2006/relationships">
   <p:cSld>
-    <p:bg>
-      <p:bgPr>
-        <a:solidFill>
-          <a:srgbClr val="151515"/>
-        </a:solidFill>
-        <a:effectLst/>
-      </p:bgPr>
-    </p:bg>
     <p:spTree>
       <p:nvGrpSpPr>
         <p:cNvPr id="1" name=""/>
@@ -6604,181 +6304,30 @@
         <p:nvPr/>
       </p:nvGrpSpPr>
       <p:grpSpPr/>
-      <p:sp>
-        <p:nvSpPr>
-          <p:cNvPr id="2" name="TextBox 1"/>
-          <p:cNvSpPr txBox="1"/>
+      <p:pic>
+        <p:nvPicPr>
+          <p:cNvPr id="2" name="Picture 1" descr="s15.png"/>
+          <p:cNvPicPr>
+            <a:picLocks noChangeAspect="1"/>
+          </p:cNvPicPr>
           <p:nvPr/>
-        </p:nvSpPr>
+        </p:nvPicPr>
+        <p:blipFill>
+          <a:blip r:embed="rId2"/>
+          <a:stretch>
+            <a:fillRect/>
+          </a:stretch>
+        </p:blipFill>
         <p:spPr>
           <a:xfrm>
-            <a:off x="640080" y="365760"/>
-            <a:ext cx="10972800" cy="822960"/>
+            <a:off x="0" y="0"/>
+            <a:ext cx="12191695" cy="6858000"/>
           </a:xfrm>
           <a:prstGeom prst="rect">
             <a:avLst/>
           </a:prstGeom>
-          <a:noFill/>
         </p:spPr>
-        <p:txBody>
-          <a:bodyPr wrap="none">
-            <a:spAutoFit/>
-          </a:bodyPr>
-          <a:lstStyle/>
-          <a:p>
-            <a:pPr>
-              <a:defRPr sz="2439" b="1">
-                <a:solidFill>
-                  <a:srgbClr val="F13A43"/>
-                </a:solidFill>
-                <a:latin typeface="Unbounded"/>
-              </a:defRPr>
-            </a:pPr>
-            <a:r>
-              <a:t>Слайд 15. Та же проверка на новых схемах</a:t>
-            </a:r>
-          </a:p>
-        </p:txBody>
-      </p:sp>
-      <p:sp>
-        <p:nvSpPr>
-          <p:cNvPr id="3" name="TextBox 2"/>
-          <p:cNvSpPr txBox="1"/>
-          <p:nvPr/>
-        </p:nvSpPr>
-        <p:spPr>
-          <a:xfrm>
-            <a:off x="731520" y="1417320"/>
-            <a:ext cx="10789920" cy="4709160"/>
-          </a:xfrm>
-          <a:prstGeom prst="rect">
-            <a:avLst/>
-          </a:prstGeom>
-          <a:noFill/>
-        </p:spPr>
-        <p:txBody>
-          <a:bodyPr wrap="square">
-            <a:spAutoFit/>
-          </a:bodyPr>
-          <a:lstStyle/>
-          <a:p>
-            <a:pPr>
-              <a:spcAft>
-                <a:spcPts val="300"/>
-              </a:spcAft>
-              <a:defRPr sz="2200">
-                <a:solidFill>
-                  <a:srgbClr val="F3F0E8"/>
-                </a:solidFill>
-                <a:latin typeface="Manrope"/>
-              </a:defRPr>
-            </a:pPr>
-            <a:r>
-              <a:t>Подбери наименьшие целые коэффициенты. Сохрани все формулы, проверь каждый элемент, назови соединение или разложение.</a:t>
-            </a:r>
-          </a:p>
-          <a:p>
-            <a:pPr>
-              <a:spcAft>
-                <a:spcPts val="300"/>
-              </a:spcAft>
-              <a:defRPr sz="2200">
-                <a:solidFill>
-                  <a:srgbClr val="F3F0E8"/>
-                </a:solidFill>
-                <a:latin typeface="Manrope"/>
-              </a:defRPr>
-            </a:pPr>
-            <a:r>
-              <a:t>L13: Al + O₂ → Al₂O₃, нагрев.</a:t>
-            </a:r>
-          </a:p>
-          <a:p>
-            <a:pPr>
-              <a:spcAft>
-                <a:spcPts val="300"/>
-              </a:spcAft>
-              <a:defRPr sz="2200">
-                <a:solidFill>
-                  <a:srgbClr val="F3F0E8"/>
-                </a:solidFill>
-                <a:latin typeface="Manrope"/>
-              </a:defRPr>
-            </a:pPr>
-            <a:r>
-              <a:t>L14: H₂O₂ → H₂O + O₂, катализатор — данное условие.</a:t>
-            </a:r>
-          </a:p>
-          <a:p>
-            <a:pPr>
-              <a:spcAft>
-                <a:spcPts val="300"/>
-              </a:spcAft>
-              <a:defRPr sz="2200">
-                <a:solidFill>
-                  <a:srgbClr val="F3F0E8"/>
-                </a:solidFill>
-                <a:latin typeface="Manrope"/>
-              </a:defRPr>
-            </a:pPr>
-            <a:r>
-              <a:t>L16: H₂ + Cl₂ → HCl, инициирование светом.</a:t>
-            </a:r>
-          </a:p>
-          <a:p>
-            <a:pPr>
-              <a:spcAft>
-                <a:spcPts val="300"/>
-              </a:spcAft>
-              <a:defRPr sz="2200">
-                <a:solidFill>
-                  <a:srgbClr val="F3F0E8"/>
-                </a:solidFill>
-                <a:latin typeface="Manrope"/>
-              </a:defRPr>
-            </a:pPr>
-            <a:r>
-              <a:t>Схемы решаем на бумаге; домашние опыты с нагревом и газами не назначаются.</a:t>
-            </a:r>
-          </a:p>
-        </p:txBody>
-      </p:sp>
-      <p:sp>
-        <p:nvSpPr>
-          <p:cNvPr id="4" name="TextBox 3"/>
-          <p:cNvSpPr txBox="1"/>
-          <p:nvPr/>
-        </p:nvSpPr>
-        <p:spPr>
-          <a:xfrm>
-            <a:off x="731520" y="6400800"/>
-            <a:ext cx="10789920" cy="274320"/>
-          </a:xfrm>
-          <a:prstGeom prst="rect">
-            <a:avLst/>
-          </a:prstGeom>
-          <a:noFill/>
-        </p:spPr>
-        <p:txBody>
-          <a:bodyPr wrap="none">
-            <a:spAutoFit/>
-          </a:bodyPr>
-          <a:lstStyle/>
-          <a:p>
-            <a:pPr>
-              <a:defRPr sz="1200">
-                <a:solidFill>
-                  <a:srgbClr val="F3F0E8"/>
-                </a:solidFill>
-                <a:latin typeface="Manrope"/>
-              </a:defRPr>
-            </a:pPr>
-            <a:r>
-              <a:t>Черновик для проверки преподавателем • 15</a:t>
-            </a:r>
-          </a:p>
-        </p:txBody>
-      </p:sp>
+      </p:pic>
     </p:spTree>
   </p:cSld>
   <p:clrMapOvr>
@@ -6790,14 +6339,6 @@
 <file path=ppt/slides/slide16.xml><?xml version="1.0" encoding="utf-8"?>
 <p:sld xmlns:a="http://schemas.openxmlformats.org/drawingml/2006/main" xmlns:p="http://schemas.openxmlformats.org/presentationml/2006/main" xmlns:r="http://schemas.openxmlformats.org/officeDocument/2006/relationships">
   <p:cSld>
-    <p:bg>
-      <p:bgPr>
-        <a:solidFill>
-          <a:srgbClr val="151515"/>
-        </a:solidFill>
-        <a:effectLst/>
-      </p:bgPr>
-    </p:bg>
     <p:spTree>
       <p:nvGrpSpPr>
         <p:cNvPr id="1" name=""/>
@@ -6805,149 +6346,30 @@
         <p:nvPr/>
       </p:nvGrpSpPr>
       <p:grpSpPr/>
-      <p:sp>
-        <p:nvSpPr>
-          <p:cNvPr id="2" name="TextBox 1"/>
-          <p:cNvSpPr txBox="1"/>
+      <p:pic>
+        <p:nvPicPr>
+          <p:cNvPr id="2" name="Picture 1" descr="s16.png"/>
+          <p:cNvPicPr>
+            <a:picLocks noChangeAspect="1"/>
+          </p:cNvPicPr>
           <p:nvPr/>
-        </p:nvSpPr>
+        </p:nvPicPr>
+        <p:blipFill>
+          <a:blip r:embed="rId2"/>
+          <a:stretch>
+            <a:fillRect/>
+          </a:stretch>
+        </p:blipFill>
         <p:spPr>
           <a:xfrm>
-            <a:off x="640080" y="365760"/>
-            <a:ext cx="10972800" cy="822960"/>
+            <a:off x="0" y="0"/>
+            <a:ext cx="12191695" cy="6858000"/>
           </a:xfrm>
           <a:prstGeom prst="rect">
             <a:avLst/>
           </a:prstGeom>
-          <a:noFill/>
         </p:spPr>
-        <p:txBody>
-          <a:bodyPr wrap="none">
-            <a:spAutoFit/>
-          </a:bodyPr>
-          <a:lstStyle/>
-          <a:p>
-            <a:pPr>
-              <a:defRPr sz="1951" b="1">
-                <a:solidFill>
-                  <a:srgbClr val="F13A43"/>
-                </a:solidFill>
-                <a:latin typeface="Unbounded"/>
-              </a:defRPr>
-            </a:pPr>
-            <a:r>
-              <a:t>Слайд 16. Масса системы, контроль, домашняя работа</a:t>
-            </a:r>
-          </a:p>
-        </p:txBody>
-      </p:sp>
-      <p:sp>
-        <p:nvSpPr>
-          <p:cNvPr id="3" name="TextBox 2"/>
-          <p:cNvSpPr txBox="1"/>
-          <p:nvPr/>
-        </p:nvSpPr>
-        <p:spPr>
-          <a:xfrm>
-            <a:off x="731520" y="1417320"/>
-            <a:ext cx="10789920" cy="4709160"/>
-          </a:xfrm>
-          <a:prstGeom prst="rect">
-            <a:avLst/>
-          </a:prstGeom>
-          <a:noFill/>
-        </p:spPr>
-        <p:txBody>
-          <a:bodyPr wrap="square">
-            <a:spAutoFit/>
-          </a:bodyPr>
-          <a:lstStyle/>
-          <a:p>
-            <a:pPr>
-              <a:spcAft>
-                <a:spcPts val="300"/>
-              </a:spcAft>
-              <a:defRPr sz="2200">
-                <a:solidFill>
-                  <a:srgbClr val="F3F0E8"/>
-                </a:solidFill>
-                <a:latin typeface="Manrope"/>
-              </a:defRPr>
-            </a:pPr>
-            <a:r>
-              <a:t>L15. В замкнутой системе 10 г CaCO₃ полностью разложились на CaO и CO₂. Масса CaO — 5,6 г, газ остался в системе. Найди массу CO₂ и суммарную массу продуктов. Почему в открытом сосуде нельзя сравнить только остаток с начальной массой?</a:t>
-            </a:r>
-          </a:p>
-          <a:p>
-            <a:pPr>
-              <a:spcAft>
-                <a:spcPts val="300"/>
-              </a:spcAft>
-              <a:defRPr sz="2200">
-                <a:solidFill>
-                  <a:srgbClr val="F3F0E8"/>
-                </a:solidFill>
-                <a:latin typeface="Manrope"/>
-              </a:defRPr>
-            </a:pPr>
-            <a:r>
-              <a:t>После практики: контроль 10 минут, 78–88. До сдачи ключ закрыт.</a:t>
-            </a:r>
-          </a:p>
-          <a:p>
-            <a:pPr>
-              <a:spcAft>
-                <a:spcPts val="300"/>
-              </a:spcAft>
-              <a:defRPr sz="2200">
-                <a:solidFill>
-                  <a:srgbClr val="F3F0E8"/>
-                </a:solidFill>
-                <a:latin typeface="Manrope"/>
-              </a:defRPr>
-            </a:pPr>
-            <a:r>
-              <a:t>После урока: G4–G8 + один A/B/C — 50 минут, исправления 25 минут, повторение 15 минут.</a:t>
-            </a:r>
-          </a:p>
-        </p:txBody>
-      </p:sp>
-      <p:sp>
-        <p:nvSpPr>
-          <p:cNvPr id="4" name="TextBox 3"/>
-          <p:cNvSpPr txBox="1"/>
-          <p:nvPr/>
-        </p:nvSpPr>
-        <p:spPr>
-          <a:xfrm>
-            <a:off x="731520" y="6400800"/>
-            <a:ext cx="10789920" cy="274320"/>
-          </a:xfrm>
-          <a:prstGeom prst="rect">
-            <a:avLst/>
-          </a:prstGeom>
-          <a:noFill/>
-        </p:spPr>
-        <p:txBody>
-          <a:bodyPr wrap="none">
-            <a:spAutoFit/>
-          </a:bodyPr>
-          <a:lstStyle/>
-          <a:p>
-            <a:pPr>
-              <a:defRPr sz="1200">
-                <a:solidFill>
-                  <a:srgbClr val="F3F0E8"/>
-                </a:solidFill>
-                <a:latin typeface="Manrope"/>
-              </a:defRPr>
-            </a:pPr>
-            <a:r>
-              <a:t>Черновик для проверки преподавателем • 16</a:t>
-            </a:r>
-          </a:p>
-        </p:txBody>
-      </p:sp>
+      </p:pic>
     </p:spTree>
   </p:cSld>
   <p:clrMapOvr>
@@ -6956,17 +6378,9 @@
 </p:sld>
 </file>
 
-<file path=ppt/slides/slide2.xml><?xml version="1.0" encoding="utf-8"?>
+<file path=ppt/slides/slide17.xml><?xml version="1.0" encoding="utf-8"?>
 <p:sld xmlns:a="http://schemas.openxmlformats.org/drawingml/2006/main" xmlns:p="http://schemas.openxmlformats.org/presentationml/2006/main" xmlns:r="http://schemas.openxmlformats.org/officeDocument/2006/relationships">
   <p:cSld>
-    <p:bg>
-      <p:bgPr>
-        <a:solidFill>
-          <a:srgbClr val="151515"/>
-        </a:solidFill>
-        <a:effectLst/>
-      </p:bgPr>
-    </p:bg>
     <p:spTree>
       <p:nvGrpSpPr>
         <p:cNvPr id="1" name=""/>
@@ -6974,213 +6388,30 @@
         <p:nvPr/>
       </p:nvGrpSpPr>
       <p:grpSpPr/>
-      <p:sp>
-        <p:nvSpPr>
-          <p:cNvPr id="2" name="TextBox 1"/>
-          <p:cNvSpPr txBox="1"/>
+      <p:pic>
+        <p:nvPicPr>
+          <p:cNvPr id="2" name="Picture 1" descr="s17.png"/>
+          <p:cNvPicPr>
+            <a:picLocks noChangeAspect="1"/>
+          </p:cNvPicPr>
           <p:nvPr/>
-        </p:nvSpPr>
+        </p:nvPicPr>
+        <p:blipFill>
+          <a:blip r:embed="rId2"/>
+          <a:stretch>
+            <a:fillRect/>
+          </a:stretch>
+        </p:blipFill>
         <p:spPr>
           <a:xfrm>
-            <a:off x="640080" y="365760"/>
-            <a:ext cx="10972800" cy="822960"/>
+            <a:off x="0" y="0"/>
+            <a:ext cx="12191695" cy="6858000"/>
           </a:xfrm>
           <a:prstGeom prst="rect">
             <a:avLst/>
           </a:prstGeom>
-          <a:noFill/>
         </p:spPr>
-        <p:txBody>
-          <a:bodyPr wrap="none">
-            <a:spAutoFit/>
-          </a:bodyPr>
-          <a:lstStyle/>
-          <a:p>
-            <a:pPr>
-              <a:defRPr sz="2439" b="1">
-                <a:solidFill>
-                  <a:srgbClr val="F13A43"/>
-                </a:solidFill>
-                <a:latin typeface="Unbounded"/>
-              </a:defRPr>
-            </a:pPr>
-            <a:r>
-              <a:t>Слайд 2. Валентности даны: найти индексы</a:t>
-            </a:r>
-          </a:p>
-        </p:txBody>
-      </p:sp>
-      <p:sp>
-        <p:nvSpPr>
-          <p:cNvPr id="3" name="TextBox 2"/>
-          <p:cNvSpPr txBox="1"/>
-          <p:nvPr/>
-        </p:nvSpPr>
-        <p:spPr>
-          <a:xfrm>
-            <a:off x="731520" y="1417320"/>
-            <a:ext cx="10789920" cy="4709160"/>
-          </a:xfrm>
-          <a:prstGeom prst="rect">
-            <a:avLst/>
-          </a:prstGeom>
-          <a:noFill/>
-        </p:spPr>
-        <p:txBody>
-          <a:bodyPr wrap="square">
-            <a:spAutoFit/>
-          </a:bodyPr>
-          <a:lstStyle/>
-          <a:p>
-            <a:pPr>
-              <a:spcAft>
-                <a:spcPts val="300"/>
-              </a:spcAft>
-              <a:defRPr sz="2200">
-                <a:solidFill>
-                  <a:srgbClr val="F3F0E8"/>
-                </a:solidFill>
-                <a:latin typeface="Manrope"/>
-              </a:defRPr>
-            </a:pPr>
-            <a:r>
-              <a:t>Бинарное соединение содержит два элемента. В наших простых формулах число атомов × заданная валентность должно совпасть для обоих элементов.</a:t>
-            </a:r>
-          </a:p>
-          <a:p>
-            <a:pPr>
-              <a:spcAft>
-                <a:spcPts val="300"/>
-              </a:spcAft>
-              <a:defRPr sz="2200">
-                <a:solidFill>
-                  <a:srgbClr val="F3F0E8"/>
-                </a:solidFill>
-                <a:latin typeface="Manrope"/>
-              </a:defRPr>
-            </a:pPr>
-            <a:r>
-              <a:t>1. Запиши символы в заданном порядке.</a:t>
-            </a:r>
-          </a:p>
-          <a:p>
-            <a:pPr>
-              <a:spcAft>
-                <a:spcPts val="300"/>
-              </a:spcAft>
-              <a:defRPr sz="2200">
-                <a:solidFill>
-                  <a:srgbClr val="F3F0E8"/>
-                </a:solidFill>
-                <a:latin typeface="Manrope"/>
-              </a:defRPr>
-            </a:pPr>
-            <a:r>
-              <a:t>2. Найди НОК двух валентностей.</a:t>
-            </a:r>
-          </a:p>
-          <a:p>
-            <a:pPr>
-              <a:spcAft>
-                <a:spcPts val="300"/>
-              </a:spcAft>
-              <a:defRPr sz="2200">
-                <a:solidFill>
-                  <a:srgbClr val="F3F0E8"/>
-                </a:solidFill>
-                <a:latin typeface="Manrope"/>
-              </a:defRPr>
-            </a:pPr>
-            <a:r>
-              <a:t>3. Раздели НОК на каждую валентность — получишь индексы.</a:t>
-            </a:r>
-          </a:p>
-          <a:p>
-            <a:pPr>
-              <a:spcAft>
-                <a:spcPts val="300"/>
-              </a:spcAft>
-              <a:defRPr sz="2200">
-                <a:solidFill>
-                  <a:srgbClr val="F3F0E8"/>
-                </a:solidFill>
-                <a:latin typeface="Manrope"/>
-              </a:defRPr>
-            </a:pPr>
-            <a:r>
-              <a:t>4. Возьми наименьшие целые индексы; 1 не пиши.</a:t>
-            </a:r>
-          </a:p>
-          <a:p>
-            <a:pPr>
-              <a:spcAft>
-                <a:spcPts val="300"/>
-              </a:spcAft>
-              <a:defRPr sz="2200">
-                <a:solidFill>
-                  <a:srgbClr val="F3F0E8"/>
-                </a:solidFill>
-                <a:latin typeface="Manrope"/>
-              </a:defRPr>
-            </a:pPr>
-            <a:r>
-              <a:t>5. Проверь равенство произведений.</a:t>
-            </a:r>
-          </a:p>
-          <a:p>
-            <a:pPr>
-              <a:spcAft>
-                <a:spcPts val="300"/>
-              </a:spcAft>
-              <a:defRPr sz="2200">
-                <a:solidFill>
-                  <a:srgbClr val="F3F0E8"/>
-                </a:solidFill>
-                <a:latin typeface="Manrope"/>
-              </a:defRPr>
-            </a:pPr>
-            <a:r>
-              <a:t>Число II в условии — валентность, а не индекс в формуле.</a:t>
-            </a:r>
-          </a:p>
-        </p:txBody>
-      </p:sp>
-      <p:sp>
-        <p:nvSpPr>
-          <p:cNvPr id="4" name="TextBox 3"/>
-          <p:cNvSpPr txBox="1"/>
-          <p:nvPr/>
-        </p:nvSpPr>
-        <p:spPr>
-          <a:xfrm>
-            <a:off x="731520" y="6400800"/>
-            <a:ext cx="10789920" cy="274320"/>
-          </a:xfrm>
-          <a:prstGeom prst="rect">
-            <a:avLst/>
-          </a:prstGeom>
-          <a:noFill/>
-        </p:spPr>
-        <p:txBody>
-          <a:bodyPr wrap="none">
-            <a:spAutoFit/>
-          </a:bodyPr>
-          <a:lstStyle/>
-          <a:p>
-            <a:pPr>
-              <a:defRPr sz="1200">
-                <a:solidFill>
-                  <a:srgbClr val="F3F0E8"/>
-                </a:solidFill>
-                <a:latin typeface="Manrope"/>
-              </a:defRPr>
-            </a:pPr>
-            <a:r>
-              <a:t>Черновик для проверки преподавателем • 2</a:t>
-            </a:r>
-          </a:p>
-        </p:txBody>
-      </p:sp>
+      </p:pic>
     </p:spTree>
   </p:cSld>
   <p:clrMapOvr>
@@ -7189,17 +6420,9 @@
 </p:sld>
 </file>
 
-<file path=ppt/slides/slide3.xml><?xml version="1.0" encoding="utf-8"?>
+<file path=ppt/slides/slide18.xml><?xml version="1.0" encoding="utf-8"?>
 <p:sld xmlns:a="http://schemas.openxmlformats.org/drawingml/2006/main" xmlns:p="http://schemas.openxmlformats.org/presentationml/2006/main" xmlns:r="http://schemas.openxmlformats.org/officeDocument/2006/relationships">
   <p:cSld>
-    <p:bg>
-      <p:bgPr>
-        <a:solidFill>
-          <a:srgbClr val="151515"/>
-        </a:solidFill>
-        <a:effectLst/>
-      </p:bgPr>
-    </p:bg>
     <p:spTree>
       <p:nvGrpSpPr>
         <p:cNvPr id="1" name=""/>
@@ -7207,149 +6430,30 @@
         <p:nvPr/>
       </p:nvGrpSpPr>
       <p:grpSpPr/>
-      <p:sp>
-        <p:nvSpPr>
-          <p:cNvPr id="2" name="TextBox 1"/>
-          <p:cNvSpPr txBox="1"/>
+      <p:pic>
+        <p:nvPicPr>
+          <p:cNvPr id="2" name="Picture 1" descr="s18.png"/>
+          <p:cNvPicPr>
+            <a:picLocks noChangeAspect="1"/>
+          </p:cNvPicPr>
           <p:nvPr/>
-        </p:nvSpPr>
+        </p:nvPicPr>
+        <p:blipFill>
+          <a:blip r:embed="rId2"/>
+          <a:stretch>
+            <a:fillRect/>
+          </a:stretch>
+        </p:blipFill>
         <p:spPr>
           <a:xfrm>
-            <a:off x="640080" y="365760"/>
-            <a:ext cx="10972800" cy="822960"/>
+            <a:off x="0" y="0"/>
+            <a:ext cx="12191695" cy="6858000"/>
           </a:xfrm>
           <a:prstGeom prst="rect">
             <a:avLst/>
           </a:prstGeom>
-          <a:noFill/>
         </p:spPr>
-        <p:txBody>
-          <a:bodyPr wrap="none">
-            <a:spAutoFit/>
-          </a:bodyPr>
-          <a:lstStyle/>
-          <a:p>
-            <a:pPr>
-              <a:defRPr sz="2800" b="1">
-                <a:solidFill>
-                  <a:srgbClr val="F13A43"/>
-                </a:solidFill>
-                <a:latin typeface="Unbounded"/>
-              </a:defRPr>
-            </a:pPr>
-            <a:r>
-              <a:t>Слайд 3. Два разобранных примера</a:t>
-            </a:r>
-          </a:p>
-        </p:txBody>
-      </p:sp>
-      <p:sp>
-        <p:nvSpPr>
-          <p:cNvPr id="3" name="TextBox 2"/>
-          <p:cNvSpPr txBox="1"/>
-          <p:nvPr/>
-        </p:nvSpPr>
-        <p:spPr>
-          <a:xfrm>
-            <a:off x="731520" y="1417320"/>
-            <a:ext cx="10789920" cy="4709160"/>
-          </a:xfrm>
-          <a:prstGeom prst="rect">
-            <a:avLst/>
-          </a:prstGeom>
-          <a:noFill/>
-        </p:spPr>
-        <p:txBody>
-          <a:bodyPr wrap="square">
-            <a:spAutoFit/>
-          </a:bodyPr>
-          <a:lstStyle/>
-          <a:p>
-            <a:pPr>
-              <a:spcAft>
-                <a:spcPts val="300"/>
-              </a:spcAft>
-              <a:defRPr sz="2200">
-                <a:solidFill>
-                  <a:srgbClr val="F3F0E8"/>
-                </a:solidFill>
-                <a:latin typeface="Manrope"/>
-              </a:defRPr>
-            </a:pPr>
-            <a:r>
-              <a:t>Mg(II) и Cl(I): НОК(2, 1) = 2. Индексы Mg: 2/2 = 1; Cl: 2/1 = 2. MgCl₂.</a:t>
-            </a:r>
-          </a:p>
-          <a:p>
-            <a:pPr>
-              <a:spcAft>
-                <a:spcPts val="300"/>
-              </a:spcAft>
-              <a:defRPr sz="2200">
-                <a:solidFill>
-                  <a:srgbClr val="F3F0E8"/>
-                </a:solidFill>
-                <a:latin typeface="Manrope"/>
-              </a:defRPr>
-            </a:pPr>
-            <a:r>
-              <a:t>Al(III) и O(II): НОК(3, 2) = 6. Индексы Al: 6/3 = 2; O: 6/2 = 3. Al₂O₃.</a:t>
-            </a:r>
-          </a:p>
-          <a:p>
-            <a:pPr>
-              <a:spcAft>
-                <a:spcPts val="300"/>
-              </a:spcAft>
-              <a:defRPr sz="2200">
-                <a:solidFill>
-                  <a:srgbClr val="F3F0E8"/>
-                </a:solidFill>
-                <a:latin typeface="Manrope"/>
-              </a:defRPr>
-            </a:pPr>
-            <a:r>
-              <a:t>Задание после объяснения: для каждой формулы проверь произведение индекса на валентность.</a:t>
-            </a:r>
-          </a:p>
-        </p:txBody>
-      </p:sp>
-      <p:sp>
-        <p:nvSpPr>
-          <p:cNvPr id="4" name="TextBox 3"/>
-          <p:cNvSpPr txBox="1"/>
-          <p:nvPr/>
-        </p:nvSpPr>
-        <p:spPr>
-          <a:xfrm>
-            <a:off x="731520" y="6400800"/>
-            <a:ext cx="10789920" cy="274320"/>
-          </a:xfrm>
-          <a:prstGeom prst="rect">
-            <a:avLst/>
-          </a:prstGeom>
-          <a:noFill/>
-        </p:spPr>
-        <p:txBody>
-          <a:bodyPr wrap="none">
-            <a:spAutoFit/>
-          </a:bodyPr>
-          <a:lstStyle/>
-          <a:p>
-            <a:pPr>
-              <a:defRPr sz="1200">
-                <a:solidFill>
-                  <a:srgbClr val="F3F0E8"/>
-                </a:solidFill>
-                <a:latin typeface="Manrope"/>
-              </a:defRPr>
-            </a:pPr>
-            <a:r>
-              <a:t>Черновик для проверки преподавателем • 3</a:t>
-            </a:r>
-          </a:p>
-        </p:txBody>
-      </p:sp>
+      </p:pic>
     </p:spTree>
   </p:cSld>
   <p:clrMapOvr>
@@ -7358,17 +6462,9 @@
 </p:sld>
 </file>
 
-<file path=ppt/slides/slide4.xml><?xml version="1.0" encoding="utf-8"?>
+<file path=ppt/slides/slide19.xml><?xml version="1.0" encoding="utf-8"?>
 <p:sld xmlns:a="http://schemas.openxmlformats.org/drawingml/2006/main" xmlns:p="http://schemas.openxmlformats.org/presentationml/2006/main" xmlns:r="http://schemas.openxmlformats.org/officeDocument/2006/relationships">
   <p:cSld>
-    <p:bg>
-      <p:bgPr>
-        <a:solidFill>
-          <a:srgbClr val="151515"/>
-        </a:solidFill>
-        <a:effectLst/>
-      </p:bgPr>
-    </p:bg>
     <p:spTree>
       <p:nvGrpSpPr>
         <p:cNvPr id="1" name=""/>
@@ -7376,149 +6472,30 @@
         <p:nvPr/>
       </p:nvGrpSpPr>
       <p:grpSpPr/>
-      <p:sp>
-        <p:nvSpPr>
-          <p:cNvPr id="2" name="TextBox 1"/>
-          <p:cNvSpPr txBox="1"/>
+      <p:pic>
+        <p:nvPicPr>
+          <p:cNvPr id="2" name="Picture 1" descr="s19.png"/>
+          <p:cNvPicPr>
+            <a:picLocks noChangeAspect="1"/>
+          </p:cNvPicPr>
           <p:nvPr/>
-        </p:nvSpPr>
+        </p:nvPicPr>
+        <p:blipFill>
+          <a:blip r:embed="rId2"/>
+          <a:stretch>
+            <a:fillRect/>
+          </a:stretch>
+        </p:blipFill>
         <p:spPr>
           <a:xfrm>
-            <a:off x="640080" y="365760"/>
-            <a:ext cx="10972800" cy="822960"/>
+            <a:off x="0" y="0"/>
+            <a:ext cx="12191695" cy="6858000"/>
           </a:xfrm>
           <a:prstGeom prst="rect">
             <a:avLst/>
           </a:prstGeom>
-          <a:noFill/>
         </p:spPr>
-        <p:txBody>
-          <a:bodyPr wrap="none">
-            <a:spAutoFit/>
-          </a:bodyPr>
-          <a:lstStyle/>
-          <a:p>
-            <a:pPr>
-              <a:defRPr sz="2800" b="1">
-                <a:solidFill>
-                  <a:srgbClr val="F13A43"/>
-                </a:solidFill>
-                <a:latin typeface="Unbounded"/>
-              </a:defRPr>
-            </a:pPr>
-            <a:r>
-              <a:t>Слайд 4. Наименьшие индексы</a:t>
-            </a:r>
-          </a:p>
-        </p:txBody>
-      </p:sp>
-      <p:sp>
-        <p:nvSpPr>
-          <p:cNvPr id="3" name="TextBox 2"/>
-          <p:cNvSpPr txBox="1"/>
-          <p:nvPr/>
-        </p:nvSpPr>
-        <p:spPr>
-          <a:xfrm>
-            <a:off x="731520" y="1417320"/>
-            <a:ext cx="10789920" cy="4709160"/>
-          </a:xfrm>
-          <a:prstGeom prst="rect">
-            <a:avLst/>
-          </a:prstGeom>
-          <a:noFill/>
-        </p:spPr>
-        <p:txBody>
-          <a:bodyPr wrap="square">
-            <a:spAutoFit/>
-          </a:bodyPr>
-          <a:lstStyle/>
-          <a:p>
-            <a:pPr>
-              <a:spcAft>
-                <a:spcPts val="300"/>
-              </a:spcAft>
-              <a:defRPr sz="2200">
-                <a:solidFill>
-                  <a:srgbClr val="F3F0E8"/>
-                </a:solidFill>
-                <a:latin typeface="Manrope"/>
-              </a:defRPr>
-            </a:pPr>
-            <a:r>
-              <a:t>Даны Ca(II) и O(II). НОК(2, 2) = 2. Индексы 1 : 1, формула CaO.</a:t>
-            </a:r>
-          </a:p>
-          <a:p>
-            <a:pPr>
-              <a:spcAft>
-                <a:spcPts val="300"/>
-              </a:spcAft>
-              <a:defRPr sz="2200">
-                <a:solidFill>
-                  <a:srgbClr val="F3F0E8"/>
-                </a:solidFill>
-                <a:latin typeface="Manrope"/>
-              </a:defRPr>
-            </a:pPr>
-            <a:r>
-              <a:t>Запись Ca₂O₂ содержит излишний общий множитель: простое соотношение 2 : 2 сокращаем до 1 : 1.</a:t>
-            </a:r>
-          </a:p>
-          <a:p>
-            <a:pPr>
-              <a:spcAft>
-                <a:spcPts val="300"/>
-              </a:spcAft>
-              <a:defRPr sz="2200">
-                <a:solidFill>
-                  <a:srgbClr val="F3F0E8"/>
-                </a:solidFill>
-                <a:latin typeface="Manrope"/>
-              </a:defRPr>
-            </a:pPr>
-            <a:r>
-              <a:t>Короткий вопрос: какие индексы нужны для Mg(II) и O(II)?</a:t>
-            </a:r>
-          </a:p>
-        </p:txBody>
-      </p:sp>
-      <p:sp>
-        <p:nvSpPr>
-          <p:cNvPr id="4" name="TextBox 3"/>
-          <p:cNvSpPr txBox="1"/>
-          <p:nvPr/>
-        </p:nvSpPr>
-        <p:spPr>
-          <a:xfrm>
-            <a:off x="731520" y="6400800"/>
-            <a:ext cx="10789920" cy="274320"/>
-          </a:xfrm>
-          <a:prstGeom prst="rect">
-            <a:avLst/>
-          </a:prstGeom>
-          <a:noFill/>
-        </p:spPr>
-        <p:txBody>
-          <a:bodyPr wrap="none">
-            <a:spAutoFit/>
-          </a:bodyPr>
-          <a:lstStyle/>
-          <a:p>
-            <a:pPr>
-              <a:defRPr sz="1200">
-                <a:solidFill>
-                  <a:srgbClr val="F3F0E8"/>
-                </a:solidFill>
-                <a:latin typeface="Manrope"/>
-              </a:defRPr>
-            </a:pPr>
-            <a:r>
-              <a:t>Черновик для проверки преподавателем • 4</a:t>
-            </a:r>
-          </a:p>
-        </p:txBody>
-      </p:sp>
+      </p:pic>
     </p:spTree>
   </p:cSld>
   <p:clrMapOvr>
@@ -7527,17 +6504,9 @@
 </p:sld>
 </file>
 
-<file path=ppt/slides/slide5.xml><?xml version="1.0" encoding="utf-8"?>
+<file path=ppt/slides/slide2.xml><?xml version="1.0" encoding="utf-8"?>
 <p:sld xmlns:a="http://schemas.openxmlformats.org/drawingml/2006/main" xmlns:p="http://schemas.openxmlformats.org/presentationml/2006/main" xmlns:r="http://schemas.openxmlformats.org/officeDocument/2006/relationships">
   <p:cSld>
-    <p:bg>
-      <p:bgPr>
-        <a:solidFill>
-          <a:srgbClr val="151515"/>
-        </a:solidFill>
-        <a:effectLst/>
-      </p:bgPr>
-    </p:bg>
     <p:spTree>
       <p:nvGrpSpPr>
         <p:cNvPr id="1" name=""/>
@@ -7545,165 +6514,30 @@
         <p:nvPr/>
       </p:nvGrpSpPr>
       <p:grpSpPr/>
-      <p:sp>
-        <p:nvSpPr>
-          <p:cNvPr id="2" name="TextBox 1"/>
-          <p:cNvSpPr txBox="1"/>
+      <p:pic>
+        <p:nvPicPr>
+          <p:cNvPr id="2" name="Picture 1" descr="s02.png"/>
+          <p:cNvPicPr>
+            <a:picLocks noChangeAspect="1"/>
+          </p:cNvPicPr>
           <p:nvPr/>
-        </p:nvSpPr>
+        </p:nvPicPr>
+        <p:blipFill>
+          <a:blip r:embed="rId2"/>
+          <a:stretch>
+            <a:fillRect/>
+          </a:stretch>
+        </p:blipFill>
         <p:spPr>
           <a:xfrm>
-            <a:off x="640080" y="365760"/>
-            <a:ext cx="10972800" cy="822960"/>
+            <a:off x="0" y="0"/>
+            <a:ext cx="12191695" cy="6858000"/>
           </a:xfrm>
           <a:prstGeom prst="rect">
             <a:avLst/>
           </a:prstGeom>
-          <a:noFill/>
         </p:spPr>
-        <p:txBody>
-          <a:bodyPr wrap="none">
-            <a:spAutoFit/>
-          </a:bodyPr>
-          <a:lstStyle/>
-          <a:p>
-            <a:pPr>
-              <a:defRPr sz="2501" b="1">
-                <a:solidFill>
-                  <a:srgbClr val="F13A43"/>
-                </a:solidFill>
-                <a:latin typeface="Unbounded"/>
-              </a:defRPr>
-            </a:pPr>
-            <a:r>
-              <a:t>Слайд 5. Относительная атомная масса Aᵣ</a:t>
-            </a:r>
-          </a:p>
-        </p:txBody>
-      </p:sp>
-      <p:sp>
-        <p:nvSpPr>
-          <p:cNvPr id="3" name="TextBox 2"/>
-          <p:cNvSpPr txBox="1"/>
-          <p:nvPr/>
-        </p:nvSpPr>
-        <p:spPr>
-          <a:xfrm>
-            <a:off x="731520" y="1417320"/>
-            <a:ext cx="10789920" cy="4709160"/>
-          </a:xfrm>
-          <a:prstGeom prst="rect">
-            <a:avLst/>
-          </a:prstGeom>
-          <a:noFill/>
-        </p:spPr>
-        <p:txBody>
-          <a:bodyPr wrap="square">
-            <a:spAutoFit/>
-          </a:bodyPr>
-          <a:lstStyle/>
-          <a:p>
-            <a:pPr>
-              <a:spcAft>
-                <a:spcPts val="300"/>
-              </a:spcAft>
-              <a:defRPr sz="2200">
-                <a:solidFill>
-                  <a:srgbClr val="F3F0E8"/>
-                </a:solidFill>
-                <a:latin typeface="Manrope"/>
-              </a:defRPr>
-            </a:pPr>
-            <a:r>
-              <a:t>Aᵣ — относительная атомная масса: отношение средней массы атомов элемента к единице сравнения — 1/12 массы атома углерода-12. Это число без единиц.</a:t>
-            </a:r>
-          </a:p>
-          <a:p>
-            <a:pPr>
-              <a:spcAft>
-                <a:spcPts val="300"/>
-              </a:spcAft>
-              <a:defRPr sz="2200">
-                <a:solidFill>
-                  <a:srgbClr val="F3F0E8"/>
-                </a:solidFill>
-                <a:latin typeface="Manrope"/>
-              </a:defRPr>
-            </a:pPr>
-            <a:r>
-              <a:t>Элемент  ·  H  ·  O  ·  C  ·  Mg  ·  Al  ·  Ca  ·  Na  ·  Cl</a:t>
-            </a:r>
-          </a:p>
-          <a:p>
-            <a:pPr>
-              <a:spcAft>
-                <a:spcPts val="300"/>
-              </a:spcAft>
-              <a:defRPr sz="2200">
-                <a:solidFill>
-                  <a:srgbClr val="F3F0E8"/>
-                </a:solidFill>
-                <a:latin typeface="Manrope"/>
-              </a:defRPr>
-            </a:pPr>
-            <a:r>
-              <a:t>Данное Aᵣ  ·  1  ·  16  ·  12  ·  24  ·  27  ·  40  ·  23  ·  35,5</a:t>
-            </a:r>
-          </a:p>
-          <a:p>
-            <a:pPr>
-              <a:spcAft>
-                <a:spcPts val="300"/>
-              </a:spcAft>
-              <a:defRPr sz="2200">
-                <a:solidFill>
-                  <a:srgbClr val="F3F0E8"/>
-                </a:solidFill>
-                <a:latin typeface="Manrope"/>
-              </a:defRPr>
-            </a:pPr>
-            <a:r>
-              <a:t>Справку используем, не заучиваем. В H₂O число 2 — индекс; Aᵣ(H) = 1 — отдельное данное.</a:t>
-            </a:r>
-          </a:p>
-        </p:txBody>
-      </p:sp>
-      <p:sp>
-        <p:nvSpPr>
-          <p:cNvPr id="4" name="TextBox 3"/>
-          <p:cNvSpPr txBox="1"/>
-          <p:nvPr/>
-        </p:nvSpPr>
-        <p:spPr>
-          <a:xfrm>
-            <a:off x="731520" y="6400800"/>
-            <a:ext cx="10789920" cy="274320"/>
-          </a:xfrm>
-          <a:prstGeom prst="rect">
-            <a:avLst/>
-          </a:prstGeom>
-          <a:noFill/>
-        </p:spPr>
-        <p:txBody>
-          <a:bodyPr wrap="none">
-            <a:spAutoFit/>
-          </a:bodyPr>
-          <a:lstStyle/>
-          <a:p>
-            <a:pPr>
-              <a:defRPr sz="1200">
-                <a:solidFill>
-                  <a:srgbClr val="F3F0E8"/>
-                </a:solidFill>
-                <a:latin typeface="Manrope"/>
-              </a:defRPr>
-            </a:pPr>
-            <a:r>
-              <a:t>Черновик для проверки преподавателем • 5</a:t>
-            </a:r>
-          </a:p>
-        </p:txBody>
-      </p:sp>
+      </p:pic>
     </p:spTree>
   </p:cSld>
   <p:clrMapOvr>
@@ -7712,17 +6546,9 @@
 </p:sld>
 </file>
 
-<file path=ppt/slides/slide6.xml><?xml version="1.0" encoding="utf-8"?>
+<file path=ppt/slides/slide20.xml><?xml version="1.0" encoding="utf-8"?>
 <p:sld xmlns:a="http://schemas.openxmlformats.org/drawingml/2006/main" xmlns:p="http://schemas.openxmlformats.org/presentationml/2006/main" xmlns:r="http://schemas.openxmlformats.org/officeDocument/2006/relationships">
   <p:cSld>
-    <p:bg>
-      <p:bgPr>
-        <a:solidFill>
-          <a:srgbClr val="151515"/>
-        </a:solidFill>
-        <a:effectLst/>
-      </p:bgPr>
-    </p:bg>
     <p:spTree>
       <p:nvGrpSpPr>
         <p:cNvPr id="1" name=""/>
@@ -7730,181 +6556,30 @@
         <p:nvPr/>
       </p:nvGrpSpPr>
       <p:grpSpPr/>
-      <p:sp>
-        <p:nvSpPr>
-          <p:cNvPr id="2" name="TextBox 1"/>
-          <p:cNvSpPr txBox="1"/>
+      <p:pic>
+        <p:nvPicPr>
+          <p:cNvPr id="2" name="Picture 1" descr="s20.png"/>
+          <p:cNvPicPr>
+            <a:picLocks noChangeAspect="1"/>
+          </p:cNvPicPr>
           <p:nvPr/>
-        </p:nvSpPr>
+        </p:nvPicPr>
+        <p:blipFill>
+          <a:blip r:embed="rId2"/>
+          <a:stretch>
+            <a:fillRect/>
+          </a:stretch>
+        </p:blipFill>
         <p:spPr>
           <a:xfrm>
-            <a:off x="640080" y="365760"/>
-            <a:ext cx="10972800" cy="822960"/>
+            <a:off x="0" y="0"/>
+            <a:ext cx="12191695" cy="6858000"/>
           </a:xfrm>
           <a:prstGeom prst="rect">
             <a:avLst/>
           </a:prstGeom>
-          <a:noFill/>
         </p:spPr>
-        <p:txBody>
-          <a:bodyPr wrap="none">
-            <a:spAutoFit/>
-          </a:bodyPr>
-          <a:lstStyle/>
-          <a:p>
-            <a:pPr>
-              <a:defRPr sz="2379" b="1">
-                <a:solidFill>
-                  <a:srgbClr val="F13A43"/>
-                </a:solidFill>
-                <a:latin typeface="Unbounded"/>
-              </a:defRPr>
-            </a:pPr>
-            <a:r>
-              <a:t>Слайд 6. Относительная масса всей формулы</a:t>
-            </a:r>
-          </a:p>
-        </p:txBody>
-      </p:sp>
-      <p:sp>
-        <p:nvSpPr>
-          <p:cNvPr id="3" name="TextBox 2"/>
-          <p:cNvSpPr txBox="1"/>
-          <p:nvPr/>
-        </p:nvSpPr>
-        <p:spPr>
-          <a:xfrm>
-            <a:off x="731520" y="1417320"/>
-            <a:ext cx="10789920" cy="4709160"/>
-          </a:xfrm>
-          <a:prstGeom prst="rect">
-            <a:avLst/>
-          </a:prstGeom>
-          <a:noFill/>
-        </p:spPr>
-        <p:txBody>
-          <a:bodyPr wrap="square">
-            <a:spAutoFit/>
-          </a:bodyPr>
-          <a:lstStyle/>
-          <a:p>
-            <a:pPr>
-              <a:spcAft>
-                <a:spcPts val="300"/>
-              </a:spcAft>
-              <a:defRPr sz="2200">
-                <a:solidFill>
-                  <a:srgbClr val="F3F0E8"/>
-                </a:solidFill>
-                <a:latin typeface="Manrope"/>
-              </a:defRPr>
-            </a:pPr>
-            <a:r>
-              <a:t>Прочитай индексы → умножь на Aᵣ → сложи.</a:t>
-            </a:r>
-          </a:p>
-          <a:p>
-            <a:pPr>
-              <a:spcAft>
-                <a:spcPts val="300"/>
-              </a:spcAft>
-              <a:defRPr sz="2200">
-                <a:solidFill>
-                  <a:srgbClr val="F3F0E8"/>
-                </a:solidFill>
-                <a:latin typeface="Manrope"/>
-              </a:defRPr>
-            </a:pPr>
-            <a:r>
-              <a:t>H₂O: Mᵣ = 2·1 + 16 = 18, относительная молекулярная масса.</a:t>
-            </a:r>
-          </a:p>
-          <a:p>
-            <a:pPr>
-              <a:spcAft>
-                <a:spcPts val="300"/>
-              </a:spcAft>
-              <a:defRPr sz="2200">
-                <a:solidFill>
-                  <a:srgbClr val="F3F0E8"/>
-                </a:solidFill>
-                <a:latin typeface="Manrope"/>
-              </a:defRPr>
-            </a:pPr>
-            <a:r>
-              <a:t>MgO: Mᵣ = 24 + 16 = 40, относительная формульная масса.</a:t>
-            </a:r>
-          </a:p>
-          <a:p>
-            <a:pPr>
-              <a:spcAft>
-                <a:spcPts val="300"/>
-              </a:spcAft>
-              <a:defRPr sz="2200">
-                <a:solidFill>
-                  <a:srgbClr val="F3F0E8"/>
-                </a:solidFill>
-                <a:latin typeface="Manrope"/>
-              </a:defRPr>
-            </a:pPr>
-            <a:r>
-              <a:t>Оба ответа без единиц. MgO — формульная единица, не отдельная молекула.</a:t>
-            </a:r>
-          </a:p>
-          <a:p>
-            <a:pPr>
-              <a:spcAft>
-                <a:spcPts val="300"/>
-              </a:spcAft>
-              <a:defRPr sz="2200">
-                <a:solidFill>
-                  <a:srgbClr val="F3F0E8"/>
-                </a:solidFill>
-                <a:latin typeface="Manrope"/>
-              </a:defRPr>
-            </a:pPr>
-            <a:r>
-              <a:t>Вопрос: чему равна Mᵣ одной молекулы H₂O в записи 3H₂O?</a:t>
-            </a:r>
-          </a:p>
-        </p:txBody>
-      </p:sp>
-      <p:sp>
-        <p:nvSpPr>
-          <p:cNvPr id="4" name="TextBox 3"/>
-          <p:cNvSpPr txBox="1"/>
-          <p:nvPr/>
-        </p:nvSpPr>
-        <p:spPr>
-          <a:xfrm>
-            <a:off x="731520" y="6400800"/>
-            <a:ext cx="10789920" cy="274320"/>
-          </a:xfrm>
-          <a:prstGeom prst="rect">
-            <a:avLst/>
-          </a:prstGeom>
-          <a:noFill/>
-        </p:spPr>
-        <p:txBody>
-          <a:bodyPr wrap="none">
-            <a:spAutoFit/>
-          </a:bodyPr>
-          <a:lstStyle/>
-          <a:p>
-            <a:pPr>
-              <a:defRPr sz="1200">
-                <a:solidFill>
-                  <a:srgbClr val="F3F0E8"/>
-                </a:solidFill>
-                <a:latin typeface="Manrope"/>
-              </a:defRPr>
-            </a:pPr>
-            <a:r>
-              <a:t>Черновик для проверки преподавателем • 6</a:t>
-            </a:r>
-          </a:p>
-        </p:txBody>
-      </p:sp>
+      </p:pic>
     </p:spTree>
   </p:cSld>
   <p:clrMapOvr>
@@ -7913,17 +6588,9 @@
 </p:sld>
 </file>
 
-<file path=ppt/slides/slide7.xml><?xml version="1.0" encoding="utf-8"?>
+<file path=ppt/slides/slide21.xml><?xml version="1.0" encoding="utf-8"?>
 <p:sld xmlns:a="http://schemas.openxmlformats.org/drawingml/2006/main" xmlns:p="http://schemas.openxmlformats.org/presentationml/2006/main" xmlns:r="http://schemas.openxmlformats.org/officeDocument/2006/relationships">
   <p:cSld>
-    <p:bg>
-      <p:bgPr>
-        <a:solidFill>
-          <a:srgbClr val="151515"/>
-        </a:solidFill>
-        <a:effectLst/>
-      </p:bgPr>
-    </p:bg>
     <p:spTree>
       <p:nvGrpSpPr>
         <p:cNvPr id="1" name=""/>
@@ -7931,197 +6598,30 @@
         <p:nvPr/>
       </p:nvGrpSpPr>
       <p:grpSpPr/>
-      <p:sp>
-        <p:nvSpPr>
-          <p:cNvPr id="2" name="TextBox 1"/>
-          <p:cNvSpPr txBox="1"/>
+      <p:pic>
+        <p:nvPicPr>
+          <p:cNvPr id="2" name="Picture 1" descr="s21.png"/>
+          <p:cNvPicPr>
+            <a:picLocks noChangeAspect="1"/>
+          </p:cNvPicPr>
           <p:nvPr/>
-        </p:nvSpPr>
+        </p:nvPicPr>
+        <p:blipFill>
+          <a:blip r:embed="rId2"/>
+          <a:stretch>
+            <a:fillRect/>
+          </a:stretch>
+        </p:blipFill>
         <p:spPr>
           <a:xfrm>
-            <a:off x="640080" y="365760"/>
-            <a:ext cx="10972800" cy="822960"/>
+            <a:off x="0" y="0"/>
+            <a:ext cx="12191695" cy="6858000"/>
           </a:xfrm>
           <a:prstGeom prst="rect">
             <a:avLst/>
           </a:prstGeom>
-          <a:noFill/>
         </p:spPr>
-        <p:txBody>
-          <a:bodyPr wrap="none">
-            <a:spAutoFit/>
-          </a:bodyPr>
-          <a:lstStyle/>
-          <a:p>
-            <a:pPr>
-              <a:defRPr sz="2636" b="1">
-                <a:solidFill>
-                  <a:srgbClr val="F13A43"/>
-                </a:solidFill>
-                <a:latin typeface="Unbounded"/>
-              </a:defRPr>
-            </a:pPr>
-            <a:r>
-              <a:t>Слайд 7. Массовая доля: часть / целое</a:t>
-            </a:r>
-          </a:p>
-        </p:txBody>
-      </p:sp>
-      <p:sp>
-        <p:nvSpPr>
-          <p:cNvPr id="3" name="TextBox 2"/>
-          <p:cNvSpPr txBox="1"/>
-          <p:nvPr/>
-        </p:nvSpPr>
-        <p:spPr>
-          <a:xfrm>
-            <a:off x="731520" y="1417320"/>
-            <a:ext cx="10789920" cy="4709160"/>
-          </a:xfrm>
-          <a:prstGeom prst="rect">
-            <a:avLst/>
-          </a:prstGeom>
-          <a:noFill/>
-        </p:spPr>
-        <p:txBody>
-          <a:bodyPr wrap="square">
-            <a:spAutoFit/>
-          </a:bodyPr>
-          <a:lstStyle/>
-          <a:p>
-            <a:pPr>
-              <a:spcAft>
-                <a:spcPts val="300"/>
-              </a:spcAft>
-              <a:defRPr sz="2200">
-                <a:solidFill>
-                  <a:srgbClr val="F3F0E8"/>
-                </a:solidFill>
-                <a:latin typeface="Manrope"/>
-              </a:defRPr>
-            </a:pPr>
-            <a:r>
-              <a:t>ω(E) = N·Aᵣ(E)/Mᵣ. Для процента: ω(E) · 100%.</a:t>
-            </a:r>
-          </a:p>
-          <a:p>
-            <a:pPr>
-              <a:spcAft>
-                <a:spcPts val="300"/>
-              </a:spcAft>
-              <a:defRPr sz="2200">
-                <a:solidFill>
-                  <a:srgbClr val="F3F0E8"/>
-                </a:solidFill>
-                <a:latin typeface="Manrope"/>
-              </a:defRPr>
-            </a:pPr>
-            <a:r>
-              <a:t>N — число атомов выбранного элемента в одной формуле.</a:t>
-            </a:r>
-          </a:p>
-          <a:p>
-            <a:pPr>
-              <a:spcAft>
-                <a:spcPts val="300"/>
-              </a:spcAft>
-              <a:defRPr sz="2200">
-                <a:solidFill>
-                  <a:srgbClr val="F3F0E8"/>
-                </a:solidFill>
-                <a:latin typeface="Manrope"/>
-              </a:defRPr>
-            </a:pPr>
-            <a:r>
-              <a:t>N·Aᵣ(E) — вклад выбранного элемента.</a:t>
-            </a:r>
-          </a:p>
-          <a:p>
-            <a:pPr>
-              <a:spcAft>
-                <a:spcPts val="300"/>
-              </a:spcAft>
-              <a:defRPr sz="2200">
-                <a:solidFill>
-                  <a:srgbClr val="F3F0E8"/>
-                </a:solidFill>
-                <a:latin typeface="Manrope"/>
-              </a:defRPr>
-            </a:pPr>
-            <a:r>
-              <a:t>Mᵣ — относительная масса всей формулы.</a:t>
-            </a:r>
-          </a:p>
-          <a:p>
-            <a:pPr>
-              <a:spcAft>
-                <a:spcPts val="300"/>
-              </a:spcAft>
-              <a:defRPr sz="2200">
-                <a:solidFill>
-                  <a:srgbClr val="F3F0E8"/>
-                </a:solidFill>
-                <a:latin typeface="Manrope"/>
-              </a:defRPr>
-            </a:pPr>
-            <a:r>
-              <a:t>0 ≤ ω ≤ 1; процент от 0 до 100%.</a:t>
-            </a:r>
-          </a:p>
-          <a:p>
-            <a:pPr>
-              <a:spcAft>
-                <a:spcPts val="300"/>
-              </a:spcAft>
-              <a:defRPr sz="2200">
-                <a:solidFill>
-                  <a:srgbClr val="F3F0E8"/>
-                </a:solidFill>
-                <a:latin typeface="Manrope"/>
-              </a:defRPr>
-            </a:pPr>
-            <a:r>
-              <a:t>Вопрос: для H в H₂O какое число надо поставить вместо N?</a:t>
-            </a:r>
-          </a:p>
-        </p:txBody>
-      </p:sp>
-      <p:sp>
-        <p:nvSpPr>
-          <p:cNvPr id="4" name="TextBox 3"/>
-          <p:cNvSpPr txBox="1"/>
-          <p:nvPr/>
-        </p:nvSpPr>
-        <p:spPr>
-          <a:xfrm>
-            <a:off x="731520" y="6400800"/>
-            <a:ext cx="10789920" cy="274320"/>
-          </a:xfrm>
-          <a:prstGeom prst="rect">
-            <a:avLst/>
-          </a:prstGeom>
-          <a:noFill/>
-        </p:spPr>
-        <p:txBody>
-          <a:bodyPr wrap="none">
-            <a:spAutoFit/>
-          </a:bodyPr>
-          <a:lstStyle/>
-          <a:p>
-            <a:pPr>
-              <a:defRPr sz="1200">
-                <a:solidFill>
-                  <a:srgbClr val="F3F0E8"/>
-                </a:solidFill>
-                <a:latin typeface="Manrope"/>
-              </a:defRPr>
-            </a:pPr>
-            <a:r>
-              <a:t>Черновик для проверки преподавателем • 7</a:t>
-            </a:r>
-          </a:p>
-        </p:txBody>
-      </p:sp>
+      </p:pic>
     </p:spTree>
   </p:cSld>
   <p:clrMapOvr>
@@ -8130,17 +6630,9 @@
 </p:sld>
 </file>
 
-<file path=ppt/slides/slide8.xml><?xml version="1.0" encoding="utf-8"?>
+<file path=ppt/slides/slide22.xml><?xml version="1.0" encoding="utf-8"?>
 <p:sld xmlns:a="http://schemas.openxmlformats.org/drawingml/2006/main" xmlns:p="http://schemas.openxmlformats.org/presentationml/2006/main" xmlns:r="http://schemas.openxmlformats.org/officeDocument/2006/relationships">
   <p:cSld>
-    <p:bg>
-      <p:bgPr>
-        <a:solidFill>
-          <a:srgbClr val="151515"/>
-        </a:solidFill>
-        <a:effectLst/>
-      </p:bgPr>
-    </p:bg>
     <p:spTree>
       <p:nvGrpSpPr>
         <p:cNvPr id="1" name=""/>
@@ -8148,165 +6640,30 @@
         <p:nvPr/>
       </p:nvGrpSpPr>
       <p:grpSpPr/>
-      <p:sp>
-        <p:nvSpPr>
-          <p:cNvPr id="2" name="TextBox 1"/>
-          <p:cNvSpPr txBox="1"/>
+      <p:pic>
+        <p:nvPicPr>
+          <p:cNvPr id="2" name="Picture 1" descr="s22.png"/>
+          <p:cNvPicPr>
+            <a:picLocks noChangeAspect="1"/>
+          </p:cNvPicPr>
           <p:nvPr/>
-        </p:nvSpPr>
+        </p:nvPicPr>
+        <p:blipFill>
+          <a:blip r:embed="rId2"/>
+          <a:stretch>
+            <a:fillRect/>
+          </a:stretch>
+        </p:blipFill>
         <p:spPr>
           <a:xfrm>
-            <a:off x="640080" y="365760"/>
-            <a:ext cx="10972800" cy="822960"/>
+            <a:off x="0" y="0"/>
+            <a:ext cx="12191695" cy="6858000"/>
           </a:xfrm>
           <a:prstGeom prst="rect">
             <a:avLst/>
           </a:prstGeom>
-          <a:noFill/>
         </p:spPr>
-        <p:txBody>
-          <a:bodyPr wrap="none">
-            <a:spAutoFit/>
-          </a:bodyPr>
-          <a:lstStyle/>
-          <a:p>
-            <a:pPr>
-              <a:defRPr sz="2787" b="1">
-                <a:solidFill>
-                  <a:srgbClr val="F13A43"/>
-                </a:solidFill>
-                <a:latin typeface="Unbounded"/>
-              </a:defRPr>
-            </a:pPr>
-            <a:r>
-              <a:t>Слайд 8. Два расчёта доли кислорода</a:t>
-            </a:r>
-          </a:p>
-        </p:txBody>
-      </p:sp>
-      <p:sp>
-        <p:nvSpPr>
-          <p:cNvPr id="3" name="TextBox 2"/>
-          <p:cNvSpPr txBox="1"/>
-          <p:nvPr/>
-        </p:nvSpPr>
-        <p:spPr>
-          <a:xfrm>
-            <a:off x="731520" y="1417320"/>
-            <a:ext cx="10789920" cy="4709160"/>
-          </a:xfrm>
-          <a:prstGeom prst="rect">
-            <a:avLst/>
-          </a:prstGeom>
-          <a:noFill/>
-        </p:spPr>
-        <p:txBody>
-          <a:bodyPr wrap="square">
-            <a:spAutoFit/>
-          </a:bodyPr>
-          <a:lstStyle/>
-          <a:p>
-            <a:pPr>
-              <a:spcAft>
-                <a:spcPts val="300"/>
-              </a:spcAft>
-              <a:defRPr sz="2200">
-                <a:solidFill>
-                  <a:srgbClr val="F3F0E8"/>
-                </a:solidFill>
-                <a:latin typeface="Manrope"/>
-              </a:defRPr>
-            </a:pPr>
-            <a:r>
-              <a:t>H₂O: Mᵣ = 18; ω(O) = 16/18 ≈ 0,8889, или 88,9% после округления.</a:t>
-            </a:r>
-          </a:p>
-          <a:p>
-            <a:pPr>
-              <a:spcAft>
-                <a:spcPts val="300"/>
-              </a:spcAft>
-              <a:defRPr sz="2200">
-                <a:solidFill>
-                  <a:srgbClr val="F3F0E8"/>
-                </a:solidFill>
-                <a:latin typeface="Manrope"/>
-              </a:defRPr>
-            </a:pPr>
-            <a:r>
-              <a:t>MgO: Mᵣ = 40; ω(O) = 16/40 = 0,4 = 40%.</a:t>
-            </a:r>
-          </a:p>
-          <a:p>
-            <a:pPr>
-              <a:spcAft>
-                <a:spcPts val="300"/>
-              </a:spcAft>
-              <a:defRPr sz="2200">
-                <a:solidFill>
-                  <a:srgbClr val="F3F0E8"/>
-                </a:solidFill>
-                <a:latin typeface="Manrope"/>
-              </a:defRPr>
-            </a:pPr>
-            <a:r>
-              <a:t>Записываем процент только после умножения доли на 100%. Округляем окончательный процент до десятых, если он не целый.</a:t>
-            </a:r>
-          </a:p>
-          <a:p>
-            <a:pPr>
-              <a:spcAft>
-                <a:spcPts val="300"/>
-              </a:spcAft>
-              <a:defRPr sz="2200">
-                <a:solidFill>
-                  <a:srgbClr val="F3F0E8"/>
-                </a:solidFill>
-                <a:latin typeface="Manrope"/>
-              </a:defRPr>
-            </a:pPr>
-            <a:r>
-              <a:t>Задание: проверь долю кислорода в MgO по доле Mg.</a:t>
-            </a:r>
-          </a:p>
-        </p:txBody>
-      </p:sp>
-      <p:sp>
-        <p:nvSpPr>
-          <p:cNvPr id="4" name="TextBox 3"/>
-          <p:cNvSpPr txBox="1"/>
-          <p:nvPr/>
-        </p:nvSpPr>
-        <p:spPr>
-          <a:xfrm>
-            <a:off x="731520" y="6400800"/>
-            <a:ext cx="10789920" cy="274320"/>
-          </a:xfrm>
-          <a:prstGeom prst="rect">
-            <a:avLst/>
-          </a:prstGeom>
-          <a:noFill/>
-        </p:spPr>
-        <p:txBody>
-          <a:bodyPr wrap="none">
-            <a:spAutoFit/>
-          </a:bodyPr>
-          <a:lstStyle/>
-          <a:p>
-            <a:pPr>
-              <a:defRPr sz="1200">
-                <a:solidFill>
-                  <a:srgbClr val="F3F0E8"/>
-                </a:solidFill>
-                <a:latin typeface="Manrope"/>
-              </a:defRPr>
-            </a:pPr>
-            <a:r>
-              <a:t>Черновик для проверки преподавателем • 8</a:t>
-            </a:r>
-          </a:p>
-        </p:txBody>
-      </p:sp>
+      </p:pic>
     </p:spTree>
   </p:cSld>
   <p:clrMapOvr>
@@ -8315,17 +6672,9 @@
 </p:sld>
 </file>
 
-<file path=ppt/slides/slide9.xml><?xml version="1.0" encoding="utf-8"?>
+<file path=ppt/slides/slide23.xml><?xml version="1.0" encoding="utf-8"?>
 <p:sld xmlns:a="http://schemas.openxmlformats.org/drawingml/2006/main" xmlns:p="http://schemas.openxmlformats.org/presentationml/2006/main" xmlns:r="http://schemas.openxmlformats.org/officeDocument/2006/relationships">
   <p:cSld>
-    <p:bg>
-      <p:bgPr>
-        <a:solidFill>
-          <a:srgbClr val="151515"/>
-        </a:solidFill>
-        <a:effectLst/>
-      </p:bgPr>
-    </p:bg>
     <p:spTree>
       <p:nvGrpSpPr>
         <p:cNvPr id="1" name=""/>
@@ -8333,165 +6682,744 @@
         <p:nvPr/>
       </p:nvGrpSpPr>
       <p:grpSpPr/>
-      <p:sp>
-        <p:nvSpPr>
-          <p:cNvPr id="2" name="TextBox 1"/>
-          <p:cNvSpPr txBox="1"/>
+      <p:pic>
+        <p:nvPicPr>
+          <p:cNvPr id="2" name="Picture 1" descr="s23.png"/>
+          <p:cNvPicPr>
+            <a:picLocks noChangeAspect="1"/>
+          </p:cNvPicPr>
           <p:nvPr/>
-        </p:nvSpPr>
+        </p:nvPicPr>
+        <p:blipFill>
+          <a:blip r:embed="rId2"/>
+          <a:stretch>
+            <a:fillRect/>
+          </a:stretch>
+        </p:blipFill>
         <p:spPr>
           <a:xfrm>
-            <a:off x="640080" y="365760"/>
-            <a:ext cx="10972800" cy="822960"/>
+            <a:off x="0" y="0"/>
+            <a:ext cx="12191695" cy="6858000"/>
           </a:xfrm>
           <a:prstGeom prst="rect">
             <a:avLst/>
           </a:prstGeom>
-          <a:noFill/>
         </p:spPr>
-        <p:txBody>
-          <a:bodyPr wrap="none">
-            <a:spAutoFit/>
-          </a:bodyPr>
-          <a:lstStyle/>
-          <a:p>
-            <a:pPr>
-              <a:defRPr sz="2800" b="1">
-                <a:solidFill>
-                  <a:srgbClr val="F13A43"/>
-                </a:solidFill>
-                <a:latin typeface="Unbounded"/>
-              </a:defRPr>
-            </a:pPr>
-            <a:r>
-              <a:t>Слайд 9. Что именно сохраняется</a:t>
-            </a:r>
-          </a:p>
-        </p:txBody>
-      </p:sp>
-      <p:sp>
-        <p:nvSpPr>
-          <p:cNvPr id="3" name="TextBox 2"/>
-          <p:cNvSpPr txBox="1"/>
+      </p:pic>
+    </p:spTree>
+  </p:cSld>
+  <p:clrMapOvr>
+    <a:masterClrMapping/>
+  </p:clrMapOvr>
+</p:sld>
+</file>
+
+<file path=ppt/slides/slide24.xml><?xml version="1.0" encoding="utf-8"?>
+<p:sld xmlns:a="http://schemas.openxmlformats.org/drawingml/2006/main" xmlns:p="http://schemas.openxmlformats.org/presentationml/2006/main" xmlns:r="http://schemas.openxmlformats.org/officeDocument/2006/relationships">
+  <p:cSld>
+    <p:spTree>
+      <p:nvGrpSpPr>
+        <p:cNvPr id="1" name=""/>
+        <p:cNvGrpSpPr/>
+        <p:nvPr/>
+      </p:nvGrpSpPr>
+      <p:grpSpPr/>
+      <p:pic>
+        <p:nvPicPr>
+          <p:cNvPr id="2" name="Picture 1" descr="s24.png"/>
+          <p:cNvPicPr>
+            <a:picLocks noChangeAspect="1"/>
+          </p:cNvPicPr>
           <p:nvPr/>
-        </p:nvSpPr>
+        </p:nvPicPr>
+        <p:blipFill>
+          <a:blip r:embed="rId2"/>
+          <a:stretch>
+            <a:fillRect/>
+          </a:stretch>
+        </p:blipFill>
         <p:spPr>
           <a:xfrm>
-            <a:off x="731520" y="1417320"/>
-            <a:ext cx="10789920" cy="4709160"/>
+            <a:off x="0" y="0"/>
+            <a:ext cx="12191695" cy="6858000"/>
           </a:xfrm>
           <a:prstGeom prst="rect">
             <a:avLst/>
           </a:prstGeom>
-          <a:noFill/>
         </p:spPr>
-        <p:txBody>
-          <a:bodyPr wrap="square">
-            <a:spAutoFit/>
-          </a:bodyPr>
-          <a:lstStyle/>
-          <a:p>
-            <a:pPr>
-              <a:spcAft>
-                <a:spcPts val="300"/>
-              </a:spcAft>
-              <a:defRPr sz="2200">
-                <a:solidFill>
-                  <a:srgbClr val="F3F0E8"/>
-                </a:solidFill>
-                <a:latin typeface="Manrope"/>
-              </a:defRPr>
-            </a:pPr>
-            <a:r>
-              <a:t>В химической реакции атомы перестраиваются. В замкнутой системе сохраняется масса всех веществ:</a:t>
-            </a:r>
-          </a:p>
-          <a:p>
-            <a:pPr>
-              <a:spcAft>
-                <a:spcPts val="300"/>
-              </a:spcAft>
-              <a:defRPr sz="2200">
-                <a:solidFill>
-                  <a:srgbClr val="F3F0E8"/>
-                </a:solidFill>
-                <a:latin typeface="Manrope"/>
-              </a:defRPr>
-            </a:pPr>
-            <a:r>
-              <a:t>Сумма масс до = сумма масс после.</a:t>
-            </a:r>
-          </a:p>
-          <a:p>
-            <a:pPr>
-              <a:spcAft>
-                <a:spcPts val="300"/>
-              </a:spcAft>
-              <a:defRPr sz="2200">
-                <a:solidFill>
-                  <a:srgbClr val="F3F0E8"/>
-                </a:solidFill>
-                <a:latin typeface="Manrope"/>
-              </a:defRPr>
-            </a:pPr>
-            <a:r>
-              <a:t>Условие для расчёта: в замкнутой системе 12 г Mg и 8 г O₂ полностью превратились только в MgO. Найди массу продукта.</a:t>
-            </a:r>
-          </a:p>
-          <a:p>
-            <a:pPr>
-              <a:spcAft>
-                <a:spcPts val="300"/>
-              </a:spcAft>
-              <a:defRPr sz="2200">
-                <a:solidFill>
-                  <a:srgbClr val="F3F0E8"/>
-                </a:solidFill>
-                <a:latin typeface="Manrope"/>
-              </a:defRPr>
-            </a:pPr>
-            <a:r>
-              <a:t>Если газ ушёл из открытого сосуда, его нужно учитывать отдельно; масса остатка — не масса всей системы.</a:t>
-            </a:r>
-          </a:p>
-        </p:txBody>
-      </p:sp>
-      <p:sp>
-        <p:nvSpPr>
-          <p:cNvPr id="4" name="TextBox 3"/>
-          <p:cNvSpPr txBox="1"/>
+      </p:pic>
+    </p:spTree>
+  </p:cSld>
+  <p:clrMapOvr>
+    <a:masterClrMapping/>
+  </p:clrMapOvr>
+</p:sld>
+</file>
+
+<file path=ppt/slides/slide25.xml><?xml version="1.0" encoding="utf-8"?>
+<p:sld xmlns:a="http://schemas.openxmlformats.org/drawingml/2006/main" xmlns:p="http://schemas.openxmlformats.org/presentationml/2006/main" xmlns:r="http://schemas.openxmlformats.org/officeDocument/2006/relationships">
+  <p:cSld>
+    <p:spTree>
+      <p:nvGrpSpPr>
+        <p:cNvPr id="1" name=""/>
+        <p:cNvGrpSpPr/>
+        <p:nvPr/>
+      </p:nvGrpSpPr>
+      <p:grpSpPr/>
+      <p:pic>
+        <p:nvPicPr>
+          <p:cNvPr id="2" name="Picture 1" descr="s25.png"/>
+          <p:cNvPicPr>
+            <a:picLocks noChangeAspect="1"/>
+          </p:cNvPicPr>
           <p:nvPr/>
-        </p:nvSpPr>
+        </p:nvPicPr>
+        <p:blipFill>
+          <a:blip r:embed="rId2"/>
+          <a:stretch>
+            <a:fillRect/>
+          </a:stretch>
+        </p:blipFill>
         <p:spPr>
           <a:xfrm>
-            <a:off x="731520" y="6400800"/>
-            <a:ext cx="10789920" cy="274320"/>
+            <a:off x="0" y="0"/>
+            <a:ext cx="12191695" cy="6858000"/>
           </a:xfrm>
           <a:prstGeom prst="rect">
             <a:avLst/>
           </a:prstGeom>
-          <a:noFill/>
         </p:spPr>
-        <p:txBody>
-          <a:bodyPr wrap="none">
-            <a:spAutoFit/>
-          </a:bodyPr>
-          <a:lstStyle/>
-          <a:p>
-            <a:pPr>
-              <a:defRPr sz="1200">
-                <a:solidFill>
-                  <a:srgbClr val="F3F0E8"/>
-                </a:solidFill>
-                <a:latin typeface="Manrope"/>
-              </a:defRPr>
-            </a:pPr>
-            <a:r>
-              <a:t>Черновик для проверки преподавателем • 9</a:t>
-            </a:r>
-          </a:p>
-        </p:txBody>
-      </p:sp>
+      </p:pic>
+    </p:spTree>
+  </p:cSld>
+  <p:clrMapOvr>
+    <a:masterClrMapping/>
+  </p:clrMapOvr>
+</p:sld>
+</file>
+
+<file path=ppt/slides/slide26.xml><?xml version="1.0" encoding="utf-8"?>
+<p:sld xmlns:a="http://schemas.openxmlformats.org/drawingml/2006/main" xmlns:p="http://schemas.openxmlformats.org/presentationml/2006/main" xmlns:r="http://schemas.openxmlformats.org/officeDocument/2006/relationships">
+  <p:cSld>
+    <p:spTree>
+      <p:nvGrpSpPr>
+        <p:cNvPr id="1" name=""/>
+        <p:cNvGrpSpPr/>
+        <p:nvPr/>
+      </p:nvGrpSpPr>
+      <p:grpSpPr/>
+      <p:pic>
+        <p:nvPicPr>
+          <p:cNvPr id="2" name="Picture 1" descr="s26.png"/>
+          <p:cNvPicPr>
+            <a:picLocks noChangeAspect="1"/>
+          </p:cNvPicPr>
+          <p:nvPr/>
+        </p:nvPicPr>
+        <p:blipFill>
+          <a:blip r:embed="rId2"/>
+          <a:stretch>
+            <a:fillRect/>
+          </a:stretch>
+        </p:blipFill>
+        <p:spPr>
+          <a:xfrm>
+            <a:off x="0" y="0"/>
+            <a:ext cx="12191695" cy="6858000"/>
+          </a:xfrm>
+          <a:prstGeom prst="rect">
+            <a:avLst/>
+          </a:prstGeom>
+        </p:spPr>
+      </p:pic>
+    </p:spTree>
+  </p:cSld>
+  <p:clrMapOvr>
+    <a:masterClrMapping/>
+  </p:clrMapOvr>
+</p:sld>
+</file>
+
+<file path=ppt/slides/slide27.xml><?xml version="1.0" encoding="utf-8"?>
+<p:sld xmlns:a="http://schemas.openxmlformats.org/drawingml/2006/main" xmlns:p="http://schemas.openxmlformats.org/presentationml/2006/main" xmlns:r="http://schemas.openxmlformats.org/officeDocument/2006/relationships">
+  <p:cSld>
+    <p:spTree>
+      <p:nvGrpSpPr>
+        <p:cNvPr id="1" name=""/>
+        <p:cNvGrpSpPr/>
+        <p:nvPr/>
+      </p:nvGrpSpPr>
+      <p:grpSpPr/>
+      <p:pic>
+        <p:nvPicPr>
+          <p:cNvPr id="2" name="Picture 1" descr="s27.png"/>
+          <p:cNvPicPr>
+            <a:picLocks noChangeAspect="1"/>
+          </p:cNvPicPr>
+          <p:nvPr/>
+        </p:nvPicPr>
+        <p:blipFill>
+          <a:blip r:embed="rId2"/>
+          <a:stretch>
+            <a:fillRect/>
+          </a:stretch>
+        </p:blipFill>
+        <p:spPr>
+          <a:xfrm>
+            <a:off x="0" y="0"/>
+            <a:ext cx="12191695" cy="6858000"/>
+          </a:xfrm>
+          <a:prstGeom prst="rect">
+            <a:avLst/>
+          </a:prstGeom>
+        </p:spPr>
+      </p:pic>
+    </p:spTree>
+  </p:cSld>
+  <p:clrMapOvr>
+    <a:masterClrMapping/>
+  </p:clrMapOvr>
+</p:sld>
+</file>
+
+<file path=ppt/slides/slide28.xml><?xml version="1.0" encoding="utf-8"?>
+<p:sld xmlns:a="http://schemas.openxmlformats.org/drawingml/2006/main" xmlns:p="http://schemas.openxmlformats.org/presentationml/2006/main" xmlns:r="http://schemas.openxmlformats.org/officeDocument/2006/relationships">
+  <p:cSld>
+    <p:spTree>
+      <p:nvGrpSpPr>
+        <p:cNvPr id="1" name=""/>
+        <p:cNvGrpSpPr/>
+        <p:nvPr/>
+      </p:nvGrpSpPr>
+      <p:grpSpPr/>
+      <p:pic>
+        <p:nvPicPr>
+          <p:cNvPr id="2" name="Picture 1" descr="s28.png"/>
+          <p:cNvPicPr>
+            <a:picLocks noChangeAspect="1"/>
+          </p:cNvPicPr>
+          <p:nvPr/>
+        </p:nvPicPr>
+        <p:blipFill>
+          <a:blip r:embed="rId2"/>
+          <a:stretch>
+            <a:fillRect/>
+          </a:stretch>
+        </p:blipFill>
+        <p:spPr>
+          <a:xfrm>
+            <a:off x="0" y="0"/>
+            <a:ext cx="12191695" cy="6858000"/>
+          </a:xfrm>
+          <a:prstGeom prst="rect">
+            <a:avLst/>
+          </a:prstGeom>
+        </p:spPr>
+      </p:pic>
+    </p:spTree>
+  </p:cSld>
+  <p:clrMapOvr>
+    <a:masterClrMapping/>
+  </p:clrMapOvr>
+</p:sld>
+</file>
+
+<file path=ppt/slides/slide29.xml><?xml version="1.0" encoding="utf-8"?>
+<p:sld xmlns:a="http://schemas.openxmlformats.org/drawingml/2006/main" xmlns:p="http://schemas.openxmlformats.org/presentationml/2006/main" xmlns:r="http://schemas.openxmlformats.org/officeDocument/2006/relationships">
+  <p:cSld>
+    <p:spTree>
+      <p:nvGrpSpPr>
+        <p:cNvPr id="1" name=""/>
+        <p:cNvGrpSpPr/>
+        <p:nvPr/>
+      </p:nvGrpSpPr>
+      <p:grpSpPr/>
+      <p:pic>
+        <p:nvPicPr>
+          <p:cNvPr id="2" name="Picture 1" descr="s29.png"/>
+          <p:cNvPicPr>
+            <a:picLocks noChangeAspect="1"/>
+          </p:cNvPicPr>
+          <p:nvPr/>
+        </p:nvPicPr>
+        <p:blipFill>
+          <a:blip r:embed="rId2"/>
+          <a:stretch>
+            <a:fillRect/>
+          </a:stretch>
+        </p:blipFill>
+        <p:spPr>
+          <a:xfrm>
+            <a:off x="0" y="0"/>
+            <a:ext cx="12191695" cy="6858000"/>
+          </a:xfrm>
+          <a:prstGeom prst="rect">
+            <a:avLst/>
+          </a:prstGeom>
+        </p:spPr>
+      </p:pic>
+    </p:spTree>
+  </p:cSld>
+  <p:clrMapOvr>
+    <a:masterClrMapping/>
+  </p:clrMapOvr>
+</p:sld>
+</file>
+
+<file path=ppt/slides/slide3.xml><?xml version="1.0" encoding="utf-8"?>
+<p:sld xmlns:a="http://schemas.openxmlformats.org/drawingml/2006/main" xmlns:p="http://schemas.openxmlformats.org/presentationml/2006/main" xmlns:r="http://schemas.openxmlformats.org/officeDocument/2006/relationships">
+  <p:cSld>
+    <p:spTree>
+      <p:nvGrpSpPr>
+        <p:cNvPr id="1" name=""/>
+        <p:cNvGrpSpPr/>
+        <p:nvPr/>
+      </p:nvGrpSpPr>
+      <p:grpSpPr/>
+      <p:pic>
+        <p:nvPicPr>
+          <p:cNvPr id="2" name="Picture 1" descr="s03.png"/>
+          <p:cNvPicPr>
+            <a:picLocks noChangeAspect="1"/>
+          </p:cNvPicPr>
+          <p:nvPr/>
+        </p:nvPicPr>
+        <p:blipFill>
+          <a:blip r:embed="rId2"/>
+          <a:stretch>
+            <a:fillRect/>
+          </a:stretch>
+        </p:blipFill>
+        <p:spPr>
+          <a:xfrm>
+            <a:off x="0" y="0"/>
+            <a:ext cx="12191695" cy="6858000"/>
+          </a:xfrm>
+          <a:prstGeom prst="rect">
+            <a:avLst/>
+          </a:prstGeom>
+        </p:spPr>
+      </p:pic>
+    </p:spTree>
+  </p:cSld>
+  <p:clrMapOvr>
+    <a:masterClrMapping/>
+  </p:clrMapOvr>
+</p:sld>
+</file>
+
+<file path=ppt/slides/slide30.xml><?xml version="1.0" encoding="utf-8"?>
+<p:sld xmlns:a="http://schemas.openxmlformats.org/drawingml/2006/main" xmlns:p="http://schemas.openxmlformats.org/presentationml/2006/main" xmlns:r="http://schemas.openxmlformats.org/officeDocument/2006/relationships">
+  <p:cSld>
+    <p:spTree>
+      <p:nvGrpSpPr>
+        <p:cNvPr id="1" name=""/>
+        <p:cNvGrpSpPr/>
+        <p:nvPr/>
+      </p:nvGrpSpPr>
+      <p:grpSpPr/>
+      <p:pic>
+        <p:nvPicPr>
+          <p:cNvPr id="2" name="Picture 1" descr="s30.png"/>
+          <p:cNvPicPr>
+            <a:picLocks noChangeAspect="1"/>
+          </p:cNvPicPr>
+          <p:nvPr/>
+        </p:nvPicPr>
+        <p:blipFill>
+          <a:blip r:embed="rId2"/>
+          <a:stretch>
+            <a:fillRect/>
+          </a:stretch>
+        </p:blipFill>
+        <p:spPr>
+          <a:xfrm>
+            <a:off x="0" y="0"/>
+            <a:ext cx="12191695" cy="6858000"/>
+          </a:xfrm>
+          <a:prstGeom prst="rect">
+            <a:avLst/>
+          </a:prstGeom>
+        </p:spPr>
+      </p:pic>
+    </p:spTree>
+  </p:cSld>
+  <p:clrMapOvr>
+    <a:masterClrMapping/>
+  </p:clrMapOvr>
+</p:sld>
+</file>
+
+<file path=ppt/slides/slide31.xml><?xml version="1.0" encoding="utf-8"?>
+<p:sld xmlns:a="http://schemas.openxmlformats.org/drawingml/2006/main" xmlns:p="http://schemas.openxmlformats.org/presentationml/2006/main" xmlns:r="http://schemas.openxmlformats.org/officeDocument/2006/relationships">
+  <p:cSld>
+    <p:spTree>
+      <p:nvGrpSpPr>
+        <p:cNvPr id="1" name=""/>
+        <p:cNvGrpSpPr/>
+        <p:nvPr/>
+      </p:nvGrpSpPr>
+      <p:grpSpPr/>
+      <p:pic>
+        <p:nvPicPr>
+          <p:cNvPr id="2" name="Picture 1" descr="s31.png"/>
+          <p:cNvPicPr>
+            <a:picLocks noChangeAspect="1"/>
+          </p:cNvPicPr>
+          <p:nvPr/>
+        </p:nvPicPr>
+        <p:blipFill>
+          <a:blip r:embed="rId2"/>
+          <a:stretch>
+            <a:fillRect/>
+          </a:stretch>
+        </p:blipFill>
+        <p:spPr>
+          <a:xfrm>
+            <a:off x="0" y="0"/>
+            <a:ext cx="12191695" cy="6858000"/>
+          </a:xfrm>
+          <a:prstGeom prst="rect">
+            <a:avLst/>
+          </a:prstGeom>
+        </p:spPr>
+      </p:pic>
+    </p:spTree>
+  </p:cSld>
+  <p:clrMapOvr>
+    <a:masterClrMapping/>
+  </p:clrMapOvr>
+</p:sld>
+</file>
+
+<file path=ppt/slides/slide32.xml><?xml version="1.0" encoding="utf-8"?>
+<p:sld xmlns:a="http://schemas.openxmlformats.org/drawingml/2006/main" xmlns:p="http://schemas.openxmlformats.org/presentationml/2006/main" xmlns:r="http://schemas.openxmlformats.org/officeDocument/2006/relationships">
+  <p:cSld>
+    <p:spTree>
+      <p:nvGrpSpPr>
+        <p:cNvPr id="1" name=""/>
+        <p:cNvGrpSpPr/>
+        <p:nvPr/>
+      </p:nvGrpSpPr>
+      <p:grpSpPr/>
+      <p:pic>
+        <p:nvPicPr>
+          <p:cNvPr id="2" name="Picture 1" descr="s32.png"/>
+          <p:cNvPicPr>
+            <a:picLocks noChangeAspect="1"/>
+          </p:cNvPicPr>
+          <p:nvPr/>
+        </p:nvPicPr>
+        <p:blipFill>
+          <a:blip r:embed="rId2"/>
+          <a:stretch>
+            <a:fillRect/>
+          </a:stretch>
+        </p:blipFill>
+        <p:spPr>
+          <a:xfrm>
+            <a:off x="0" y="0"/>
+            <a:ext cx="12191695" cy="6858000"/>
+          </a:xfrm>
+          <a:prstGeom prst="rect">
+            <a:avLst/>
+          </a:prstGeom>
+        </p:spPr>
+      </p:pic>
+    </p:spTree>
+  </p:cSld>
+  <p:clrMapOvr>
+    <a:masterClrMapping/>
+  </p:clrMapOvr>
+</p:sld>
+</file>
+
+<file path=ppt/slides/slide33.xml><?xml version="1.0" encoding="utf-8"?>
+<p:sld xmlns:a="http://schemas.openxmlformats.org/drawingml/2006/main" xmlns:p="http://schemas.openxmlformats.org/presentationml/2006/main" xmlns:r="http://schemas.openxmlformats.org/officeDocument/2006/relationships">
+  <p:cSld>
+    <p:spTree>
+      <p:nvGrpSpPr>
+        <p:cNvPr id="1" name=""/>
+        <p:cNvGrpSpPr/>
+        <p:nvPr/>
+      </p:nvGrpSpPr>
+      <p:grpSpPr/>
+      <p:pic>
+        <p:nvPicPr>
+          <p:cNvPr id="2" name="Picture 1" descr="s33.png"/>
+          <p:cNvPicPr>
+            <a:picLocks noChangeAspect="1"/>
+          </p:cNvPicPr>
+          <p:nvPr/>
+        </p:nvPicPr>
+        <p:blipFill>
+          <a:blip r:embed="rId2"/>
+          <a:stretch>
+            <a:fillRect/>
+          </a:stretch>
+        </p:blipFill>
+        <p:spPr>
+          <a:xfrm>
+            <a:off x="0" y="0"/>
+            <a:ext cx="12191695" cy="6858000"/>
+          </a:xfrm>
+          <a:prstGeom prst="rect">
+            <a:avLst/>
+          </a:prstGeom>
+        </p:spPr>
+      </p:pic>
+    </p:spTree>
+  </p:cSld>
+  <p:clrMapOvr>
+    <a:masterClrMapping/>
+  </p:clrMapOvr>
+</p:sld>
+</file>
+
+<file path=ppt/slides/slide4.xml><?xml version="1.0" encoding="utf-8"?>
+<p:sld xmlns:a="http://schemas.openxmlformats.org/drawingml/2006/main" xmlns:p="http://schemas.openxmlformats.org/presentationml/2006/main" xmlns:r="http://schemas.openxmlformats.org/officeDocument/2006/relationships">
+  <p:cSld>
+    <p:spTree>
+      <p:nvGrpSpPr>
+        <p:cNvPr id="1" name=""/>
+        <p:cNvGrpSpPr/>
+        <p:nvPr/>
+      </p:nvGrpSpPr>
+      <p:grpSpPr/>
+      <p:pic>
+        <p:nvPicPr>
+          <p:cNvPr id="2" name="Picture 1" descr="s04.png"/>
+          <p:cNvPicPr>
+            <a:picLocks noChangeAspect="1"/>
+          </p:cNvPicPr>
+          <p:nvPr/>
+        </p:nvPicPr>
+        <p:blipFill>
+          <a:blip r:embed="rId2"/>
+          <a:stretch>
+            <a:fillRect/>
+          </a:stretch>
+        </p:blipFill>
+        <p:spPr>
+          <a:xfrm>
+            <a:off x="0" y="0"/>
+            <a:ext cx="12191695" cy="6858000"/>
+          </a:xfrm>
+          <a:prstGeom prst="rect">
+            <a:avLst/>
+          </a:prstGeom>
+        </p:spPr>
+      </p:pic>
+    </p:spTree>
+  </p:cSld>
+  <p:clrMapOvr>
+    <a:masterClrMapping/>
+  </p:clrMapOvr>
+</p:sld>
+</file>
+
+<file path=ppt/slides/slide5.xml><?xml version="1.0" encoding="utf-8"?>
+<p:sld xmlns:a="http://schemas.openxmlformats.org/drawingml/2006/main" xmlns:p="http://schemas.openxmlformats.org/presentationml/2006/main" xmlns:r="http://schemas.openxmlformats.org/officeDocument/2006/relationships">
+  <p:cSld>
+    <p:spTree>
+      <p:nvGrpSpPr>
+        <p:cNvPr id="1" name=""/>
+        <p:cNvGrpSpPr/>
+        <p:nvPr/>
+      </p:nvGrpSpPr>
+      <p:grpSpPr/>
+      <p:pic>
+        <p:nvPicPr>
+          <p:cNvPr id="2" name="Picture 1" descr="s05.png"/>
+          <p:cNvPicPr>
+            <a:picLocks noChangeAspect="1"/>
+          </p:cNvPicPr>
+          <p:nvPr/>
+        </p:nvPicPr>
+        <p:blipFill>
+          <a:blip r:embed="rId2"/>
+          <a:stretch>
+            <a:fillRect/>
+          </a:stretch>
+        </p:blipFill>
+        <p:spPr>
+          <a:xfrm>
+            <a:off x="0" y="0"/>
+            <a:ext cx="12191695" cy="6858000"/>
+          </a:xfrm>
+          <a:prstGeom prst="rect">
+            <a:avLst/>
+          </a:prstGeom>
+        </p:spPr>
+      </p:pic>
+    </p:spTree>
+  </p:cSld>
+  <p:clrMapOvr>
+    <a:masterClrMapping/>
+  </p:clrMapOvr>
+</p:sld>
+</file>
+
+<file path=ppt/slides/slide6.xml><?xml version="1.0" encoding="utf-8"?>
+<p:sld xmlns:a="http://schemas.openxmlformats.org/drawingml/2006/main" xmlns:p="http://schemas.openxmlformats.org/presentationml/2006/main" xmlns:r="http://schemas.openxmlformats.org/officeDocument/2006/relationships">
+  <p:cSld>
+    <p:spTree>
+      <p:nvGrpSpPr>
+        <p:cNvPr id="1" name=""/>
+        <p:cNvGrpSpPr/>
+        <p:nvPr/>
+      </p:nvGrpSpPr>
+      <p:grpSpPr/>
+      <p:pic>
+        <p:nvPicPr>
+          <p:cNvPr id="2" name="Picture 1" descr="s06.png"/>
+          <p:cNvPicPr>
+            <a:picLocks noChangeAspect="1"/>
+          </p:cNvPicPr>
+          <p:nvPr/>
+        </p:nvPicPr>
+        <p:blipFill>
+          <a:blip r:embed="rId2"/>
+          <a:stretch>
+            <a:fillRect/>
+          </a:stretch>
+        </p:blipFill>
+        <p:spPr>
+          <a:xfrm>
+            <a:off x="0" y="0"/>
+            <a:ext cx="12191695" cy="6858000"/>
+          </a:xfrm>
+          <a:prstGeom prst="rect">
+            <a:avLst/>
+          </a:prstGeom>
+        </p:spPr>
+      </p:pic>
+    </p:spTree>
+  </p:cSld>
+  <p:clrMapOvr>
+    <a:masterClrMapping/>
+  </p:clrMapOvr>
+</p:sld>
+</file>
+
+<file path=ppt/slides/slide7.xml><?xml version="1.0" encoding="utf-8"?>
+<p:sld xmlns:a="http://schemas.openxmlformats.org/drawingml/2006/main" xmlns:p="http://schemas.openxmlformats.org/presentationml/2006/main" xmlns:r="http://schemas.openxmlformats.org/officeDocument/2006/relationships">
+  <p:cSld>
+    <p:spTree>
+      <p:nvGrpSpPr>
+        <p:cNvPr id="1" name=""/>
+        <p:cNvGrpSpPr/>
+        <p:nvPr/>
+      </p:nvGrpSpPr>
+      <p:grpSpPr/>
+      <p:pic>
+        <p:nvPicPr>
+          <p:cNvPr id="2" name="Picture 1" descr="s07.png"/>
+          <p:cNvPicPr>
+            <a:picLocks noChangeAspect="1"/>
+          </p:cNvPicPr>
+          <p:nvPr/>
+        </p:nvPicPr>
+        <p:blipFill>
+          <a:blip r:embed="rId2"/>
+          <a:stretch>
+            <a:fillRect/>
+          </a:stretch>
+        </p:blipFill>
+        <p:spPr>
+          <a:xfrm>
+            <a:off x="0" y="0"/>
+            <a:ext cx="12191695" cy="6858000"/>
+          </a:xfrm>
+          <a:prstGeom prst="rect">
+            <a:avLst/>
+          </a:prstGeom>
+        </p:spPr>
+      </p:pic>
+    </p:spTree>
+  </p:cSld>
+  <p:clrMapOvr>
+    <a:masterClrMapping/>
+  </p:clrMapOvr>
+</p:sld>
+</file>
+
+<file path=ppt/slides/slide8.xml><?xml version="1.0" encoding="utf-8"?>
+<p:sld xmlns:a="http://schemas.openxmlformats.org/drawingml/2006/main" xmlns:p="http://schemas.openxmlformats.org/presentationml/2006/main" xmlns:r="http://schemas.openxmlformats.org/officeDocument/2006/relationships">
+  <p:cSld>
+    <p:spTree>
+      <p:nvGrpSpPr>
+        <p:cNvPr id="1" name=""/>
+        <p:cNvGrpSpPr/>
+        <p:nvPr/>
+      </p:nvGrpSpPr>
+      <p:grpSpPr/>
+      <p:pic>
+        <p:nvPicPr>
+          <p:cNvPr id="2" name="Picture 1" descr="s08.png"/>
+          <p:cNvPicPr>
+            <a:picLocks noChangeAspect="1"/>
+          </p:cNvPicPr>
+          <p:nvPr/>
+        </p:nvPicPr>
+        <p:blipFill>
+          <a:blip r:embed="rId2"/>
+          <a:stretch>
+            <a:fillRect/>
+          </a:stretch>
+        </p:blipFill>
+        <p:spPr>
+          <a:xfrm>
+            <a:off x="0" y="0"/>
+            <a:ext cx="12191695" cy="6858000"/>
+          </a:xfrm>
+          <a:prstGeom prst="rect">
+            <a:avLst/>
+          </a:prstGeom>
+        </p:spPr>
+      </p:pic>
+    </p:spTree>
+  </p:cSld>
+  <p:clrMapOvr>
+    <a:masterClrMapping/>
+  </p:clrMapOvr>
+</p:sld>
+</file>
+
+<file path=ppt/slides/slide9.xml><?xml version="1.0" encoding="utf-8"?>
+<p:sld xmlns:a="http://schemas.openxmlformats.org/drawingml/2006/main" xmlns:p="http://schemas.openxmlformats.org/presentationml/2006/main" xmlns:r="http://schemas.openxmlformats.org/officeDocument/2006/relationships">
+  <p:cSld>
+    <p:spTree>
+      <p:nvGrpSpPr>
+        <p:cNvPr id="1" name=""/>
+        <p:cNvGrpSpPr/>
+        <p:nvPr/>
+      </p:nvGrpSpPr>
+      <p:grpSpPr/>
+      <p:pic>
+        <p:nvPicPr>
+          <p:cNvPr id="2" name="Picture 1" descr="s09.png"/>
+          <p:cNvPicPr>
+            <a:picLocks noChangeAspect="1"/>
+          </p:cNvPicPr>
+          <p:nvPr/>
+        </p:nvPicPr>
+        <p:blipFill>
+          <a:blip r:embed="rId2"/>
+          <a:stretch>
+            <a:fillRect/>
+          </a:stretch>
+        </p:blipFill>
+        <p:spPr>
+          <a:xfrm>
+            <a:off x="0" y="0"/>
+            <a:ext cx="12191695" cy="6858000"/>
+          </a:xfrm>
+          <a:prstGeom prst="rect">
+            <a:avLst/>
+          </a:prstGeom>
+        </p:spPr>
+      </p:pic>
     </p:spTree>
   </p:cSld>
   <p:clrMapOvr>
